--- a/docs/digital-guard/presentation/DIGITAL_GUARD_기획발표.pptx
+++ b/docs/digital-guard/presentation/DIGITAL_GUARD_기획발표.pptx
@@ -115,26 +115,26 @@
   <p:extLst>
     <p:ext uri="{521415D9-36F7-43E2-AB2F-B90AF26B5E84}">
       <p14:sectionLst xmlns:p14="http://schemas.microsoft.com/office/powerpoint/2010/main">
-        <p14:section name="게임 소개" id="{22569737-c896-1f61-f81f-d451c8136292}">
+        <p14:section name="게임 소개" id="{7a54e514-6d30-2685-22c0-4c39a223eb91}">
           <p14:sldIdLst>
             <p14:sldId id="256"/>
           </p14:sldIdLst>
         </p14:section>
-        <p14:section name="경쟁작 분석" id="{e69d868d-591d-3d31-9ed1-6fc4bf7dde26}">
+        <p14:section name="경쟁작 분석" id="{f7b515f0-bedd-8fcd-f933-487ad8d4ef17}">
           <p14:sldIdLst>
             <p14:sldId id="257"/>
             <p14:sldId id="258"/>
             <p14:sldId id="259"/>
           </p14:sldIdLst>
         </p14:section>
-        <p14:section name="게임 시스템" id="{5f1864da-87e4-9187-a064-8f85664dfc81}">
+        <p14:section name="게임 시스템" id="{1d1a67ad-316d-53f6-f80f-e2e94a1c0517}">
           <p14:sldIdLst>
             <p14:sldId id="260"/>
             <p14:sldId id="261"/>
             <p14:sldId id="262"/>
           </p14:sldIdLst>
         </p14:section>
-        <p14:section name="비주얼·제작·결론" id="{f616243f-7bc2-c1c0-d223-3a971f4d499f}">
+        <p14:section name="비주얼·제작·결론" id="{545d55b8-6cfc-394f-9f90-f6c198efa7a7}">
           <p14:sldIdLst>
             <p14:sldId id="263"/>
             <p14:sldId id="264"/>
@@ -720,7 +720,7 @@
           <a:p>
             <a:r>
               <a:rPr lang="en-US" dirty="0"/>
-              <a:t>세 제품과 DIGITAL GUARD를 같은 기준으로 비교했습니다. Papers, Please는 정보 대조가 핵심이지만 교육용이 아닌 성인 중심 서사 게임이고, Jigsaw 퀴즈는 메일 한 통 단위의 정상·피싱 분류에 집중합니다. DIGITAL GUARD는 여러 문서를 대조해 승인·거부·추가 확인을 고르는 판단을 청소년용 세로 화면 모바일 경험으로 설계했다는 점이 다릅니다. (출처: pocketgamer.com/papers-please/ios-android-release-date-august-5th/ · darkreading.com/cyberattacks-data-breaches/google-creates-online-phishing-quiz · hackerdna.com/blog/cyberstart — Jigsaw 퀴즈의 현재 접속 가능 여부는 발표 전 확인 권장)</a:t>
+              <a:t>세 제품과 DIGITAL GUARD를 같은 기준으로 비교했습니다. Papers, Please는 정보 대조가 핵심이지만 교육용이 아닌 성인 중심 서사 게임이고, Jigsaw 퀴즈는 메일 한 통 단위의 정상·피싱 분류에 집중합니다. DIGITAL GUARD는 여러 문서를 대조해 승인·거부·추가 확인을 고르는 판단을 어린이부터 어르신까지 쓰는 세로 화면 모바일 경험으로 설계했다는 점이 다릅니다. (출처: pocketgamer.com/papers-please/ios-android-release-date-august-5th/ · darkreading.com/cyberattacks-data-breaches/google-creates-online-phishing-quiz · hackerdna.com/blog/cyberstart — Jigsaw 퀴즈의 현재 접속 가능 여부는 발표 전 확인 권장)</a:t>
             </a:r>
             <a:endParaRPr lang="en-US" dirty="0"/>
           </a:p>
@@ -896,7 +896,7 @@
           <a:p>
             <a:r>
               <a:rPr lang="en-US" dirty="0"/>
-              <a:t>한 사건은 접수, 문서 확인, 단서 비교, 판정, 결과 해설의 다섯 단계로 진행됩니다. 예를 들어 학교 지원팀을 사칭한 메시지가 오면, 플레이어는 발신 주소를 등록된 연락처와 대조해 도메인이 다르다는 것을 찾고, 비밀번호 입력 요구까지 확인한 뒤 거부합니다. 결과 화면에서는 어떤 단서를 찾았는지와 안전한 대응 방법을 바로 배웁니다. 아래 화면들은 아직 개발 전인 예상 UI입니다.</a:t>
+              <a:t>한 사건은 접수, 문서 확인, 단서 비교, 판정, 결과 해설의 다섯 단계로 진행됩니다. 예를 들어 택배회사를 사칭한 문자가 오면, 플레이어는 링크 주소를 공식 연락처와 대조해 도메인이 다르다는 것을 찾고, 할머니의 기록에 기다리는 택배가 없다는 것까지 확인한 뒤 거부하고 신고합니다. 아래 화면은 Unity 구현 전에 만든 도트 스타일 HTML 시제품을 실제로 플레이하며 캡처한 것입니다.</a:t>
             </a:r>
             <a:endParaRPr lang="en-US" dirty="0"/>
           </a:p>
@@ -984,7 +984,7 @@
           <a:p>
             <a:r>
               <a:rPr lang="en-US" dirty="0"/>
-              <a:t>이 슬라이드는 스마트폰에서의 실제 플레이 흐름을 보여 주는 예상 UI입니다. 사건 알림을 받고 검토를 시작하면, 메시지의 발신자 필드를 탭해 자세히 보고, 비교 모드에서 등록된 연락처와 대조해 불일치를 찾습니다. 마지막으로 화면 하단의 큰 승인·거부·추가 확인 버튼으로 판정하면 바로 결과와 해설이 나옵니다. 모든 핵심 조작은 한 손 엄지로 닿는 하단에 배치했습니다.</a:t>
+              <a:t>이 화면들은 도트 스타일로 만든 HTML 시제품을 스마트폰 크기로 실제 플레이하며 캡처한 것입니다. Unity 게임은 아직 구현 전입니다. 아침 브리핑에서 오늘의 조건을 확인하고 업무를 시작하면, 요청 카드와 문서 탭, 요청자의 내 기록을 살펴봅니다. 두 정보를 대조하면 일치·불일치 단서가 생기고, 화면 하단의 큰 버튼으로 판정한 뒤 신고 여부까지 고르면 결과와 해설이 나옵니다.</a:t>
             </a:r>
             <a:endParaRPr lang="en-US" dirty="0"/>
           </a:p>
@@ -1160,7 +1160,7 @@
           <a:p>
             <a:r>
               <a:rPr lang="en-US" dirty="0"/>
-              <a:t>비주얼은 두 가지 테마로 준비합니다. A안은 네이비와 청록 중심의 깔끔한 모던 미니멀, B안은 레트로 단말기와 픽셀 캐릭터가 있는 2D 도트 스타일입니다. 두 테마는 별개의 게임이 아니라 사례 데이터, 규칙 판정, 점수와 저장 시스템을 공유하고 그래픽 자산만 바꾸는 구조입니다. 제작은 핵심 프로토타입부터 모바일 QA까지 다섯 단계로 진행하며, 구체 기간은 인력과 범위가 확정되면 산정하겠습니다.</a:t>
+              <a:t>비주얼은 두 가지 테마로 준비하며, 2D 도트 스타일을 기본 시안으로 정했습니다. 오른쪽 화면은 도트 테마 HTML 시제품의 실제 화면이고, 왼쪽 모던 미니멀은 대체 테마의 목업입니다. 두 테마는 별개의 게임이 아니라 사례 데이터, 규칙 판정, 점수와 저장 시스템을 공유하고 그래픽 자산만 바꾸는 구조입니다. 제작은 다섯 단계로 진행하며 첫 단계인 화면 시제품은 HTML로 먼저 만들었습니다. 구체 기간은 인력과 범위가 확정되면 산정하겠습니다.</a:t>
             </a:r>
             <a:endParaRPr lang="en-US" dirty="0"/>
           </a:p>
@@ -2157,7 +2157,7 @@
         <p:spPr>
           <a:xfrm>
             <a:off x="2468880" y="4800600"/>
-            <a:ext cx="2103120" cy="347472"/>
+            <a:ext cx="2377440" cy="347472"/>
           </a:xfrm>
           <a:prstGeom prst="roundRect">
             <a:avLst>
@@ -2184,7 +2184,7 @@
         <p:spPr>
           <a:xfrm>
             <a:off x="2468880" y="4800600"/>
-            <a:ext cx="2103120" cy="347472"/>
+            <a:ext cx="2377440" cy="347472"/>
           </a:xfrm>
           <a:prstGeom prst="rect">
             <a:avLst/>
@@ -2208,7 +2208,7 @@
                 <a:ea typeface="맑은 고딕" pitchFamily="34" charset="-122"/>
                 <a:cs typeface="맑은 고딕" pitchFamily="34" charset="-120"/>
               </a:rPr>
-              <a:t>세로 화면 · 터치 조작</a:t>
+              <a:t>전연령 · 세로 화면 · 터치</a:t>
             </a:r>
             <a:endParaRPr lang="ko-KR" sz="1200" dirty="0"/>
           </a:p>
@@ -3817,7 +3817,7 @@
                 <a:ea typeface="맑은 고딕" pitchFamily="34" charset="-122"/>
                 <a:cs typeface="맑은 고딕" pitchFamily="34" charset="-120"/>
               </a:rPr>
-              <a:t>여러 문서를 대조해 승인·거부·추가 확인을 고르는 청소년용 모바일 경험이 DIGITAL GUARD의 목표다.</a:t>
+              <a:t>여러 문서를 대조해 승인·거부·추가 확인을 고르는 모든 세대를 위한 모바일 경험이 DIGITAL GUARD의 목표다.</a:t>
             </a:r>
             <a:endParaRPr lang="ko-KR" sz="1600" dirty="0"/>
           </a:p>
@@ -6005,7 +6005,7 @@
                           <a:ea typeface="맑은 고딕" pitchFamily="34" charset="-122"/>
                           <a:cs typeface="맑은 고딕" pitchFamily="34" charset="-120"/>
                         </a:rPr>
-                        <a:t>청소년 디지털 안전 판단</a:t>
+                        <a:t>전연령 디지털 안전 판단</a:t>
                       </a:r>
                       <a:endParaRPr lang="ko-KR" sz="1400" dirty="0">
                         <a:latin typeface="맑은 고딕" charset="0"/>
@@ -6802,7 +6802,7 @@
                 <a:ea typeface="맑은 고딕" pitchFamily="34" charset="-122"/>
                 <a:cs typeface="맑은 고딕" pitchFamily="34" charset="-120"/>
               </a:rPr>
-              <a:t>핵심 차별점 — 복수 문서 대조 × 3단 판정 × 세로형 터치 UX를 청소년 디지털 안전 판단에 결합</a:t>
+              <a:t>핵심 차별점 — 복수 문서 대조 × 3단 판정 × 세로형 터치 UX를 모든 세대의 디지털 안전 판단에 결합</a:t>
             </a:r>
             <a:endParaRPr lang="ko-KR" sz="1800" dirty="0"/>
           </a:p>
@@ -8037,7 +8037,7 @@
                 <a:ea typeface="맑은 고딕" pitchFamily="34" charset="-122"/>
                 <a:cs typeface="맑은 고딕" pitchFamily="34" charset="-120"/>
               </a:rPr>
-              <a:t>개인정보·피싱·공유 권한을</a:t>
+              <a:t>택배·가족 사칭부터 공유 권한</a:t>
             </a:r>
             <a:endParaRPr lang="ko-KR" sz="1500" dirty="0"/>
           </a:p>
@@ -8054,7 +8054,7 @@
                 <a:ea typeface="맑은 고딕" pitchFamily="34" charset="-122"/>
                 <a:cs typeface="맑은 고딕" pitchFamily="34" charset="-120"/>
               </a:rPr>
-              <a:t>가상 사건으로 익힌다</a:t>
+              <a:t>까지 생활 속 사건으로 익힌다</a:t>
             </a:r>
             <a:endParaRPr lang="ko-KR" sz="1500" dirty="0"/>
           </a:p>
@@ -8243,8 +8243,8 @@
         </p:nvSpPr>
         <p:spPr>
           <a:xfrm>
-            <a:off x="9902952" y="521208"/>
-            <a:ext cx="1737360" cy="310896"/>
+            <a:off x="8988552" y="521208"/>
+            <a:ext cx="2651760" cy="310896"/>
           </a:xfrm>
           <a:prstGeom prst="roundRect">
             <a:avLst>
@@ -8265,8 +8265,8 @@
         </p:nvSpPr>
         <p:spPr>
           <a:xfrm>
-            <a:off x="9902952" y="521208"/>
-            <a:ext cx="1737360" cy="310896"/>
+            <a:off x="8988552" y="521208"/>
+            <a:ext cx="2651760" cy="310896"/>
           </a:xfrm>
           <a:prstGeom prst="rect">
             <a:avLst/>
@@ -8290,7 +8290,7 @@
                 <a:ea typeface="맑은 고딕" pitchFamily="34" charset="-122"/>
                 <a:cs typeface="맑은 고딕" pitchFamily="34" charset="-120"/>
               </a:rPr>
-              <a:t>UI 목업 · 예상안</a:t>
+              <a:t>HTML 시제품 화면 · Unity 구현 전</a:t>
             </a:r>
             <a:endParaRPr lang="ko-KR" sz="1100" dirty="0"/>
           </a:p>
@@ -8473,7 +8473,7 @@
                 <a:ea typeface="맑은 고딕" pitchFamily="34" charset="-122"/>
                 <a:cs typeface="맑은 고딕" pitchFamily="34" charset="-120"/>
               </a:rPr>
-              <a:t>새 사건 알림이</a:t>
+              <a:t>브리핑 후 요청 카드가</a:t>
             </a:r>
             <a:endParaRPr lang="ko-KR" sz="1300" dirty="0"/>
           </a:p>
@@ -8543,92 +8543,9 @@
           </a:ln>
         </p:spPr>
       </p:sp>
-      <p:sp>
-        <p:nvSpPr>
-          <p:cNvPr id="13" name="Shape 10"/>
-          <p:cNvSpPr/>
-          <p:nvPr/>
-        </p:nvSpPr>
-        <p:spPr>
-          <a:xfrm>
-            <a:off x="667512" y="2980944"/>
-            <a:ext cx="1819656" cy="2368296"/>
-          </a:xfrm>
-          <a:prstGeom prst="roundRect">
-            <a:avLst>
-              <a:gd name="adj" fmla="val 6030"/>
-            </a:avLst>
-          </a:prstGeom>
-          <a:solidFill>
-            <a:srgbClr val="14284B"/>
-          </a:solidFill>
-          <a:ln/>
-        </p:spPr>
-      </p:sp>
-      <p:sp>
-        <p:nvSpPr>
-          <p:cNvPr id="14" name="Text 11"/>
-          <p:cNvSpPr txBox="1"/>
-          <p:nvPr/>
-        </p:nvSpPr>
-        <p:spPr>
-          <a:xfrm>
-            <a:off x="777240" y="3090672"/>
-            <a:ext cx="1600200" cy="201168"/>
-          </a:xfrm>
-          <a:prstGeom prst="rect">
-            <a:avLst/>
-          </a:prstGeom>
-          <a:noFill/>
-          <a:ln/>
-        </p:spPr>
-        <p:txBody>
-          <a:bodyPr wrap="square" lIns="0" tIns="0" rIns="0" bIns="0" rtlCol="0" anchor="t"/>
-          <a:lstStyle/>
-          <a:p>
-            <a:pPr indent="0" marL="0">
-              <a:buNone/>
-            </a:pPr>
-            <a:r>
-              <a:rPr lang="ko-KR" altLang="en-US" sz="900" dirty="0">
-                <a:solidFill>
-                  <a:srgbClr val="A9BCD3"/>
-                </a:solidFill>
-                <a:latin typeface="맑은 고딕" pitchFamily="34" charset="0"/>
-                <a:ea typeface="맑은 고딕" pitchFamily="34" charset="-122"/>
-                <a:cs typeface="맑은 고딕" pitchFamily="34" charset="-120"/>
-              </a:rPr>
-              <a:t>누리 디지털 안전 센터</a:t>
-            </a:r>
-            <a:endParaRPr lang="ko-KR" sz="900" dirty="0"/>
-          </a:p>
-        </p:txBody>
-      </p:sp>
-      <p:sp>
-        <p:nvSpPr>
-          <p:cNvPr id="15" name="Shape 12"/>
-          <p:cNvSpPr/>
-          <p:nvPr/>
-        </p:nvSpPr>
-        <p:spPr>
-          <a:xfrm>
-            <a:off x="777240" y="3392424"/>
-            <a:ext cx="1600200" cy="1097280"/>
-          </a:xfrm>
-          <a:prstGeom prst="roundRect">
-            <a:avLst>
-              <a:gd name="adj" fmla="val 8333"/>
-            </a:avLst>
-          </a:prstGeom>
-          <a:solidFill>
-            <a:srgbClr val="FFFFFF"/>
-          </a:solidFill>
-          <a:ln/>
-        </p:spPr>
-      </p:sp>
       <p:pic>
         <p:nvPicPr>
-          <p:cNvPr id="16" name="Image 1" descr="preencoded.png">    </p:cNvPr>
+          <p:cNvPr id="13" name="Image 1" descr="HTML 시제품 화면: 사건 접수">    </p:cNvPr>
           <p:cNvPicPr>
             <a:picLocks noChangeAspect="1"/>
           </p:cNvPicPr>
@@ -8642,8 +8559,8 @@
         </p:blipFill>
         <p:spPr>
           <a:xfrm>
-            <a:off x="886968" y="3502152"/>
-            <a:ext cx="237744" cy="237744"/>
+            <a:off x="667512" y="2980944"/>
+            <a:ext cx="1819656" cy="2368296"/>
           </a:xfrm>
           <a:prstGeom prst="rect">
             <a:avLst/>
@@ -8652,114 +8569,17 @@
       </p:pic>
       <p:sp>
         <p:nvSpPr>
-          <p:cNvPr id="17" name="Text 13"/>
-          <p:cNvSpPr txBox="1"/>
-          <p:nvPr/>
-        </p:nvSpPr>
-        <p:spPr>
-          <a:xfrm>
-            <a:off x="1197864" y="3511296"/>
-            <a:ext cx="1188720" cy="228600"/>
-          </a:xfrm>
-          <a:prstGeom prst="rect">
-            <a:avLst/>
-          </a:prstGeom>
-          <a:noFill/>
-          <a:ln/>
-        </p:spPr>
-        <p:txBody>
-          <a:bodyPr wrap="square" lIns="0" tIns="0" rIns="0" bIns="0" rtlCol="0" anchor="t"/>
-          <a:lstStyle/>
-          <a:p>
-            <a:pPr indent="0" marL="0">
-              <a:buNone/>
-            </a:pPr>
-            <a:r>
-              <a:rPr lang="ko-KR" altLang="en-US" sz="1000" b="1" dirty="0">
-                <a:solidFill>
-                  <a:srgbClr val="1C2433"/>
-                </a:solidFill>
-                <a:latin typeface="맑은 고딕" pitchFamily="34" charset="0"/>
-                <a:ea typeface="맑은 고딕" pitchFamily="34" charset="-122"/>
-                <a:cs typeface="맑은 고딕" pitchFamily="34" charset="-120"/>
-              </a:rPr>
-              <a:t>새 사건 도착</a:t>
-            </a:r>
-            <a:endParaRPr lang="ko-KR" sz="1000" dirty="0"/>
-          </a:p>
-        </p:txBody>
-      </p:sp>
-      <p:sp>
-        <p:nvSpPr>
-          <p:cNvPr id="18" name="Text 14"/>
-          <p:cNvSpPr txBox="1"/>
-          <p:nvPr/>
-        </p:nvSpPr>
-        <p:spPr>
-          <a:xfrm>
-            <a:off x="886968" y="3849624"/>
-            <a:ext cx="1408176" cy="548640"/>
-          </a:xfrm>
-          <a:prstGeom prst="rect">
-            <a:avLst/>
-          </a:prstGeom>
-          <a:noFill/>
-          <a:ln/>
-        </p:spPr>
-        <p:txBody>
-          <a:bodyPr wrap="square" lIns="0" tIns="0" rIns="0" bIns="0" rtlCol="0" anchor="t"/>
-          <a:lstStyle/>
-          <a:p>
-            <a:pPr indent="0" marL="0">
-              <a:buNone/>
-            </a:pPr>
-            <a:r>
-              <a:rPr lang="ko-KR" altLang="en-US" sz="1050" b="1" dirty="0">
-                <a:solidFill>
-                  <a:srgbClr val="1C2433"/>
-                </a:solidFill>
-                <a:latin typeface="맑은 고딕" pitchFamily="34" charset="0"/>
-                <a:ea typeface="맑은 고딕" pitchFamily="34" charset="-122"/>
-                <a:cs typeface="맑은 고딕" pitchFamily="34" charset="-120"/>
-              </a:rPr>
-              <a:t>‘학교 지원팀’</a:t>
-            </a:r>
-            <a:endParaRPr lang="ko-KR" sz="1050" dirty="0"/>
-          </a:p>
-          <a:p>
-            <a:pPr indent="0" marL="0">
-              <a:buNone/>
-            </a:pPr>
-            <a:r>
-              <a:rPr lang="ko-KR" altLang="en-US" sz="1050" b="1" dirty="0">
-                <a:solidFill>
-                  <a:srgbClr val="1C2433"/>
-                </a:solidFill>
-                <a:latin typeface="맑은 고딕" pitchFamily="34" charset="0"/>
-                <a:ea typeface="맑은 고딕" pitchFamily="34" charset="-122"/>
-                <a:cs typeface="맑은 고딕" pitchFamily="34" charset="-120"/>
-              </a:rPr>
-              <a:t>메시지 확인 요청</a:t>
-            </a:r>
-            <a:endParaRPr lang="ko-KR" sz="1050" dirty="0"/>
-          </a:p>
-        </p:txBody>
-      </p:sp>
-      <p:sp>
-        <p:nvSpPr>
-          <p:cNvPr id="19" name="Shape 15"/>
+          <p:cNvPr id="14" name="Shape 10"/>
           <p:cNvSpPr/>
           <p:nvPr/>
         </p:nvSpPr>
         <p:spPr>
           <a:xfrm>
-            <a:off x="777240" y="4782312"/>
-            <a:ext cx="1600200" cy="411480"/>
-          </a:xfrm>
-          <a:prstGeom prst="roundRect">
-            <a:avLst>
-              <a:gd name="adj" fmla="val 22222"/>
-            </a:avLst>
+            <a:off x="3506724" y="1188720"/>
+            <a:ext cx="658368" cy="658368"/>
+          </a:xfrm>
+          <a:prstGeom prst="ellipse">
+            <a:avLst/>
           </a:prstGeom>
           <a:solidFill>
             <a:srgbClr val="19B3B1"/>
@@ -8767,68 +8587,9 @@
           <a:ln/>
         </p:spPr>
       </p:sp>
-      <p:sp>
-        <p:nvSpPr>
-          <p:cNvPr id="20" name="Text 16"/>
-          <p:cNvSpPr txBox="1"/>
-          <p:nvPr/>
-        </p:nvSpPr>
-        <p:spPr>
-          <a:xfrm>
-            <a:off x="777240" y="4782312"/>
-            <a:ext cx="1600200" cy="411480"/>
-          </a:xfrm>
-          <a:prstGeom prst="rect">
-            <a:avLst/>
-          </a:prstGeom>
-          <a:noFill/>
-          <a:ln/>
-        </p:spPr>
-        <p:txBody>
-          <a:bodyPr wrap="square" lIns="0" tIns="0" rIns="0" bIns="0" rtlCol="0" anchor="ctr"/>
-          <a:lstStyle/>
-          <a:p>
-            <a:pPr algn="ctr" indent="0" marL="0">
-              <a:buNone/>
-            </a:pPr>
-            <a:r>
-              <a:rPr lang="ko-KR" altLang="en-US" sz="1200" b="1" dirty="0">
-                <a:solidFill>
-                  <a:srgbClr val="06122A"/>
-                </a:solidFill>
-                <a:latin typeface="맑은 고딕" pitchFamily="34" charset="0"/>
-                <a:ea typeface="맑은 고딕" pitchFamily="34" charset="-122"/>
-                <a:cs typeface="맑은 고딕" pitchFamily="34" charset="-120"/>
-              </a:rPr>
-              <a:t>검토 시작</a:t>
-            </a:r>
-            <a:endParaRPr lang="ko-KR" sz="1200" dirty="0"/>
-          </a:p>
-        </p:txBody>
-      </p:sp>
-      <p:sp>
-        <p:nvSpPr>
-          <p:cNvPr id="21" name="Shape 17"/>
-          <p:cNvSpPr/>
-          <p:nvPr/>
-        </p:nvSpPr>
-        <p:spPr>
-          <a:xfrm>
-            <a:off x="3506724" y="1188720"/>
-            <a:ext cx="658368" cy="658368"/>
-          </a:xfrm>
-          <a:prstGeom prst="ellipse">
-            <a:avLst/>
-          </a:prstGeom>
-          <a:solidFill>
-            <a:srgbClr val="19B3B1"/>
-          </a:solidFill>
-          <a:ln/>
-        </p:spPr>
-      </p:sp>
       <p:pic>
         <p:nvPicPr>
-          <p:cNvPr id="22" name="Image 2" descr="preencoded.png">    </p:cNvPr>
+          <p:cNvPr id="15" name="Image 2" descr="preencoded.png">    </p:cNvPr>
           <p:cNvPicPr>
             <a:picLocks noChangeAspect="1"/>
           </p:cNvPicPr>
@@ -8852,7 +8613,7 @@
       </p:pic>
       <p:sp>
         <p:nvSpPr>
-          <p:cNvPr id="23" name="Shape 18"/>
+          <p:cNvPr id="16" name="Shape 11"/>
           <p:cNvSpPr/>
           <p:nvPr/>
         </p:nvSpPr>
@@ -8874,7 +8635,7 @@
       </p:sp>
       <p:sp>
         <p:nvSpPr>
-          <p:cNvPr id="24" name="Text 19"/>
+          <p:cNvPr id="17" name="Text 12"/>
           <p:cNvSpPr txBox="1"/>
           <p:nvPr/>
         </p:nvSpPr>
@@ -8913,7 +8674,7 @@
       </p:sp>
       <p:sp>
         <p:nvSpPr>
-          <p:cNvPr id="25" name="Text 20"/>
+          <p:cNvPr id="18" name="Text 13"/>
           <p:cNvSpPr txBox="1"/>
           <p:nvPr/>
         </p:nvSpPr>
@@ -8952,7 +8713,7 @@
       </p:sp>
       <p:sp>
         <p:nvSpPr>
-          <p:cNvPr id="26" name="Text 21"/>
+          <p:cNvPr id="19" name="Text 14"/>
           <p:cNvSpPr txBox="1"/>
           <p:nvPr/>
         </p:nvSpPr>
@@ -8983,7 +8744,7 @@
                 <a:ea typeface="맑은 고딕" pitchFamily="34" charset="-122"/>
                 <a:cs typeface="맑은 고딕" pitchFamily="34" charset="-120"/>
               </a:rPr>
-              <a:t>탭으로 문서를 열고</a:t>
+              <a:t>문서 탭과 내 기록을</a:t>
             </a:r>
             <a:endParaRPr lang="ko-KR" sz="1300" dirty="0"/>
           </a:p>
@@ -9000,7 +8761,7 @@
                 <a:ea typeface="맑은 고딕" pitchFamily="34" charset="-122"/>
                 <a:cs typeface="맑은 고딕" pitchFamily="34" charset="-120"/>
               </a:rPr>
-              <a:t>요청 내용 확인</a:t>
+              <a:t>열어 요청 확인</a:t>
             </a:r>
             <a:endParaRPr lang="ko-KR" sz="1300" dirty="0"/>
           </a:p>
@@ -9008,7 +8769,7 @@
       </p:sp>
       <p:sp>
         <p:nvSpPr>
-          <p:cNvPr id="27" name="Shape 22"/>
+          <p:cNvPr id="20" name="Shape 15"/>
           <p:cNvSpPr/>
           <p:nvPr/>
         </p:nvSpPr>
@@ -9028,7 +8789,7 @@
       </p:sp>
       <p:sp>
         <p:nvSpPr>
-          <p:cNvPr id="28" name="Shape 23"/>
+          <p:cNvPr id="21" name="Shape 16"/>
           <p:cNvSpPr/>
           <p:nvPr/>
         </p:nvSpPr>
@@ -9053,270 +8814,9 @@
           </a:ln>
         </p:spPr>
       </p:sp>
-      <p:sp>
-        <p:nvSpPr>
-          <p:cNvPr id="29" name="Shape 24"/>
-          <p:cNvSpPr/>
-          <p:nvPr/>
-        </p:nvSpPr>
-        <p:spPr>
-          <a:xfrm>
-            <a:off x="2926080" y="2980944"/>
-            <a:ext cx="1819656" cy="2368296"/>
-          </a:xfrm>
-          <a:prstGeom prst="roundRect">
-            <a:avLst>
-              <a:gd name="adj" fmla="val 6030"/>
-            </a:avLst>
-          </a:prstGeom>
-          <a:solidFill>
-            <a:srgbClr val="F4F6FA"/>
-          </a:solidFill>
-          <a:ln/>
-        </p:spPr>
-      </p:sp>
-      <p:sp>
-        <p:nvSpPr>
-          <p:cNvPr id="30" name="Text 25"/>
-          <p:cNvSpPr txBox="1"/>
-          <p:nvPr/>
-        </p:nvSpPr>
-        <p:spPr>
-          <a:xfrm>
-            <a:off x="3035808" y="3072384"/>
-            <a:ext cx="1371600" cy="201168"/>
-          </a:xfrm>
-          <a:prstGeom prst="rect">
-            <a:avLst/>
-          </a:prstGeom>
-          <a:noFill/>
-          <a:ln/>
-        </p:spPr>
-        <p:txBody>
-          <a:bodyPr wrap="square" lIns="0" tIns="0" rIns="0" bIns="0" rtlCol="0" anchor="t"/>
-          <a:lstStyle/>
-          <a:p>
-            <a:pPr indent="0" marL="0">
-              <a:buNone/>
-            </a:pPr>
-            <a:r>
-              <a:rPr lang="ko-KR" altLang="en-US" sz="900" b="1" dirty="0">
-                <a:solidFill>
-                  <a:srgbClr val="5A6576"/>
-                </a:solidFill>
-                <a:latin typeface="맑은 고딕" pitchFamily="34" charset="0"/>
-                <a:ea typeface="맑은 고딕" pitchFamily="34" charset="-122"/>
-                <a:cs typeface="맑은 고딕" pitchFamily="34" charset="-120"/>
-              </a:rPr>
-              <a:t>받은 메시지</a:t>
-            </a:r>
-            <a:endParaRPr lang="ko-KR" sz="900" dirty="0"/>
-          </a:p>
-        </p:txBody>
-      </p:sp>
-      <p:sp>
-        <p:nvSpPr>
-          <p:cNvPr id="31" name="Shape 26"/>
-          <p:cNvSpPr/>
-          <p:nvPr/>
-        </p:nvSpPr>
-        <p:spPr>
-          <a:xfrm>
-            <a:off x="3017520" y="3328416"/>
-            <a:ext cx="1636776" cy="658368"/>
-          </a:xfrm>
-          <a:prstGeom prst="roundRect">
-            <a:avLst>
-              <a:gd name="adj" fmla="val 11111"/>
-            </a:avLst>
-          </a:prstGeom>
-          <a:solidFill>
-            <a:srgbClr val="FFFFFF"/>
-          </a:solidFill>
-          <a:ln w="22225">
-            <a:solidFill>
-              <a:srgbClr val="19B3B1"/>
-            </a:solidFill>
-            <a:prstDash val="solid"/>
-          </a:ln>
-        </p:spPr>
-      </p:sp>
-      <p:sp>
-        <p:nvSpPr>
-          <p:cNvPr id="32" name="Text 27"/>
-          <p:cNvSpPr txBox="1"/>
-          <p:nvPr/>
-        </p:nvSpPr>
-        <p:spPr>
-          <a:xfrm>
-            <a:off x="3090672" y="3374136"/>
-            <a:ext cx="914400" cy="164592"/>
-          </a:xfrm>
-          <a:prstGeom prst="rect">
-            <a:avLst/>
-          </a:prstGeom>
-          <a:noFill/>
-          <a:ln/>
-        </p:spPr>
-        <p:txBody>
-          <a:bodyPr wrap="square" lIns="0" tIns="0" rIns="0" bIns="0" rtlCol="0" anchor="t"/>
-          <a:lstStyle/>
-          <a:p>
-            <a:pPr indent="0" marL="0">
-              <a:buNone/>
-            </a:pPr>
-            <a:r>
-              <a:rPr lang="ko-KR" altLang="en-US" sz="750" dirty="0">
-                <a:solidFill>
-                  <a:srgbClr val="5A6576"/>
-                </a:solidFill>
-                <a:latin typeface="맑은 고딕" pitchFamily="34" charset="0"/>
-                <a:ea typeface="맑은 고딕" pitchFamily="34" charset="-122"/>
-                <a:cs typeface="맑은 고딕" pitchFamily="34" charset="-120"/>
-              </a:rPr>
-              <a:t>보낸 사람</a:t>
-            </a:r>
-            <a:endParaRPr lang="ko-KR" sz="750" dirty="0"/>
-          </a:p>
-        </p:txBody>
-      </p:sp>
-      <p:sp>
-        <p:nvSpPr>
-          <p:cNvPr id="33" name="Text 28"/>
-          <p:cNvSpPr txBox="1"/>
-          <p:nvPr/>
-        </p:nvSpPr>
-        <p:spPr>
-          <a:xfrm>
-            <a:off x="3090672" y="3529584"/>
-            <a:ext cx="1545336" cy="411480"/>
-          </a:xfrm>
-          <a:prstGeom prst="rect">
-            <a:avLst/>
-          </a:prstGeom>
-          <a:noFill/>
-          <a:ln/>
-        </p:spPr>
-        <p:txBody>
-          <a:bodyPr wrap="square" lIns="0" tIns="0" rIns="0" bIns="0" rtlCol="0" anchor="t"/>
-          <a:lstStyle/>
-          <a:p>
-            <a:pPr indent="0" marL="0">
-              <a:buNone/>
-            </a:pPr>
-            <a:r>
-              <a:rPr lang="ko-KR" altLang="en-US" sz="800" b="1" dirty="0">
-                <a:solidFill>
-                  <a:srgbClr val="1C2433"/>
-                </a:solidFill>
-                <a:latin typeface="맑은 고딕" pitchFamily="34" charset="0"/>
-                <a:ea typeface="맑은 고딕" pitchFamily="34" charset="-122"/>
-                <a:cs typeface="맑은 고딕" pitchFamily="34" charset="-120"/>
-              </a:rPr>
-              <a:t>학교 지원팀</a:t>
-            </a:r>
-            <a:endParaRPr lang="ko-KR" sz="800" dirty="0"/>
-          </a:p>
-          <a:p>
-            <a:pPr indent="0" marL="0">
-              <a:buNone/>
-            </a:pPr>
-            <a:r>
-              <a:rPr lang="ko-KR" altLang="en-US" sz="800" b="1" dirty="0">
-                <a:solidFill>
-                  <a:srgbClr val="1C2433"/>
-                </a:solidFill>
-                <a:latin typeface="맑은 고딕" pitchFamily="34" charset="0"/>
-                <a:ea typeface="맑은 고딕" pitchFamily="34" charset="-122"/>
-                <a:cs typeface="맑은 고딕" pitchFamily="34" charset="-120"/>
-              </a:rPr>
-              <a:t>help@nuri-help.example</a:t>
-            </a:r>
-            <a:endParaRPr lang="ko-KR" sz="800" dirty="0"/>
-          </a:p>
-        </p:txBody>
-      </p:sp>
-      <p:sp>
-        <p:nvSpPr>
-          <p:cNvPr id="34" name="Shape 29"/>
-          <p:cNvSpPr/>
-          <p:nvPr/>
-        </p:nvSpPr>
-        <p:spPr>
-          <a:xfrm>
-            <a:off x="3017520" y="4059936"/>
-            <a:ext cx="1636776" cy="685800"/>
-          </a:xfrm>
-          <a:prstGeom prst="roundRect">
-            <a:avLst>
-              <a:gd name="adj" fmla="val 10667"/>
-            </a:avLst>
-          </a:prstGeom>
-          <a:solidFill>
-            <a:srgbClr val="FFFFFF"/>
-          </a:solidFill>
-          <a:ln/>
-        </p:spPr>
-      </p:sp>
-      <p:sp>
-        <p:nvSpPr>
-          <p:cNvPr id="35" name="Text 30"/>
-          <p:cNvSpPr txBox="1"/>
-          <p:nvPr/>
-        </p:nvSpPr>
-        <p:spPr>
-          <a:xfrm>
-            <a:off x="3090672" y="4123944"/>
-            <a:ext cx="1545336" cy="548640"/>
-          </a:xfrm>
-          <a:prstGeom prst="rect">
-            <a:avLst/>
-          </a:prstGeom>
-          <a:noFill/>
-          <a:ln/>
-        </p:spPr>
-        <p:txBody>
-          <a:bodyPr wrap="square" lIns="0" tIns="0" rIns="0" bIns="0" rtlCol="0" anchor="t"/>
-          <a:lstStyle/>
-          <a:p>
-            <a:pPr indent="0" marL="0">
-              <a:buNone/>
-            </a:pPr>
-            <a:r>
-              <a:rPr lang="ko-KR" altLang="en-US" sz="850" dirty="0">
-                <a:solidFill>
-                  <a:srgbClr val="1C2433"/>
-                </a:solidFill>
-                <a:latin typeface="맑은 고딕" pitchFamily="34" charset="0"/>
-                <a:ea typeface="맑은 고딕" pitchFamily="34" charset="-122"/>
-                <a:cs typeface="맑은 고딕" pitchFamily="34" charset="-120"/>
-              </a:rPr>
-              <a:t>“계정 확인을 위해</a:t>
-            </a:r>
-            <a:endParaRPr lang="ko-KR" sz="850" dirty="0"/>
-          </a:p>
-          <a:p>
-            <a:pPr indent="0" marL="0">
-              <a:buNone/>
-            </a:pPr>
-            <a:r>
-              <a:rPr lang="ko-KR" altLang="en-US" sz="850" dirty="0">
-                <a:solidFill>
-                  <a:srgbClr val="1C2433"/>
-                </a:solidFill>
-                <a:latin typeface="맑은 고딕" pitchFamily="34" charset="0"/>
-                <a:ea typeface="맑은 고딕" pitchFamily="34" charset="-122"/>
-                <a:cs typeface="맑은 고딕" pitchFamily="34" charset="-120"/>
-              </a:rPr>
-              <a:t>비밀번호를 입력해 주세요”</a:t>
-            </a:r>
-            <a:endParaRPr lang="ko-KR" sz="850" dirty="0"/>
-          </a:p>
-        </p:txBody>
-      </p:sp>
       <p:pic>
         <p:nvPicPr>
-          <p:cNvPr id="36" name="Image 3" descr="preencoded.png">    </p:cNvPr>
+          <p:cNvPr id="22" name="Image 3" descr="HTML 시제품 화면: 문서·메시지 확인">    </p:cNvPr>
           <p:cNvPicPr>
             <a:picLocks noChangeAspect="1"/>
           </p:cNvPicPr>
@@ -9330,8 +8830,8 @@
         </p:blipFill>
         <p:spPr>
           <a:xfrm>
-            <a:off x="4242816" y="3730752"/>
-            <a:ext cx="365760" cy="365760"/>
+            <a:off x="2926080" y="2980944"/>
+            <a:ext cx="1819656" cy="2368296"/>
           </a:xfrm>
           <a:prstGeom prst="rect">
             <a:avLst/>
@@ -9340,46 +8840,7 @@
       </p:pic>
       <p:sp>
         <p:nvSpPr>
-          <p:cNvPr id="37" name="Text 31"/>
-          <p:cNvSpPr txBox="1"/>
-          <p:nvPr/>
-        </p:nvSpPr>
-        <p:spPr>
-          <a:xfrm>
-            <a:off x="2926080" y="5001768"/>
-            <a:ext cx="1819656" cy="228600"/>
-          </a:xfrm>
-          <a:prstGeom prst="rect">
-            <a:avLst/>
-          </a:prstGeom>
-          <a:noFill/>
-          <a:ln/>
-        </p:spPr>
-        <p:txBody>
-          <a:bodyPr wrap="square" lIns="0" tIns="0" rIns="0" bIns="0" rtlCol="0" anchor="t"/>
-          <a:lstStyle/>
-          <a:p>
-            <a:pPr algn="ctr" indent="0" marL="0">
-              <a:buNone/>
-            </a:pPr>
-            <a:r>
-              <a:rPr lang="ko-KR" altLang="en-US" sz="900" b="1" dirty="0">
-                <a:solidFill>
-                  <a:srgbClr val="0E7C7B"/>
-                </a:solidFill>
-                <a:latin typeface="맑은 고딕" pitchFamily="34" charset="0"/>
-                <a:ea typeface="맑은 고딕" pitchFamily="34" charset="-122"/>
-                <a:cs typeface="맑은 고딕" pitchFamily="34" charset="-120"/>
-              </a:rPr>
-              <a:t>탭해서 상세 정보 열기</a:t>
-            </a:r>
-            <a:endParaRPr lang="ko-KR" sz="900" dirty="0"/>
-          </a:p>
-        </p:txBody>
-      </p:sp>
-      <p:sp>
-        <p:nvSpPr>
-          <p:cNvPr id="38" name="Shape 32"/>
+          <p:cNvPr id="23" name="Shape 17"/>
           <p:cNvSpPr/>
           <p:nvPr/>
         </p:nvSpPr>
@@ -9399,7 +8860,7 @@
       </p:sp>
       <p:pic>
         <p:nvPicPr>
-          <p:cNvPr id="39" name="Image 4" descr="preencoded.png">    </p:cNvPr>
+          <p:cNvPr id="24" name="Image 4" descr="preencoded.png">    </p:cNvPr>
           <p:cNvPicPr>
             <a:picLocks noChangeAspect="1"/>
           </p:cNvPicPr>
@@ -9423,7 +8884,7 @@
       </p:pic>
       <p:sp>
         <p:nvSpPr>
-          <p:cNvPr id="40" name="Shape 33"/>
+          <p:cNvPr id="25" name="Shape 18"/>
           <p:cNvSpPr/>
           <p:nvPr/>
         </p:nvSpPr>
@@ -9445,7 +8906,7 @@
       </p:sp>
       <p:sp>
         <p:nvSpPr>
-          <p:cNvPr id="41" name="Text 34"/>
+          <p:cNvPr id="26" name="Text 19"/>
           <p:cNvSpPr txBox="1"/>
           <p:nvPr/>
         </p:nvSpPr>
@@ -9484,7 +8945,7 @@
       </p:sp>
       <p:sp>
         <p:nvSpPr>
-          <p:cNvPr id="42" name="Text 35"/>
+          <p:cNvPr id="27" name="Text 20"/>
           <p:cNvSpPr txBox="1"/>
           <p:nvPr/>
         </p:nvSpPr>
@@ -9523,7 +8984,7 @@
       </p:sp>
       <p:sp>
         <p:nvSpPr>
-          <p:cNvPr id="43" name="Text 36"/>
+          <p:cNvPr id="28" name="Text 21"/>
           <p:cNvSpPr txBox="1"/>
           <p:nvPr/>
         </p:nvSpPr>
@@ -9554,7 +9015,7 @@
                 <a:ea typeface="맑은 고딕" pitchFamily="34" charset="-122"/>
                 <a:cs typeface="맑은 고딕" pitchFamily="34" charset="-120"/>
               </a:rPr>
-              <a:t>두 정보를 대조해</a:t>
+              <a:t>두 정보를 대조하고</a:t>
             </a:r>
             <a:endParaRPr lang="ko-KR" sz="1300" dirty="0"/>
           </a:p>
@@ -9571,7 +9032,7 @@
                 <a:ea typeface="맑은 고딕" pitchFamily="34" charset="-122"/>
                 <a:cs typeface="맑은 고딕" pitchFamily="34" charset="-120"/>
               </a:rPr>
-              <a:t>불일치를 찾는다</a:t>
+              <a:t>의심 칸에 깃발</a:t>
             </a:r>
             <a:endParaRPr lang="ko-KR" sz="1300" dirty="0"/>
           </a:p>
@@ -9579,7 +9040,7 @@
       </p:sp>
       <p:sp>
         <p:nvSpPr>
-          <p:cNvPr id="44" name="Shape 37"/>
+          <p:cNvPr id="29" name="Shape 22"/>
           <p:cNvSpPr/>
           <p:nvPr/>
         </p:nvSpPr>
@@ -9599,7 +9060,7 @@
       </p:sp>
       <p:sp>
         <p:nvSpPr>
-          <p:cNvPr id="45" name="Shape 38"/>
+          <p:cNvPr id="30" name="Shape 23"/>
           <p:cNvSpPr/>
           <p:nvPr/>
         </p:nvSpPr>
@@ -9624,344 +9085,9 @@
           </a:ln>
         </p:spPr>
       </p:sp>
-      <p:sp>
-        <p:nvSpPr>
-          <p:cNvPr id="46" name="Shape 39"/>
-          <p:cNvSpPr/>
-          <p:nvPr/>
-        </p:nvSpPr>
-        <p:spPr>
-          <a:xfrm>
-            <a:off x="5184648" y="2980944"/>
-            <a:ext cx="1819656" cy="2368296"/>
-          </a:xfrm>
-          <a:prstGeom prst="roundRect">
-            <a:avLst>
-              <a:gd name="adj" fmla="val 6030"/>
-            </a:avLst>
-          </a:prstGeom>
-          <a:solidFill>
-            <a:srgbClr val="F4F6FA"/>
-          </a:solidFill>
-          <a:ln/>
-        </p:spPr>
-      </p:sp>
-      <p:sp>
-        <p:nvSpPr>
-          <p:cNvPr id="47" name="Text 40"/>
-          <p:cNvSpPr txBox="1"/>
-          <p:nvPr/>
-        </p:nvSpPr>
-        <p:spPr>
-          <a:xfrm>
-            <a:off x="5294376" y="3072384"/>
-            <a:ext cx="1371600" cy="201168"/>
-          </a:xfrm>
-          <a:prstGeom prst="rect">
-            <a:avLst/>
-          </a:prstGeom>
-          <a:noFill/>
-          <a:ln/>
-        </p:spPr>
-        <p:txBody>
-          <a:bodyPr wrap="square" lIns="0" tIns="0" rIns="0" bIns="0" rtlCol="0" anchor="t"/>
-          <a:lstStyle/>
-          <a:p>
-            <a:pPr indent="0" marL="0">
-              <a:buNone/>
-            </a:pPr>
-            <a:r>
-              <a:rPr lang="ko-KR" altLang="en-US" sz="900" b="1" dirty="0">
-                <a:solidFill>
-                  <a:srgbClr val="5A6576"/>
-                </a:solidFill>
-                <a:latin typeface="맑은 고딕" pitchFamily="34" charset="0"/>
-                <a:ea typeface="맑은 고딕" pitchFamily="34" charset="-122"/>
-                <a:cs typeface="맑은 고딕" pitchFamily="34" charset="-120"/>
-              </a:rPr>
-              <a:t>비교 모드</a:t>
-            </a:r>
-            <a:endParaRPr lang="ko-KR" sz="900" dirty="0"/>
-          </a:p>
-        </p:txBody>
-      </p:sp>
-      <p:sp>
-        <p:nvSpPr>
-          <p:cNvPr id="48" name="Shape 41"/>
-          <p:cNvSpPr/>
-          <p:nvPr/>
-        </p:nvSpPr>
-        <p:spPr>
-          <a:xfrm>
-            <a:off x="5276088" y="3328416"/>
-            <a:ext cx="1636776" cy="502920"/>
-          </a:xfrm>
-          <a:prstGeom prst="roundRect">
-            <a:avLst>
-              <a:gd name="adj" fmla="val 14545"/>
-            </a:avLst>
-          </a:prstGeom>
-          <a:solidFill>
-            <a:srgbClr val="FFFFFF"/>
-          </a:solidFill>
-          <a:ln w="22225">
-            <a:solidFill>
-              <a:srgbClr val="F2B33D"/>
-            </a:solidFill>
-            <a:prstDash val="solid"/>
-          </a:ln>
-        </p:spPr>
-      </p:sp>
-      <p:sp>
-        <p:nvSpPr>
-          <p:cNvPr id="49" name="Text 42"/>
-          <p:cNvSpPr txBox="1"/>
-          <p:nvPr/>
-        </p:nvSpPr>
-        <p:spPr>
-          <a:xfrm>
-            <a:off x="5349240" y="3328416"/>
-            <a:ext cx="1545336" cy="502920"/>
-          </a:xfrm>
-          <a:prstGeom prst="rect">
-            <a:avLst/>
-          </a:prstGeom>
-          <a:noFill/>
-          <a:ln/>
-        </p:spPr>
-        <p:txBody>
-          <a:bodyPr wrap="square" lIns="0" tIns="0" rIns="0" bIns="0" rtlCol="0" anchor="ctr"/>
-          <a:lstStyle/>
-          <a:p>
-            <a:pPr indent="0" marL="0">
-              <a:buNone/>
-            </a:pPr>
-            <a:r>
-              <a:rPr lang="ko-KR" altLang="en-US" sz="850" b="1" dirty="0">
-                <a:solidFill>
-                  <a:srgbClr val="1C2433"/>
-                </a:solidFill>
-                <a:latin typeface="맑은 고딕" pitchFamily="34" charset="0"/>
-                <a:ea typeface="맑은 고딕" pitchFamily="34" charset="-122"/>
-                <a:cs typeface="맑은 고딕" pitchFamily="34" charset="-120"/>
-              </a:rPr>
-              <a:t>발신  nuri-help.example</a:t>
-            </a:r>
-            <a:endParaRPr lang="ko-KR" sz="850" dirty="0"/>
-          </a:p>
-        </p:txBody>
-      </p:sp>
-      <p:sp>
-        <p:nvSpPr>
-          <p:cNvPr id="50" name="Shape 43"/>
-          <p:cNvSpPr/>
-          <p:nvPr/>
-        </p:nvSpPr>
-        <p:spPr>
-          <a:xfrm>
-            <a:off x="5682996" y="3895344"/>
-            <a:ext cx="822960" cy="256032"/>
-          </a:xfrm>
-          <a:prstGeom prst="roundRect">
-            <a:avLst>
-              <a:gd name="adj" fmla="val 50000"/>
-            </a:avLst>
-          </a:prstGeom>
-          <a:solidFill>
-            <a:srgbClr val="F2B33D"/>
-          </a:solidFill>
-          <a:ln/>
-        </p:spPr>
-      </p:sp>
-      <p:sp>
-        <p:nvSpPr>
-          <p:cNvPr id="51" name="Text 44"/>
-          <p:cNvSpPr txBox="1"/>
-          <p:nvPr/>
-        </p:nvSpPr>
-        <p:spPr>
-          <a:xfrm>
-            <a:off x="5682996" y="3895344"/>
-            <a:ext cx="822960" cy="256032"/>
-          </a:xfrm>
-          <a:prstGeom prst="rect">
-            <a:avLst/>
-          </a:prstGeom>
-          <a:noFill/>
-          <a:ln/>
-        </p:spPr>
-        <p:txBody>
-          <a:bodyPr wrap="square" lIns="0" tIns="0" rIns="0" bIns="0" rtlCol="0" anchor="ctr"/>
-          <a:lstStyle/>
-          <a:p>
-            <a:pPr algn="ctr" indent="0" marL="0">
-              <a:buNone/>
-            </a:pPr>
-            <a:r>
-              <a:rPr lang="ko-KR" altLang="en-US" sz="900" b="1" dirty="0">
-                <a:solidFill>
-                  <a:srgbClr val="0B1A33"/>
-                </a:solidFill>
-                <a:latin typeface="맑은 고딕" pitchFamily="34" charset="0"/>
-                <a:ea typeface="맑은 고딕" pitchFamily="34" charset="-122"/>
-                <a:cs typeface="맑은 고딕" pitchFamily="34" charset="-120"/>
-              </a:rPr>
-              <a:t>! 불일치</a:t>
-            </a:r>
-            <a:endParaRPr lang="ko-KR" sz="900" dirty="0"/>
-          </a:p>
-        </p:txBody>
-      </p:sp>
-      <p:sp>
-        <p:nvSpPr>
-          <p:cNvPr id="52" name="Shape 45"/>
-          <p:cNvSpPr/>
-          <p:nvPr/>
-        </p:nvSpPr>
-        <p:spPr>
-          <a:xfrm>
-            <a:off x="5276088" y="4215384"/>
-            <a:ext cx="1636776" cy="502920"/>
-          </a:xfrm>
-          <a:prstGeom prst="roundRect">
-            <a:avLst>
-              <a:gd name="adj" fmla="val 14545"/>
-            </a:avLst>
-          </a:prstGeom>
-          <a:solidFill>
-            <a:srgbClr val="FFFFFF"/>
-          </a:solidFill>
-          <a:ln w="22225">
-            <a:solidFill>
-              <a:srgbClr val="F2B33D"/>
-            </a:solidFill>
-            <a:prstDash val="solid"/>
-          </a:ln>
-        </p:spPr>
-      </p:sp>
-      <p:sp>
-        <p:nvSpPr>
-          <p:cNvPr id="53" name="Text 46"/>
-          <p:cNvSpPr txBox="1"/>
-          <p:nvPr/>
-        </p:nvSpPr>
-        <p:spPr>
-          <a:xfrm>
-            <a:off x="5349240" y="4215384"/>
-            <a:ext cx="1545336" cy="502920"/>
-          </a:xfrm>
-          <a:prstGeom prst="rect">
-            <a:avLst/>
-          </a:prstGeom>
-          <a:noFill/>
-          <a:ln/>
-        </p:spPr>
-        <p:txBody>
-          <a:bodyPr wrap="square" lIns="0" tIns="0" rIns="0" bIns="0" rtlCol="0" anchor="ctr"/>
-          <a:lstStyle/>
-          <a:p>
-            <a:pPr indent="0" marL="0">
-              <a:buNone/>
-            </a:pPr>
-            <a:r>
-              <a:rPr lang="ko-KR" altLang="en-US" sz="850" b="1" dirty="0">
-                <a:solidFill>
-                  <a:srgbClr val="1C2433"/>
-                </a:solidFill>
-                <a:latin typeface="맑은 고딕" pitchFamily="34" charset="0"/>
-                <a:ea typeface="맑은 고딕" pitchFamily="34" charset="-122"/>
-                <a:cs typeface="맑은 고딕" pitchFamily="34" charset="-120"/>
-              </a:rPr>
-              <a:t>등록  baeumteo.example</a:t>
-            </a:r>
-            <a:endParaRPr lang="ko-KR" sz="850" dirty="0"/>
-          </a:p>
-        </p:txBody>
-      </p:sp>
-      <p:sp>
-        <p:nvSpPr>
-          <p:cNvPr id="54" name="Shape 47"/>
-          <p:cNvSpPr/>
-          <p:nvPr/>
-        </p:nvSpPr>
-        <p:spPr>
-          <a:xfrm>
-            <a:off x="5276088" y="4965192"/>
-            <a:ext cx="1143000" cy="256032"/>
-          </a:xfrm>
-          <a:prstGeom prst="roundRect">
-            <a:avLst>
-              <a:gd name="adj" fmla="val 50000"/>
-            </a:avLst>
-          </a:prstGeom>
-          <a:solidFill>
-            <a:srgbClr val="FF6B5E"/>
-          </a:solidFill>
-          <a:ln/>
-        </p:spPr>
-      </p:sp>
-      <p:sp>
-        <p:nvSpPr>
-          <p:cNvPr id="55" name="Text 48"/>
-          <p:cNvSpPr txBox="1"/>
-          <p:nvPr/>
-        </p:nvSpPr>
-        <p:spPr>
-          <a:xfrm>
-            <a:off x="5276088" y="4965192"/>
-            <a:ext cx="1143000" cy="256032"/>
-          </a:xfrm>
-          <a:prstGeom prst="rect">
-            <a:avLst/>
-          </a:prstGeom>
-          <a:noFill/>
-          <a:ln/>
-        </p:spPr>
-        <p:txBody>
-          <a:bodyPr wrap="square" lIns="0" tIns="0" rIns="0" bIns="0" rtlCol="0" anchor="ctr"/>
-          <a:lstStyle/>
-          <a:p>
-            <a:pPr algn="ctr" indent="0" marL="0">
-              <a:buNone/>
-            </a:pPr>
-            <a:r>
-              <a:rPr lang="ko-KR" altLang="en-US" sz="900" b="1" dirty="0">
-                <a:solidFill>
-                  <a:srgbClr val="0B1A33"/>
-                </a:solidFill>
-                <a:latin typeface="맑은 고딕" pitchFamily="34" charset="0"/>
-                <a:ea typeface="맑은 고딕" pitchFamily="34" charset="-122"/>
-                <a:cs typeface="맑은 고딕" pitchFamily="34" charset="-120"/>
-              </a:rPr>
-              <a:t>비밀번호 요구</a:t>
-            </a:r>
-            <a:endParaRPr lang="ko-KR" sz="900" dirty="0"/>
-          </a:p>
-        </p:txBody>
-      </p:sp>
-      <p:sp>
-        <p:nvSpPr>
-          <p:cNvPr id="56" name="Shape 49"/>
-          <p:cNvSpPr/>
-          <p:nvPr/>
-        </p:nvSpPr>
-        <p:spPr>
-          <a:xfrm>
-            <a:off x="8023860" y="1188720"/>
-            <a:ext cx="658368" cy="658368"/>
-          </a:xfrm>
-          <a:prstGeom prst="ellipse">
-            <a:avLst/>
-          </a:prstGeom>
-          <a:solidFill>
-            <a:srgbClr val="19B3B1"/>
-          </a:solidFill>
-          <a:ln/>
-        </p:spPr>
-      </p:sp>
       <p:pic>
         <p:nvPicPr>
-          <p:cNvPr id="57" name="Image 5" descr="preencoded.png">    </p:cNvPr>
+          <p:cNvPr id="31" name="Image 5" descr="HTML 시제품 화면: 단서 비교·위험 탐지">    </p:cNvPr>
           <p:cNvPicPr>
             <a:picLocks noChangeAspect="1"/>
           </p:cNvPicPr>
@@ -9975,6 +9101,50 @@
         </p:blipFill>
         <p:spPr>
           <a:xfrm>
+            <a:off x="5184648" y="2980944"/>
+            <a:ext cx="1819656" cy="2368296"/>
+          </a:xfrm>
+          <a:prstGeom prst="rect">
+            <a:avLst/>
+          </a:prstGeom>
+        </p:spPr>
+      </p:pic>
+      <p:sp>
+        <p:nvSpPr>
+          <p:cNvPr id="32" name="Shape 24"/>
+          <p:cNvSpPr/>
+          <p:nvPr/>
+        </p:nvSpPr>
+        <p:spPr>
+          <a:xfrm>
+            <a:off x="8023860" y="1188720"/>
+            <a:ext cx="658368" cy="658368"/>
+          </a:xfrm>
+          <a:prstGeom prst="ellipse">
+            <a:avLst/>
+          </a:prstGeom>
+          <a:solidFill>
+            <a:srgbClr val="19B3B1"/>
+          </a:solidFill>
+          <a:ln/>
+        </p:spPr>
+      </p:sp>
+      <p:pic>
+        <p:nvPicPr>
+          <p:cNvPr id="33" name="Image 6" descr="preencoded.png">    </p:cNvPr>
+          <p:cNvPicPr>
+            <a:picLocks noChangeAspect="1"/>
+          </p:cNvPicPr>
+          <p:nvPr/>
+        </p:nvPicPr>
+        <p:blipFill>
+          <a:blip r:embed="rId7"/>
+          <a:stretch>
+            <a:fillRect/>
+          </a:stretch>
+        </p:blipFill>
+        <p:spPr>
+          <a:xfrm>
             <a:off x="8188452" y="1353312"/>
             <a:ext cx="329184" cy="329184"/>
           </a:xfrm>
@@ -9985,7 +9155,7 @@
       </p:pic>
       <p:sp>
         <p:nvSpPr>
-          <p:cNvPr id="58" name="Shape 50"/>
+          <p:cNvPr id="34" name="Shape 25"/>
           <p:cNvSpPr/>
           <p:nvPr/>
         </p:nvSpPr>
@@ -10007,7 +9177,7 @@
       </p:sp>
       <p:sp>
         <p:nvSpPr>
-          <p:cNvPr id="59" name="Text 51"/>
+          <p:cNvPr id="35" name="Text 26"/>
           <p:cNvSpPr txBox="1"/>
           <p:nvPr/>
         </p:nvSpPr>
@@ -10046,7 +9216,7 @@
       </p:sp>
       <p:sp>
         <p:nvSpPr>
-          <p:cNvPr id="60" name="Text 52"/>
+          <p:cNvPr id="36" name="Text 27"/>
           <p:cNvSpPr txBox="1"/>
           <p:nvPr/>
         </p:nvSpPr>
@@ -10085,7 +9255,7 @@
       </p:sp>
       <p:sp>
         <p:nvSpPr>
-          <p:cNvPr id="61" name="Text 53"/>
+          <p:cNvPr id="37" name="Text 28"/>
           <p:cNvSpPr txBox="1"/>
           <p:nvPr/>
         </p:nvSpPr>
@@ -10133,7 +9303,7 @@
                 <a:ea typeface="맑은 고딕" pitchFamily="34" charset="-122"/>
                 <a:cs typeface="맑은 고딕" pitchFamily="34" charset="-120"/>
               </a:rPr>
-              <a:t>중 하나를 선택</a:t>
+              <a:t>거부면 신고 여부까지</a:t>
             </a:r>
             <a:endParaRPr lang="ko-KR" sz="1300" dirty="0"/>
           </a:p>
@@ -10141,7 +9311,7 @@
       </p:sp>
       <p:sp>
         <p:nvSpPr>
-          <p:cNvPr id="62" name="Shape 54"/>
+          <p:cNvPr id="38" name="Shape 29"/>
           <p:cNvSpPr/>
           <p:nvPr/>
         </p:nvSpPr>
@@ -10161,7 +9331,7 @@
       </p:sp>
       <p:sp>
         <p:nvSpPr>
-          <p:cNvPr id="63" name="Shape 55"/>
+          <p:cNvPr id="39" name="Shape 30"/>
           <p:cNvSpPr/>
           <p:nvPr/>
         </p:nvSpPr>
@@ -10186,326 +9356,9 @@
           </a:ln>
         </p:spPr>
       </p:sp>
-      <p:sp>
-        <p:nvSpPr>
-          <p:cNvPr id="64" name="Shape 56"/>
-          <p:cNvSpPr/>
-          <p:nvPr/>
-        </p:nvSpPr>
-        <p:spPr>
-          <a:xfrm>
-            <a:off x="7443216" y="2980944"/>
-            <a:ext cx="1819656" cy="2368296"/>
-          </a:xfrm>
-          <a:prstGeom prst="roundRect">
-            <a:avLst>
-              <a:gd name="adj" fmla="val 6030"/>
-            </a:avLst>
-          </a:prstGeom>
-          <a:solidFill>
-            <a:srgbClr val="F4F6FA"/>
-          </a:solidFill>
-          <a:ln/>
-        </p:spPr>
-      </p:sp>
-      <p:sp>
-        <p:nvSpPr>
-          <p:cNvPr id="65" name="Text 57"/>
-          <p:cNvSpPr txBox="1"/>
-          <p:nvPr/>
-        </p:nvSpPr>
-        <p:spPr>
-          <a:xfrm>
-            <a:off x="7552944" y="3072384"/>
-            <a:ext cx="1371600" cy="201168"/>
-          </a:xfrm>
-          <a:prstGeom prst="rect">
-            <a:avLst/>
-          </a:prstGeom>
-          <a:noFill/>
-          <a:ln/>
-        </p:spPr>
-        <p:txBody>
-          <a:bodyPr wrap="square" lIns="0" tIns="0" rIns="0" bIns="0" rtlCol="0" anchor="t"/>
-          <a:lstStyle/>
-          <a:p>
-            <a:pPr indent="0" marL="0">
-              <a:buNone/>
-            </a:pPr>
-            <a:r>
-              <a:rPr lang="ko-KR" altLang="en-US" sz="900" b="1" dirty="0">
-                <a:solidFill>
-                  <a:srgbClr val="5A6576"/>
-                </a:solidFill>
-                <a:latin typeface="맑은 고딕" pitchFamily="34" charset="0"/>
-                <a:ea typeface="맑은 고딕" pitchFamily="34" charset="-122"/>
-                <a:cs typeface="맑은 고딕" pitchFamily="34" charset="-120"/>
-              </a:rPr>
-              <a:t>판정 근거</a:t>
-            </a:r>
-            <a:endParaRPr lang="ko-KR" sz="900" dirty="0"/>
-          </a:p>
-        </p:txBody>
-      </p:sp>
-      <p:sp>
-        <p:nvSpPr>
-          <p:cNvPr id="66" name="Shape 58"/>
-          <p:cNvSpPr/>
-          <p:nvPr/>
-        </p:nvSpPr>
-        <p:spPr>
-          <a:xfrm>
-            <a:off x="7552944" y="3364992"/>
-            <a:ext cx="1188720" cy="256032"/>
-          </a:xfrm>
-          <a:prstGeom prst="roundRect">
-            <a:avLst>
-              <a:gd name="adj" fmla="val 50000"/>
-            </a:avLst>
-          </a:prstGeom>
-          <a:solidFill>
-            <a:srgbClr val="F2B33D"/>
-          </a:solidFill>
-          <a:ln/>
-        </p:spPr>
-      </p:sp>
-      <p:sp>
-        <p:nvSpPr>
-          <p:cNvPr id="67" name="Text 59"/>
-          <p:cNvSpPr txBox="1"/>
-          <p:nvPr/>
-        </p:nvSpPr>
-        <p:spPr>
-          <a:xfrm>
-            <a:off x="7552944" y="3364992"/>
-            <a:ext cx="1188720" cy="256032"/>
-          </a:xfrm>
-          <a:prstGeom prst="rect">
-            <a:avLst/>
-          </a:prstGeom>
-          <a:noFill/>
-          <a:ln/>
-        </p:spPr>
-        <p:txBody>
-          <a:bodyPr wrap="square" lIns="0" tIns="0" rIns="0" bIns="0" rtlCol="0" anchor="ctr"/>
-          <a:lstStyle/>
-          <a:p>
-            <a:pPr algn="ctr" indent="0" marL="0">
-              <a:buNone/>
-            </a:pPr>
-            <a:r>
-              <a:rPr lang="ko-KR" altLang="en-US" sz="900" b="1" dirty="0">
-                <a:solidFill>
-                  <a:srgbClr val="0B1A33"/>
-                </a:solidFill>
-                <a:latin typeface="맑은 고딕" pitchFamily="34" charset="0"/>
-                <a:ea typeface="맑은 고딕" pitchFamily="34" charset="-122"/>
-                <a:cs typeface="맑은 고딕" pitchFamily="34" charset="-120"/>
-              </a:rPr>
-              <a:t>도메인 불일치</a:t>
-            </a:r>
-            <a:endParaRPr lang="ko-KR" sz="900" dirty="0"/>
-          </a:p>
-        </p:txBody>
-      </p:sp>
-      <p:sp>
-        <p:nvSpPr>
-          <p:cNvPr id="68" name="Shape 60"/>
-          <p:cNvSpPr/>
-          <p:nvPr/>
-        </p:nvSpPr>
-        <p:spPr>
-          <a:xfrm>
-            <a:off x="7552944" y="3694176"/>
-            <a:ext cx="1188720" cy="256032"/>
-          </a:xfrm>
-          <a:prstGeom prst="roundRect">
-            <a:avLst>
-              <a:gd name="adj" fmla="val 50000"/>
-            </a:avLst>
-          </a:prstGeom>
-          <a:solidFill>
-            <a:srgbClr val="FF6B5E"/>
-          </a:solidFill>
-          <a:ln/>
-        </p:spPr>
-      </p:sp>
-      <p:sp>
-        <p:nvSpPr>
-          <p:cNvPr id="69" name="Text 61"/>
-          <p:cNvSpPr txBox="1"/>
-          <p:nvPr/>
-        </p:nvSpPr>
-        <p:spPr>
-          <a:xfrm>
-            <a:off x="7552944" y="3694176"/>
-            <a:ext cx="1188720" cy="256032"/>
-          </a:xfrm>
-          <a:prstGeom prst="rect">
-            <a:avLst/>
-          </a:prstGeom>
-          <a:noFill/>
-          <a:ln/>
-        </p:spPr>
-        <p:txBody>
-          <a:bodyPr wrap="square" lIns="0" tIns="0" rIns="0" bIns="0" rtlCol="0" anchor="ctr"/>
-          <a:lstStyle/>
-          <a:p>
-            <a:pPr algn="ctr" indent="0" marL="0">
-              <a:buNone/>
-            </a:pPr>
-            <a:r>
-              <a:rPr lang="ko-KR" altLang="en-US" sz="900" b="1" dirty="0">
-                <a:solidFill>
-                  <a:srgbClr val="0B1A33"/>
-                </a:solidFill>
-                <a:latin typeface="맑은 고딕" pitchFamily="34" charset="0"/>
-                <a:ea typeface="맑은 고딕" pitchFamily="34" charset="-122"/>
-                <a:cs typeface="맑은 고딕" pitchFamily="34" charset="-120"/>
-              </a:rPr>
-              <a:t>비밀번호 요구</a:t>
-            </a:r>
-            <a:endParaRPr lang="ko-KR" sz="900" dirty="0"/>
-          </a:p>
-        </p:txBody>
-      </p:sp>
-      <p:sp>
-        <p:nvSpPr>
-          <p:cNvPr id="70" name="Shape 62"/>
-          <p:cNvSpPr/>
-          <p:nvPr/>
-        </p:nvSpPr>
-        <p:spPr>
-          <a:xfrm>
-            <a:off x="7534656" y="4507992"/>
-            <a:ext cx="509016" cy="713232"/>
-          </a:xfrm>
-          <a:prstGeom prst="roundRect">
-            <a:avLst>
-              <a:gd name="adj" fmla="val 17964"/>
-            </a:avLst>
-          </a:prstGeom>
-          <a:solidFill>
-            <a:srgbClr val="19B3B1"/>
-          </a:solidFill>
-          <a:ln/>
-        </p:spPr>
-      </p:sp>
       <p:pic>
         <p:nvPicPr>
-          <p:cNvPr id="71" name="Image 6" descr="preencoded.png">    </p:cNvPr>
-          <p:cNvPicPr>
-            <a:picLocks noChangeAspect="1"/>
-          </p:cNvPicPr>
-          <p:nvPr/>
-        </p:nvPicPr>
-        <p:blipFill>
-          <a:blip r:embed="rId7"/>
-          <a:stretch>
-            <a:fillRect/>
-          </a:stretch>
-        </p:blipFill>
-        <p:spPr>
-          <a:xfrm>
-            <a:off x="7697724" y="4581144"/>
-            <a:ext cx="182880" cy="182880"/>
-          </a:xfrm>
-          <a:prstGeom prst="rect">
-            <a:avLst/>
-          </a:prstGeom>
-        </p:spPr>
-      </p:pic>
-      <p:sp>
-        <p:nvSpPr>
-          <p:cNvPr id="72" name="Text 63"/>
-          <p:cNvSpPr txBox="1"/>
-          <p:nvPr/>
-        </p:nvSpPr>
-        <p:spPr>
-          <a:xfrm>
-            <a:off x="7534656" y="4782312"/>
-            <a:ext cx="509016" cy="402336"/>
-          </a:xfrm>
-          <a:prstGeom prst="rect">
-            <a:avLst/>
-          </a:prstGeom>
-          <a:noFill/>
-          <a:ln/>
-        </p:spPr>
-        <p:txBody>
-          <a:bodyPr wrap="square" lIns="0" tIns="0" rIns="0" bIns="0" rtlCol="0" anchor="ctr"/>
-          <a:lstStyle/>
-          <a:p>
-            <a:pPr algn="ctr" indent="0" marL="0">
-              <a:buNone/>
-            </a:pPr>
-            <a:r>
-              <a:rPr lang="ko-KR" altLang="en-US" sz="850" b="1" dirty="0">
-                <a:solidFill>
-                  <a:srgbClr val="0B1A33"/>
-                </a:solidFill>
-                <a:latin typeface="맑은 고딕" pitchFamily="34" charset="0"/>
-                <a:ea typeface="맑은 고딕" pitchFamily="34" charset="-122"/>
-                <a:cs typeface="맑은 고딕" pitchFamily="34" charset="-120"/>
-              </a:rPr>
-              <a:t>승인</a:t>
-            </a:r>
-            <a:endParaRPr lang="ko-KR" sz="850" dirty="0"/>
-          </a:p>
-        </p:txBody>
-      </p:sp>
-      <p:sp>
-        <p:nvSpPr>
-          <p:cNvPr id="73" name="Shape 64"/>
-          <p:cNvSpPr/>
-          <p:nvPr/>
-        </p:nvSpPr>
-        <p:spPr>
-          <a:xfrm>
-            <a:off x="8061960" y="4471416"/>
-            <a:ext cx="582168" cy="786384"/>
-          </a:xfrm>
-          <a:prstGeom prst="roundRect">
-            <a:avLst>
-              <a:gd name="adj" fmla="val 18848"/>
-            </a:avLst>
-          </a:prstGeom>
-          <a:solidFill>
-            <a:srgbClr val="F4F6FA"/>
-          </a:solidFill>
-          <a:ln w="25400">
-            <a:solidFill>
-              <a:srgbClr val="0B1A33"/>
-            </a:solidFill>
-            <a:prstDash val="solid"/>
-          </a:ln>
-        </p:spPr>
-      </p:sp>
-      <p:sp>
-        <p:nvSpPr>
-          <p:cNvPr id="74" name="Shape 65"/>
-          <p:cNvSpPr/>
-          <p:nvPr/>
-        </p:nvSpPr>
-        <p:spPr>
-          <a:xfrm>
-            <a:off x="8098536" y="4507992"/>
-            <a:ext cx="509016" cy="713232"/>
-          </a:xfrm>
-          <a:prstGeom prst="roundRect">
-            <a:avLst>
-              <a:gd name="adj" fmla="val 17964"/>
-            </a:avLst>
-          </a:prstGeom>
-          <a:solidFill>
-            <a:srgbClr val="FF6B5E"/>
-          </a:solidFill>
-          <a:ln/>
-        </p:spPr>
-      </p:sp>
-      <p:pic>
-        <p:nvPicPr>
-          <p:cNvPr id="75" name="Image 7" descr="preencoded.png">    </p:cNvPr>
+          <p:cNvPr id="40" name="Image 7" descr="HTML 시제품 화면: 판정">    </p:cNvPr>
           <p:cNvPicPr>
             <a:picLocks noChangeAspect="1"/>
           </p:cNvPicPr>
@@ -10519,8 +9372,8 @@
         </p:blipFill>
         <p:spPr>
           <a:xfrm>
-            <a:off x="8261604" y="4581144"/>
-            <a:ext cx="182880" cy="182880"/>
+            <a:off x="7443216" y="2980944"/>
+            <a:ext cx="1819656" cy="2368296"/>
           </a:xfrm>
           <a:prstGeom prst="rect">
             <a:avLst/>
@@ -10529,68 +9382,27 @@
       </p:pic>
       <p:sp>
         <p:nvSpPr>
-          <p:cNvPr id="76" name="Text 66"/>
-          <p:cNvSpPr txBox="1"/>
-          <p:nvPr/>
-        </p:nvSpPr>
-        <p:spPr>
-          <a:xfrm>
-            <a:off x="8098536" y="4782312"/>
-            <a:ext cx="509016" cy="402336"/>
-          </a:xfrm>
-          <a:prstGeom prst="rect">
-            <a:avLst/>
-          </a:prstGeom>
-          <a:noFill/>
-          <a:ln/>
-        </p:spPr>
-        <p:txBody>
-          <a:bodyPr wrap="square" lIns="0" tIns="0" rIns="0" bIns="0" rtlCol="0" anchor="ctr"/>
-          <a:lstStyle/>
-          <a:p>
-            <a:pPr algn="ctr" indent="0" marL="0">
-              <a:buNone/>
-            </a:pPr>
-            <a:r>
-              <a:rPr lang="ko-KR" altLang="en-US" sz="850" b="1" dirty="0">
-                <a:solidFill>
-                  <a:srgbClr val="0B1A33"/>
-                </a:solidFill>
-                <a:latin typeface="맑은 고딕" pitchFamily="34" charset="0"/>
-                <a:ea typeface="맑은 고딕" pitchFamily="34" charset="-122"/>
-                <a:cs typeface="맑은 고딕" pitchFamily="34" charset="-120"/>
-              </a:rPr>
-              <a:t>거부</a:t>
-            </a:r>
-            <a:endParaRPr lang="ko-KR" sz="850" dirty="0"/>
-          </a:p>
-        </p:txBody>
-      </p:sp>
-      <p:sp>
-        <p:nvSpPr>
-          <p:cNvPr id="77" name="Shape 67"/>
+          <p:cNvPr id="41" name="Shape 31"/>
           <p:cNvSpPr/>
           <p:nvPr/>
         </p:nvSpPr>
         <p:spPr>
           <a:xfrm>
-            <a:off x="8662416" y="4507992"/>
-            <a:ext cx="509016" cy="713232"/>
-          </a:xfrm>
-          <a:prstGeom prst="roundRect">
-            <a:avLst>
-              <a:gd name="adj" fmla="val 17964"/>
-            </a:avLst>
+            <a:off x="10282428" y="1188720"/>
+            <a:ext cx="658368" cy="658368"/>
+          </a:xfrm>
+          <a:prstGeom prst="ellipse">
+            <a:avLst/>
           </a:prstGeom>
           <a:solidFill>
-            <a:srgbClr val="F2B33D"/>
+            <a:srgbClr val="19B3B1"/>
           </a:solidFill>
           <a:ln/>
         </p:spPr>
       </p:sp>
       <p:pic>
         <p:nvPicPr>
-          <p:cNvPr id="78" name="Image 8" descr="preencoded.png">    </p:cNvPr>
+          <p:cNvPr id="42" name="Image 8" descr="preencoded.png">    </p:cNvPr>
           <p:cNvPicPr>
             <a:picLocks noChangeAspect="1"/>
           </p:cNvPicPr>
@@ -10604,106 +9416,6 @@
         </p:blipFill>
         <p:spPr>
           <a:xfrm>
-            <a:off x="8825484" y="4581144"/>
-            <a:ext cx="182880" cy="182880"/>
-          </a:xfrm>
-          <a:prstGeom prst="rect">
-            <a:avLst/>
-          </a:prstGeom>
-        </p:spPr>
-      </p:pic>
-      <p:sp>
-        <p:nvSpPr>
-          <p:cNvPr id="79" name="Text 68"/>
-          <p:cNvSpPr txBox="1"/>
-          <p:nvPr/>
-        </p:nvSpPr>
-        <p:spPr>
-          <a:xfrm>
-            <a:off x="8662416" y="4782312"/>
-            <a:ext cx="509016" cy="402336"/>
-          </a:xfrm>
-          <a:prstGeom prst="rect">
-            <a:avLst/>
-          </a:prstGeom>
-          <a:noFill/>
-          <a:ln/>
-        </p:spPr>
-        <p:txBody>
-          <a:bodyPr wrap="square" lIns="0" tIns="0" rIns="0" bIns="0" rtlCol="0" anchor="ctr"/>
-          <a:lstStyle/>
-          <a:p>
-            <a:pPr algn="ctr" indent="0" marL="0">
-              <a:buNone/>
-            </a:pPr>
-            <a:r>
-              <a:rPr lang="ko-KR" altLang="en-US" sz="850" b="1" dirty="0">
-                <a:solidFill>
-                  <a:srgbClr val="0B1A33"/>
-                </a:solidFill>
-                <a:latin typeface="맑은 고딕" pitchFamily="34" charset="0"/>
-                <a:ea typeface="맑은 고딕" pitchFamily="34" charset="-122"/>
-                <a:cs typeface="맑은 고딕" pitchFamily="34" charset="-120"/>
-              </a:rPr>
-              <a:t>추가</a:t>
-            </a:r>
-            <a:endParaRPr lang="ko-KR" sz="850" dirty="0"/>
-          </a:p>
-          <a:p>
-            <a:pPr algn="ctr" indent="0" marL="0">
-              <a:buNone/>
-            </a:pPr>
-            <a:r>
-              <a:rPr lang="ko-KR" altLang="en-US" sz="850" b="1" dirty="0">
-                <a:solidFill>
-                  <a:srgbClr val="0B1A33"/>
-                </a:solidFill>
-                <a:latin typeface="맑은 고딕" pitchFamily="34" charset="0"/>
-                <a:ea typeface="맑은 고딕" pitchFamily="34" charset="-122"/>
-                <a:cs typeface="맑은 고딕" pitchFamily="34" charset="-120"/>
-              </a:rPr>
-              <a:t>확인</a:t>
-            </a:r>
-            <a:endParaRPr lang="ko-KR" sz="850" dirty="0"/>
-          </a:p>
-        </p:txBody>
-      </p:sp>
-      <p:sp>
-        <p:nvSpPr>
-          <p:cNvPr id="80" name="Shape 69"/>
-          <p:cNvSpPr/>
-          <p:nvPr/>
-        </p:nvSpPr>
-        <p:spPr>
-          <a:xfrm>
-            <a:off x="10282428" y="1188720"/>
-            <a:ext cx="658368" cy="658368"/>
-          </a:xfrm>
-          <a:prstGeom prst="ellipse">
-            <a:avLst/>
-          </a:prstGeom>
-          <a:solidFill>
-            <a:srgbClr val="19B3B1"/>
-          </a:solidFill>
-          <a:ln/>
-        </p:spPr>
-      </p:sp>
-      <p:pic>
-        <p:nvPicPr>
-          <p:cNvPr id="81" name="Image 9" descr="preencoded.png">    </p:cNvPr>
-          <p:cNvPicPr>
-            <a:picLocks noChangeAspect="1"/>
-          </p:cNvPicPr>
-          <p:nvPr/>
-        </p:nvPicPr>
-        <p:blipFill>
-          <a:blip r:embed="rId10"/>
-          <a:stretch>
-            <a:fillRect/>
-          </a:stretch>
-        </p:blipFill>
-        <p:spPr>
-          <a:xfrm>
             <a:off x="10447020" y="1353312"/>
             <a:ext cx="329184" cy="329184"/>
           </a:xfrm>
@@ -10714,7 +9426,7 @@
       </p:pic>
       <p:sp>
         <p:nvSpPr>
-          <p:cNvPr id="82" name="Shape 70"/>
+          <p:cNvPr id="43" name="Shape 32"/>
           <p:cNvSpPr/>
           <p:nvPr/>
         </p:nvSpPr>
@@ -10736,7 +9448,7 @@
       </p:sp>
       <p:sp>
         <p:nvSpPr>
-          <p:cNvPr id="83" name="Text 71"/>
+          <p:cNvPr id="44" name="Text 33"/>
           <p:cNvSpPr txBox="1"/>
           <p:nvPr/>
         </p:nvSpPr>
@@ -10775,7 +9487,7 @@
       </p:sp>
       <p:sp>
         <p:nvSpPr>
-          <p:cNvPr id="84" name="Text 72"/>
+          <p:cNvPr id="45" name="Text 34"/>
           <p:cNvSpPr txBox="1"/>
           <p:nvPr/>
         </p:nvSpPr>
@@ -10814,7 +9526,7 @@
       </p:sp>
       <p:sp>
         <p:nvSpPr>
-          <p:cNvPr id="85" name="Text 73"/>
+          <p:cNvPr id="46" name="Text 35"/>
           <p:cNvSpPr txBox="1"/>
           <p:nvPr/>
         </p:nvSpPr>
@@ -10870,7 +9582,7 @@
       </p:sp>
       <p:sp>
         <p:nvSpPr>
-          <p:cNvPr id="86" name="Shape 74"/>
+          <p:cNvPr id="47" name="Shape 36"/>
           <p:cNvSpPr/>
           <p:nvPr/>
         </p:nvSpPr>
@@ -10895,46 +9607,24 @@
           </a:ln>
         </p:spPr>
       </p:sp>
-      <p:sp>
-        <p:nvSpPr>
-          <p:cNvPr id="87" name="Shape 75"/>
-          <p:cNvSpPr/>
-          <p:nvPr/>
-        </p:nvSpPr>
-        <p:spPr>
-          <a:xfrm>
-            <a:off x="9701784" y="2980944"/>
-            <a:ext cx="1819656" cy="2368296"/>
-          </a:xfrm>
-          <a:prstGeom prst="roundRect">
-            <a:avLst>
-              <a:gd name="adj" fmla="val 6030"/>
-            </a:avLst>
-          </a:prstGeom>
-          <a:solidFill>
-            <a:srgbClr val="F4F6FA"/>
-          </a:solidFill>
-          <a:ln/>
-        </p:spPr>
-      </p:sp>
       <p:pic>
         <p:nvPicPr>
-          <p:cNvPr id="88" name="Image 10" descr="preencoded.png">    </p:cNvPr>
+          <p:cNvPr id="48" name="Image 9" descr="HTML 시제품 화면: 결과 해설·성장">    </p:cNvPr>
           <p:cNvPicPr>
             <a:picLocks noChangeAspect="1"/>
           </p:cNvPicPr>
           <p:nvPr/>
         </p:nvPicPr>
         <p:blipFill>
-          <a:blip r:embed="rId11"/>
+          <a:blip r:embed="rId10"/>
           <a:stretch>
             <a:fillRect/>
           </a:stretch>
         </p:blipFill>
         <p:spPr>
           <a:xfrm>
-            <a:off x="10383012" y="3145536"/>
-            <a:ext cx="457200" cy="457200"/>
+            <a:off x="9701784" y="2980944"/>
+            <a:ext cx="1819656" cy="2368296"/>
           </a:xfrm>
           <a:prstGeom prst="rect">
             <a:avLst/>
@@ -10943,246 +9633,7 @@
       </p:pic>
       <p:sp>
         <p:nvSpPr>
-          <p:cNvPr id="89" name="Text 76"/>
-          <p:cNvSpPr txBox="1"/>
-          <p:nvPr/>
-        </p:nvSpPr>
-        <p:spPr>
-          <a:xfrm>
-            <a:off x="9701784" y="3666744"/>
-            <a:ext cx="1819656" cy="256032"/>
-          </a:xfrm>
-          <a:prstGeom prst="rect">
-            <a:avLst/>
-          </a:prstGeom>
-          <a:noFill/>
-          <a:ln/>
-        </p:spPr>
-        <p:txBody>
-          <a:bodyPr wrap="square" lIns="0" tIns="0" rIns="0" bIns="0" rtlCol="0" anchor="t"/>
-          <a:lstStyle/>
-          <a:p>
-            <a:pPr algn="ctr" indent="0" marL="0">
-              <a:buNone/>
-            </a:pPr>
-            <a:r>
-              <a:rPr lang="ko-KR" altLang="en-US" sz="1050" b="1" dirty="0">
-                <a:solidFill>
-                  <a:srgbClr val="1C2433"/>
-                </a:solidFill>
-                <a:latin typeface="맑은 고딕" pitchFamily="34" charset="0"/>
-                <a:ea typeface="맑은 고딕" pitchFamily="34" charset="-122"/>
-                <a:cs typeface="맑은 고딕" pitchFamily="34" charset="-120"/>
-              </a:rPr>
-              <a:t>정확한 판단이에요!</a:t>
-            </a:r>
-            <a:endParaRPr lang="ko-KR" sz="1050" dirty="0"/>
-          </a:p>
-        </p:txBody>
-      </p:sp>
-      <p:sp>
-        <p:nvSpPr>
-          <p:cNvPr id="90" name="Text 77"/>
-          <p:cNvSpPr txBox="1"/>
-          <p:nvPr/>
-        </p:nvSpPr>
-        <p:spPr>
-          <a:xfrm>
-            <a:off x="9701784" y="3922776"/>
-            <a:ext cx="1819656" cy="219456"/>
-          </a:xfrm>
-          <a:prstGeom prst="rect">
-            <a:avLst/>
-          </a:prstGeom>
-          <a:noFill/>
-          <a:ln/>
-        </p:spPr>
-        <p:txBody>
-          <a:bodyPr wrap="square" lIns="0" tIns="0" rIns="0" bIns="0" rtlCol="0" anchor="t"/>
-          <a:lstStyle/>
-          <a:p>
-            <a:pPr algn="ctr" indent="0" marL="0">
-              <a:buNone/>
-            </a:pPr>
-            <a:r>
-              <a:rPr lang="ko-KR" altLang="en-US" sz="900" b="1" dirty="0">
-                <a:solidFill>
-                  <a:srgbClr val="0E7C7B"/>
-                </a:solidFill>
-                <a:latin typeface="맑은 고딕" pitchFamily="34" charset="0"/>
-                <a:ea typeface="맑은 고딕" pitchFamily="34" charset="-122"/>
-                <a:cs typeface="맑은 고딕" pitchFamily="34" charset="-120"/>
-              </a:rPr>
-              <a:t>+170점 · 사칭 단서 2/2</a:t>
-            </a:r>
-            <a:endParaRPr lang="ko-KR" sz="900" dirty="0"/>
-          </a:p>
-        </p:txBody>
-      </p:sp>
-      <p:sp>
-        <p:nvSpPr>
-          <p:cNvPr id="91" name="Shape 78"/>
-          <p:cNvSpPr/>
-          <p:nvPr/>
-        </p:nvSpPr>
-        <p:spPr>
-          <a:xfrm>
-            <a:off x="9793224" y="4224528"/>
-            <a:ext cx="1636776" cy="566928"/>
-          </a:xfrm>
-          <a:prstGeom prst="roundRect">
-            <a:avLst>
-              <a:gd name="adj" fmla="val 12903"/>
-            </a:avLst>
-          </a:prstGeom>
-          <a:solidFill>
-            <a:srgbClr val="FFFFFF"/>
-          </a:solidFill>
-          <a:ln/>
-        </p:spPr>
-      </p:sp>
-      <p:sp>
-        <p:nvSpPr>
-          <p:cNvPr id="92" name="Text 79"/>
-          <p:cNvSpPr txBox="1"/>
-          <p:nvPr/>
-        </p:nvSpPr>
-        <p:spPr>
-          <a:xfrm>
-            <a:off x="9866376" y="4261104"/>
-            <a:ext cx="1545336" cy="502920"/>
-          </a:xfrm>
-          <a:prstGeom prst="rect">
-            <a:avLst/>
-          </a:prstGeom>
-          <a:noFill/>
-          <a:ln/>
-        </p:spPr>
-        <p:txBody>
-          <a:bodyPr wrap="square" lIns="0" tIns="0" rIns="0" bIns="0" rtlCol="0" anchor="ctr"/>
-          <a:lstStyle/>
-          <a:p>
-            <a:pPr indent="0" marL="0">
-              <a:buNone/>
-            </a:pPr>
-            <a:r>
-              <a:rPr lang="ko-KR" altLang="en-US" sz="850" dirty="0">
-                <a:solidFill>
-                  <a:srgbClr val="1C2433"/>
-                </a:solidFill>
-                <a:latin typeface="맑은 고딕" pitchFamily="34" charset="0"/>
-                <a:ea typeface="맑은 고딕" pitchFamily="34" charset="-122"/>
-                <a:cs typeface="맑은 고딕" pitchFamily="34" charset="-120"/>
-              </a:rPr>
-              <a:t>링크 대신 학교 앱에서</a:t>
-            </a:r>
-            <a:endParaRPr lang="ko-KR" sz="850" dirty="0"/>
-          </a:p>
-          <a:p>
-            <a:pPr indent="0" marL="0">
-              <a:buNone/>
-            </a:pPr>
-            <a:r>
-              <a:rPr lang="ko-KR" altLang="en-US" sz="850" dirty="0">
-                <a:solidFill>
-                  <a:srgbClr val="1C2433"/>
-                </a:solidFill>
-                <a:latin typeface="맑은 고딕" pitchFamily="34" charset="0"/>
-                <a:ea typeface="맑은 고딕" pitchFamily="34" charset="-122"/>
-                <a:cs typeface="맑은 고딕" pitchFamily="34" charset="-120"/>
-              </a:rPr>
-              <a:t>직접 확인하고 신고해요</a:t>
-            </a:r>
-            <a:endParaRPr lang="ko-KR" sz="850" dirty="0"/>
-          </a:p>
-        </p:txBody>
-      </p:sp>
-      <p:sp>
-        <p:nvSpPr>
-          <p:cNvPr id="93" name="Text 80"/>
-          <p:cNvSpPr txBox="1"/>
-          <p:nvPr/>
-        </p:nvSpPr>
-        <p:spPr>
-          <a:xfrm>
-            <a:off x="9811512" y="4937760"/>
-            <a:ext cx="914400" cy="182880"/>
-          </a:xfrm>
-          <a:prstGeom prst="rect">
-            <a:avLst/>
-          </a:prstGeom>
-          <a:noFill/>
-          <a:ln/>
-        </p:spPr>
-        <p:txBody>
-          <a:bodyPr wrap="square" lIns="0" tIns="0" rIns="0" bIns="0" rtlCol="0" anchor="t"/>
-          <a:lstStyle/>
-          <a:p>
-            <a:pPr indent="0" marL="0">
-              <a:buNone/>
-            </a:pPr>
-            <a:r>
-              <a:rPr lang="ko-KR" altLang="en-US" sz="750" dirty="0">
-                <a:solidFill>
-                  <a:srgbClr val="5A6576"/>
-                </a:solidFill>
-                <a:latin typeface="맑은 고딕" pitchFamily="34" charset="0"/>
-                <a:ea typeface="맑은 고딕" pitchFamily="34" charset="-122"/>
-                <a:cs typeface="맑은 고딕" pitchFamily="34" charset="-120"/>
-              </a:rPr>
-              <a:t>피싱 숙달도</a:t>
-            </a:r>
-            <a:endParaRPr lang="ko-KR" sz="750" dirty="0"/>
-          </a:p>
-        </p:txBody>
-      </p:sp>
-      <p:sp>
-        <p:nvSpPr>
-          <p:cNvPr id="94" name="Shape 81"/>
-          <p:cNvSpPr/>
-          <p:nvPr/>
-        </p:nvSpPr>
-        <p:spPr>
-          <a:xfrm>
-            <a:off x="9811512" y="5148072"/>
-            <a:ext cx="1600200" cy="91440"/>
-          </a:xfrm>
-          <a:prstGeom prst="roundRect">
-            <a:avLst>
-              <a:gd name="adj" fmla="val 50000"/>
-            </a:avLst>
-          </a:prstGeom>
-          <a:solidFill>
-            <a:srgbClr val="D5DEEA"/>
-          </a:solidFill>
-          <a:ln/>
-        </p:spPr>
-      </p:sp>
-      <p:sp>
-        <p:nvSpPr>
-          <p:cNvPr id="95" name="Shape 82"/>
-          <p:cNvSpPr/>
-          <p:nvPr/>
-        </p:nvSpPr>
-        <p:spPr>
-          <a:xfrm>
-            <a:off x="9811512" y="5148072"/>
-            <a:ext cx="1120140" cy="91440"/>
-          </a:xfrm>
-          <a:prstGeom prst="roundRect">
-            <a:avLst>
-              <a:gd name="adj" fmla="val 50000"/>
-            </a:avLst>
-          </a:prstGeom>
-          <a:solidFill>
-            <a:srgbClr val="19B3B1"/>
-          </a:solidFill>
-          <a:ln/>
-        </p:spPr>
-      </p:sp>
-      <p:sp>
-        <p:nvSpPr>
-          <p:cNvPr id="96" name="Shape 83"/>
+          <p:cNvPr id="49" name="Shape 37"/>
           <p:cNvSpPr/>
           <p:nvPr/>
         </p:nvSpPr>
@@ -11209,7 +9660,7 @@
       </p:sp>
       <p:sp>
         <p:nvSpPr>
-          <p:cNvPr id="97" name="Text 84"/>
+          <p:cNvPr id="50" name="Text 38"/>
           <p:cNvSpPr txBox="1"/>
           <p:nvPr/>
         </p:nvSpPr>
@@ -11254,7 +9705,7 @@
                 <a:ea typeface="맑은 고딕" pitchFamily="34" charset="-122"/>
                 <a:cs typeface="맑은 고딕" pitchFamily="34" charset="-120"/>
               </a:rPr>
-              <a:t>학교 지원팀을 사칭한 메시지 도착 → 발신 주소를 등록 연락처와 비교 → 비밀번호 입력 요구 확인 → 근거를 들어 거부 → 사칭 단서와 안전한 대응법 학습</a:t>
+              <a:t>택배회사를 사칭한 문자 도착 → 링크 주소를 공식 연락처와 대조 → 할머니의 기록에 기다리는 택배가 없음을 확인 → 거부하고 신고 → 해설로 안전한 대응법 학습</a:t>
             </a:r>
             <a:endParaRPr lang="ko-KR" sz="1400" dirty="0"/>
           </a:p>
@@ -11382,8 +9833,8 @@
         </p:nvSpPr>
         <p:spPr>
           <a:xfrm>
-            <a:off x="9902952" y="521208"/>
-            <a:ext cx="1737360" cy="310896"/>
+            <a:off x="8988552" y="521208"/>
+            <a:ext cx="2651760" cy="310896"/>
           </a:xfrm>
           <a:prstGeom prst="roundRect">
             <a:avLst>
@@ -11404,8 +9855,8 @@
         </p:nvSpPr>
         <p:spPr>
           <a:xfrm>
-            <a:off x="9902952" y="521208"/>
-            <a:ext cx="1737360" cy="310896"/>
+            <a:off x="8988552" y="521208"/>
+            <a:ext cx="2651760" cy="310896"/>
           </a:xfrm>
           <a:prstGeom prst="rect">
             <a:avLst/>
@@ -11429,7 +9880,7 @@
                 <a:ea typeface="맑은 고딕" pitchFamily="34" charset="-122"/>
                 <a:cs typeface="맑은 고딕" pitchFamily="34" charset="-120"/>
               </a:rPr>
-              <a:t>UI 목업 · 예상안</a:t>
+              <a:t>HTML 시제품 화면 · Unity 구현 전</a:t>
             </a:r>
             <a:endParaRPr lang="ko-KR" sz="1100" dirty="0"/>
           </a:p>
@@ -11549,7 +10000,7 @@
                 <a:ea typeface="맑은 고딕" pitchFamily="34" charset="-122"/>
                 <a:cs typeface="맑은 고딕" pitchFamily="34" charset="-120"/>
               </a:rPr>
-              <a:t>새 사건 알림 → [검토 시작]</a:t>
+              <a:t>오늘의 소식·조건 → [업무 시작]</a:t>
             </a:r>
             <a:endParaRPr lang="ko-KR" sz="1200" dirty="0"/>
           </a:p>
@@ -11611,48 +10062,9 @@
           <a:ln/>
         </p:spPr>
       </p:sp>
-      <p:sp>
-        <p:nvSpPr>
-          <p:cNvPr id="11" name="Text 9"/>
-          <p:cNvSpPr txBox="1"/>
-          <p:nvPr/>
-        </p:nvSpPr>
-        <p:spPr>
-          <a:xfrm>
-            <a:off x="634959" y="5908853"/>
-            <a:ext cx="1985345" cy="91440"/>
-          </a:xfrm>
-          <a:prstGeom prst="rect">
-            <a:avLst/>
-          </a:prstGeom>
-          <a:noFill/>
-          <a:ln/>
-        </p:spPr>
-        <p:txBody>
-          <a:bodyPr wrap="square" lIns="0" tIns="0" rIns="0" bIns="0" rtlCol="0" anchor="t"/>
-          <a:lstStyle/>
-          <a:p>
-            <a:pPr algn="ctr" indent="0" marL="0">
-              <a:buNone/>
-            </a:pPr>
-            <a:r>
-              <a:rPr lang="ko-KR" altLang="en-US" sz="550" b="1" spc="300" kern="0" dirty="0">
-                <a:solidFill>
-                  <a:srgbClr val="6F86A6"/>
-                </a:solidFill>
-                <a:latin typeface="맑은 고딕" pitchFamily="34" charset="0"/>
-                <a:ea typeface="맑은 고딕" pitchFamily="34" charset="-122"/>
-                <a:cs typeface="맑은 고딕" pitchFamily="34" charset="-120"/>
-              </a:rPr>
-              <a:t>MOCKUP</a:t>
-            </a:r>
-            <a:endParaRPr lang="ko-KR" sz="550" dirty="0"/>
-          </a:p>
-        </p:txBody>
-      </p:sp>
       <p:pic>
         <p:nvPicPr>
-          <p:cNvPr id="12" name="Image 0" descr="assets/phone_office.png">    </p:cNvPr>
+          <p:cNvPr id="11" name="Image 0" descr="HTML 시제품 화면: 사건 접수">    </p:cNvPr>
           <p:cNvPicPr>
             <a:picLocks noChangeAspect="1"/>
           </p:cNvPicPr>
@@ -11666,8 +10078,8 @@
         </p:blipFill>
         <p:spPr>
           <a:xfrm>
-            <a:off x="634959" y="1863547"/>
-            <a:ext cx="1985345" cy="1012526"/>
+            <a:off x="693748" y="1680667"/>
+            <a:ext cx="1867768" cy="4155034"/>
           </a:xfrm>
           <a:prstGeom prst="rect">
             <a:avLst/>
@@ -11676,75 +10088,14 @@
       </p:pic>
       <p:sp>
         <p:nvSpPr>
-          <p:cNvPr id="13" name="Shape 10"/>
+          <p:cNvPr id="12" name="Shape 9"/>
           <p:cNvSpPr/>
           <p:nvPr/>
         </p:nvSpPr>
         <p:spPr>
           <a:xfrm>
-            <a:off x="634959" y="1845259"/>
-            <a:ext cx="1985345" cy="256032"/>
-          </a:xfrm>
-          <a:prstGeom prst="rect">
-            <a:avLst/>
-          </a:prstGeom>
-          <a:solidFill>
-            <a:srgbClr val="06122A">
-              <a:alpha val="80000"/>
-            </a:srgbClr>
-          </a:solidFill>
-          <a:ln/>
-        </p:spPr>
-      </p:sp>
-      <p:sp>
-        <p:nvSpPr>
-          <p:cNvPr id="14" name="Text 11"/>
-          <p:cNvSpPr txBox="1"/>
-          <p:nvPr/>
-        </p:nvSpPr>
-        <p:spPr>
-          <a:xfrm>
-            <a:off x="781263" y="1634947"/>
-            <a:ext cx="457200" cy="164592"/>
-          </a:xfrm>
-          <a:prstGeom prst="rect">
-            <a:avLst/>
-          </a:prstGeom>
-          <a:noFill/>
-          <a:ln/>
-        </p:spPr>
-        <p:txBody>
-          <a:bodyPr wrap="square" lIns="0" tIns="0" rIns="0" bIns="0" rtlCol="0" anchor="t"/>
-          <a:lstStyle/>
-          <a:p>
-            <a:pPr indent="0" marL="0">
-              <a:buNone/>
-            </a:pPr>
-            <a:r>
-              <a:rPr lang="ko-KR" altLang="en-US" sz="750" b="1" dirty="0">
-                <a:solidFill>
-                  <a:srgbClr val="FFFFFF"/>
-                </a:solidFill>
-                <a:latin typeface="맑은 고딕" pitchFamily="34" charset="0"/>
-                <a:ea typeface="맑은 고딕" pitchFamily="34" charset="-122"/>
-                <a:cs typeface="맑은 고딕" pitchFamily="34" charset="-120"/>
-              </a:rPr>
-              <a:t>9:41</a:t>
-            </a:r>
-            <a:endParaRPr lang="ko-KR" sz="750" dirty="0"/>
-          </a:p>
-        </p:txBody>
-      </p:sp>
-      <p:sp>
-        <p:nvSpPr>
-          <p:cNvPr id="15" name="Shape 12"/>
-          <p:cNvSpPr/>
-          <p:nvPr/>
-        </p:nvSpPr>
-        <p:spPr>
-          <a:xfrm>
-            <a:off x="1371600" y="1644091"/>
-            <a:ext cx="512064" cy="137160"/>
+            <a:off x="3828288" y="1078992"/>
+            <a:ext cx="1554480" cy="310896"/>
           </a:xfrm>
           <a:prstGeom prst="roundRect">
             <a:avLst>
@@ -11752,503 +10103,63 @@
             </a:avLst>
           </a:prstGeom>
           <a:solidFill>
-            <a:srgbClr val="040B17"/>
+            <a:srgbClr val="19B3B1"/>
           </a:solidFill>
           <a:ln/>
         </p:spPr>
       </p:sp>
       <p:sp>
         <p:nvSpPr>
-          <p:cNvPr id="16" name="Shape 13"/>
+          <p:cNvPr id="13" name="Text 10"/>
+          <p:cNvSpPr txBox="1"/>
+          <p:nvPr/>
+        </p:nvSpPr>
+        <p:spPr>
+          <a:xfrm>
+            <a:off x="3828288" y="1078992"/>
+            <a:ext cx="1554480" cy="310896"/>
+          </a:xfrm>
+          <a:prstGeom prst="rect">
+            <a:avLst/>
+          </a:prstGeom>
+          <a:noFill/>
+          <a:ln/>
+        </p:spPr>
+        <p:txBody>
+          <a:bodyPr wrap="square" lIns="0" tIns="0" rIns="0" bIns="0" rtlCol="0" anchor="ctr"/>
+          <a:lstStyle/>
+          <a:p>
+            <a:pPr algn="ctr" indent="0" marL="0">
+              <a:buNone/>
+            </a:pPr>
+            <a:r>
+              <a:rPr lang="ko-KR" altLang="en-US" sz="1300" b="1" dirty="0">
+                <a:solidFill>
+                  <a:srgbClr val="06122A"/>
+                </a:solidFill>
+                <a:latin typeface="맑은 고딕" pitchFamily="34" charset="0"/>
+                <a:ea typeface="맑은 고딕" pitchFamily="34" charset="-122"/>
+                <a:cs typeface="맑은 고딕" pitchFamily="34" charset="-120"/>
+              </a:rPr>
+              <a:t>B  문서 확인</a:t>
+            </a:r>
+            <a:endParaRPr lang="ko-KR" sz="1300" dirty="0"/>
+          </a:p>
+        </p:txBody>
+      </p:sp>
+      <p:sp>
+        <p:nvSpPr>
+          <p:cNvPr id="14" name="Shape 11"/>
           <p:cNvSpPr/>
           <p:nvPr/>
         </p:nvSpPr>
         <p:spPr>
           <a:xfrm>
-            <a:off x="2236257" y="1666951"/>
-            <a:ext cx="219456" cy="100584"/>
-          </a:xfrm>
-          <a:prstGeom prst="roundRect">
-            <a:avLst>
-              <a:gd name="adj" fmla="val 27273"/>
-            </a:avLst>
-          </a:prstGeom>
-          <a:solidFill>
-            <a:srgbClr val="FFFFFF">
-              <a:alpha val="90000"/>
-            </a:srgbClr>
-          </a:solidFill>
-          <a:ln/>
-        </p:spPr>
-      </p:sp>
-      <p:sp>
-        <p:nvSpPr>
-          <p:cNvPr id="17" name="Text 14"/>
-          <p:cNvSpPr txBox="1"/>
-          <p:nvPr/>
-        </p:nvSpPr>
-        <p:spPr>
-          <a:xfrm>
-            <a:off x="753831" y="1881835"/>
-            <a:ext cx="1747601" cy="182880"/>
-          </a:xfrm>
-          <a:prstGeom prst="rect">
-            <a:avLst/>
-          </a:prstGeom>
-          <a:noFill/>
-          <a:ln/>
-        </p:spPr>
-        <p:txBody>
-          <a:bodyPr wrap="square" lIns="0" tIns="0" rIns="0" bIns="0" rtlCol="0" anchor="t"/>
-          <a:lstStyle/>
-          <a:p>
-            <a:pPr indent="0" marL="0">
-              <a:buNone/>
-            </a:pPr>
-            <a:r>
-              <a:rPr lang="ko-KR" altLang="en-US" sz="750" b="1" dirty="0">
-                <a:solidFill>
-                  <a:srgbClr val="FFFFFF"/>
-                </a:solidFill>
-                <a:latin typeface="맑은 고딕" pitchFamily="34" charset="0"/>
-                <a:ea typeface="맑은 고딕" pitchFamily="34" charset="-122"/>
-                <a:cs typeface="맑은 고딕" pitchFamily="34" charset="-120"/>
-              </a:rPr>
-              <a:t>Day 5 · 누리 디지털 안전 센터</a:t>
-            </a:r>
-            <a:endParaRPr lang="ko-KR" sz="750" dirty="0"/>
-          </a:p>
-        </p:txBody>
-      </p:sp>
-      <p:sp>
-        <p:nvSpPr>
-          <p:cNvPr id="18" name="Shape 15"/>
-          <p:cNvSpPr/>
-          <p:nvPr/>
-        </p:nvSpPr>
-        <p:spPr>
-          <a:xfrm>
-            <a:off x="753831" y="2960827"/>
-            <a:ext cx="1747601" cy="384048"/>
-          </a:xfrm>
-          <a:prstGeom prst="roundRect">
-            <a:avLst>
-              <a:gd name="adj" fmla="val 23810"/>
-            </a:avLst>
-          </a:prstGeom>
-          <a:solidFill>
-            <a:srgbClr val="FFFFFF"/>
-          </a:solidFill>
-          <a:ln/>
-        </p:spPr>
-      </p:sp>
-      <p:pic>
-        <p:nvPicPr>
-          <p:cNvPr id="19" name="Image 1" descr="preencoded.png">    </p:cNvPr>
-          <p:cNvPicPr>
-            <a:picLocks noChangeAspect="1"/>
-          </p:cNvPicPr>
-          <p:nvPr/>
-        </p:nvPicPr>
-        <p:blipFill>
-          <a:blip r:embed="rId2"/>
-          <a:stretch>
-            <a:fillRect/>
-          </a:stretch>
-        </p:blipFill>
-        <p:spPr>
-          <a:xfrm>
-            <a:off x="826983" y="3024835"/>
-            <a:ext cx="256032" cy="256032"/>
-          </a:xfrm>
-          <a:prstGeom prst="rect">
-            <a:avLst/>
-          </a:prstGeom>
-        </p:spPr>
-      </p:pic>
-      <p:sp>
-        <p:nvSpPr>
-          <p:cNvPr id="20" name="Text 16"/>
-          <p:cNvSpPr txBox="1"/>
-          <p:nvPr/>
-        </p:nvSpPr>
-        <p:spPr>
-          <a:xfrm>
-            <a:off x="1156167" y="2960827"/>
-            <a:ext cx="1290401" cy="384048"/>
-          </a:xfrm>
-          <a:prstGeom prst="rect">
-            <a:avLst/>
-          </a:prstGeom>
-          <a:noFill/>
-          <a:ln/>
-        </p:spPr>
-        <p:txBody>
-          <a:bodyPr wrap="square" lIns="0" tIns="0" rIns="0" bIns="0" rtlCol="0" anchor="ctr"/>
-          <a:lstStyle/>
-          <a:p>
-            <a:pPr indent="0" marL="0">
-              <a:buNone/>
-            </a:pPr>
-            <a:r>
-              <a:rPr lang="ko-KR" altLang="en-US" sz="900" b="1" dirty="0">
-                <a:solidFill>
-                  <a:srgbClr val="1C2433"/>
-                </a:solidFill>
-                <a:latin typeface="맑은 고딕" pitchFamily="34" charset="0"/>
-                <a:ea typeface="맑은 고딕" pitchFamily="34" charset="-122"/>
-                <a:cs typeface="맑은 고딕" pitchFamily="34" charset="-120"/>
-              </a:rPr>
-              <a:t>도트: 새 사건이 도착했어요!</a:t>
-            </a:r>
-            <a:endParaRPr lang="ko-KR" sz="900" dirty="0"/>
-          </a:p>
-        </p:txBody>
-      </p:sp>
-      <p:sp>
-        <p:nvSpPr>
-          <p:cNvPr id="21" name="Shape 17"/>
-          <p:cNvSpPr/>
-          <p:nvPr/>
-        </p:nvSpPr>
-        <p:spPr>
-          <a:xfrm>
-            <a:off x="753831" y="3463747"/>
-            <a:ext cx="1747601" cy="1371600"/>
-          </a:xfrm>
-          <a:prstGeom prst="roundRect">
-            <a:avLst>
-              <a:gd name="adj" fmla="val 8000"/>
-            </a:avLst>
-          </a:prstGeom>
-          <a:solidFill>
-            <a:srgbClr val="14284B"/>
-          </a:solidFill>
-          <a:ln w="19050">
-            <a:solidFill>
-              <a:srgbClr val="19B3B1"/>
-            </a:solidFill>
-            <a:prstDash val="solid"/>
-          </a:ln>
-        </p:spPr>
-      </p:sp>
-      <p:pic>
-        <p:nvPicPr>
-          <p:cNvPr id="22" name="Image 2" descr="preencoded.png">    </p:cNvPr>
-          <p:cNvPicPr>
-            <a:picLocks noChangeAspect="1"/>
-          </p:cNvPicPr>
-          <p:nvPr/>
-        </p:nvPicPr>
-        <p:blipFill>
-          <a:blip r:embed="rId3"/>
-          <a:stretch>
-            <a:fillRect/>
-          </a:stretch>
-        </p:blipFill>
-        <p:spPr>
-          <a:xfrm>
-            <a:off x="863559" y="3573475"/>
-            <a:ext cx="237744" cy="237744"/>
-          </a:xfrm>
-          <a:prstGeom prst="rect">
-            <a:avLst/>
-          </a:prstGeom>
-        </p:spPr>
-      </p:pic>
-      <p:sp>
-        <p:nvSpPr>
-          <p:cNvPr id="23" name="Text 18"/>
-          <p:cNvSpPr txBox="1"/>
-          <p:nvPr/>
-        </p:nvSpPr>
-        <p:spPr>
-          <a:xfrm>
-            <a:off x="1165311" y="3573475"/>
-            <a:ext cx="1280160" cy="237744"/>
-          </a:xfrm>
-          <a:prstGeom prst="rect">
-            <a:avLst/>
-          </a:prstGeom>
-          <a:noFill/>
-          <a:ln/>
-        </p:spPr>
-        <p:txBody>
-          <a:bodyPr wrap="square" lIns="0" tIns="0" rIns="0" bIns="0" rtlCol="0" anchor="ctr"/>
-          <a:lstStyle/>
-          <a:p>
-            <a:pPr indent="0" marL="0">
-              <a:buNone/>
-            </a:pPr>
-            <a:r>
-              <a:rPr lang="ko-KR" altLang="en-US" sz="900" b="1" dirty="0">
-                <a:solidFill>
-                  <a:srgbClr val="F2B33D"/>
-                </a:solidFill>
-                <a:latin typeface="맑은 고딕" pitchFamily="34" charset="0"/>
-                <a:ea typeface="맑은 고딕" pitchFamily="34" charset="-122"/>
-                <a:cs typeface="맑은 고딕" pitchFamily="34" charset="-120"/>
-              </a:rPr>
-              <a:t>새 사건  #C2-07</a:t>
-            </a:r>
-            <a:endParaRPr lang="ko-KR" sz="900" dirty="0"/>
-          </a:p>
-        </p:txBody>
-      </p:sp>
-      <p:sp>
-        <p:nvSpPr>
-          <p:cNvPr id="24" name="Text 19"/>
-          <p:cNvSpPr txBox="1"/>
-          <p:nvPr/>
-        </p:nvSpPr>
-        <p:spPr>
-          <a:xfrm>
-            <a:off x="863559" y="3893515"/>
-            <a:ext cx="1528145" cy="502920"/>
-          </a:xfrm>
-          <a:prstGeom prst="rect">
-            <a:avLst/>
-          </a:prstGeom>
-          <a:noFill/>
-          <a:ln/>
-        </p:spPr>
-        <p:txBody>
-          <a:bodyPr wrap="square" lIns="0" tIns="0" rIns="0" bIns="0" rtlCol="0" anchor="t"/>
-          <a:lstStyle/>
-          <a:p>
-            <a:pPr indent="0" marL="0">
-              <a:buNone/>
-            </a:pPr>
-            <a:r>
-              <a:rPr lang="ko-KR" altLang="en-US" sz="1150" b="1" dirty="0">
-                <a:solidFill>
-                  <a:srgbClr val="FFFFFF"/>
-                </a:solidFill>
-                <a:latin typeface="맑은 고딕" pitchFamily="34" charset="0"/>
-                <a:ea typeface="맑은 고딕" pitchFamily="34" charset="-122"/>
-                <a:cs typeface="맑은 고딕" pitchFamily="34" charset="-120"/>
-              </a:rPr>
-              <a:t>‘학교 지원팀’ 메시지,</a:t>
-            </a:r>
-            <a:endParaRPr lang="ko-KR" sz="1150" dirty="0"/>
-          </a:p>
-          <a:p>
-            <a:pPr indent="0" marL="0">
-              <a:buNone/>
-            </a:pPr>
-            <a:r>
-              <a:rPr lang="ko-KR" altLang="en-US" sz="1150" b="1" dirty="0">
-                <a:solidFill>
-                  <a:srgbClr val="FFFFFF"/>
-                </a:solidFill>
-                <a:latin typeface="맑은 고딕" pitchFamily="34" charset="0"/>
-                <a:ea typeface="맑은 고딕" pitchFamily="34" charset="-122"/>
-                <a:cs typeface="맑은 고딕" pitchFamily="34" charset="-120"/>
-              </a:rPr>
-              <a:t>진짜일까?</a:t>
-            </a:r>
-            <a:endParaRPr lang="ko-KR" sz="1150" dirty="0"/>
-          </a:p>
-        </p:txBody>
-      </p:sp>
-      <p:sp>
-        <p:nvSpPr>
-          <p:cNvPr id="25" name="Shape 20"/>
-          <p:cNvSpPr/>
-          <p:nvPr/>
-        </p:nvSpPr>
-        <p:spPr>
-          <a:xfrm>
-            <a:off x="863559" y="4469587"/>
-            <a:ext cx="502920" cy="237744"/>
-          </a:xfrm>
-          <a:prstGeom prst="roundRect">
-            <a:avLst>
-              <a:gd name="adj" fmla="val 50000"/>
-            </a:avLst>
-          </a:prstGeom>
-          <a:solidFill>
-            <a:srgbClr val="1E3A66"/>
-          </a:solidFill>
-          <a:ln/>
-        </p:spPr>
-      </p:sp>
-      <p:sp>
-        <p:nvSpPr>
-          <p:cNvPr id="26" name="Text 21"/>
-          <p:cNvSpPr txBox="1"/>
-          <p:nvPr/>
-        </p:nvSpPr>
-        <p:spPr>
-          <a:xfrm>
-            <a:off x="863559" y="4469587"/>
-            <a:ext cx="502920" cy="237744"/>
-          </a:xfrm>
-          <a:prstGeom prst="rect">
-            <a:avLst/>
-          </a:prstGeom>
-          <a:noFill/>
-          <a:ln/>
-        </p:spPr>
-        <p:txBody>
-          <a:bodyPr wrap="square" lIns="0" tIns="0" rIns="0" bIns="0" rtlCol="0" anchor="ctr"/>
-          <a:lstStyle/>
-          <a:p>
-            <a:pPr algn="ctr" indent="0" marL="0">
-              <a:buNone/>
-            </a:pPr>
-            <a:r>
-              <a:rPr lang="ko-KR" altLang="en-US" sz="850" b="1" dirty="0">
-                <a:solidFill>
-                  <a:srgbClr val="FFFFFF"/>
-                </a:solidFill>
-                <a:latin typeface="맑은 고딕" pitchFamily="34" charset="0"/>
-                <a:ea typeface="맑은 고딕" pitchFamily="34" charset="-122"/>
-                <a:cs typeface="맑은 고딕" pitchFamily="34" charset="-120"/>
-              </a:rPr>
-              <a:t>중급</a:t>
-            </a:r>
-            <a:endParaRPr lang="ko-KR" sz="850" dirty="0"/>
-          </a:p>
-        </p:txBody>
-      </p:sp>
-      <p:sp>
-        <p:nvSpPr>
-          <p:cNvPr id="27" name="Shape 22"/>
-          <p:cNvSpPr/>
-          <p:nvPr/>
-        </p:nvSpPr>
-        <p:spPr>
-          <a:xfrm>
-            <a:off x="1439631" y="4469587"/>
-            <a:ext cx="731520" cy="237744"/>
-          </a:xfrm>
-          <a:prstGeom prst="roundRect">
-            <a:avLst>
-              <a:gd name="adj" fmla="val 50000"/>
-            </a:avLst>
-          </a:prstGeom>
-          <a:solidFill>
-            <a:srgbClr val="1E3A66"/>
-          </a:solidFill>
-          <a:ln/>
-        </p:spPr>
-      </p:sp>
-      <p:sp>
-        <p:nvSpPr>
-          <p:cNvPr id="28" name="Text 23"/>
-          <p:cNvSpPr txBox="1"/>
-          <p:nvPr/>
-        </p:nvSpPr>
-        <p:spPr>
-          <a:xfrm>
-            <a:off x="1439631" y="4469587"/>
-            <a:ext cx="731520" cy="237744"/>
-          </a:xfrm>
-          <a:prstGeom prst="rect">
-            <a:avLst/>
-          </a:prstGeom>
-          <a:noFill/>
-          <a:ln/>
-        </p:spPr>
-        <p:txBody>
-          <a:bodyPr wrap="square" lIns="0" tIns="0" rIns="0" bIns="0" rtlCol="0" anchor="ctr"/>
-          <a:lstStyle/>
-          <a:p>
-            <a:pPr algn="ctr" indent="0" marL="0">
-              <a:buNone/>
-            </a:pPr>
-            <a:r>
-              <a:rPr lang="ko-KR" altLang="en-US" sz="850" b="1" dirty="0">
-                <a:solidFill>
-                  <a:srgbClr val="FFFFFF"/>
-                </a:solidFill>
-                <a:latin typeface="맑은 고딕" pitchFamily="34" charset="0"/>
-                <a:ea typeface="맑은 고딕" pitchFamily="34" charset="-122"/>
-                <a:cs typeface="맑은 고딕" pitchFamily="34" charset="-120"/>
-              </a:rPr>
-              <a:t>문서 3건</a:t>
-            </a:r>
-            <a:endParaRPr lang="ko-KR" sz="850" dirty="0"/>
-          </a:p>
-        </p:txBody>
-      </p:sp>
-      <p:sp>
-        <p:nvSpPr>
-          <p:cNvPr id="29" name="Text 24"/>
-          <p:cNvSpPr txBox="1"/>
-          <p:nvPr/>
-        </p:nvSpPr>
-        <p:spPr>
-          <a:xfrm>
-            <a:off x="753831" y="4990795"/>
-            <a:ext cx="1747601" cy="182880"/>
-          </a:xfrm>
-          <a:prstGeom prst="rect">
-            <a:avLst/>
-          </a:prstGeom>
-          <a:noFill/>
-          <a:ln/>
-        </p:spPr>
-        <p:txBody>
-          <a:bodyPr wrap="square" lIns="0" tIns="0" rIns="0" bIns="0" rtlCol="0" anchor="t"/>
-          <a:lstStyle/>
-          <a:p>
-            <a:pPr indent="0" marL="0">
-              <a:buNone/>
-            </a:pPr>
-            <a:r>
-              <a:rPr lang="ko-KR" altLang="en-US" sz="800" dirty="0">
-                <a:solidFill>
-                  <a:srgbClr val="A9BCD3"/>
-                </a:solidFill>
-                <a:latin typeface="맑은 고딕" pitchFamily="34" charset="0"/>
-                <a:ea typeface="맑은 고딕" pitchFamily="34" charset="-122"/>
-                <a:cs typeface="맑은 고딕" pitchFamily="34" charset="-120"/>
-              </a:rPr>
-              <a:t>사건 2 / 6</a:t>
-            </a:r>
-            <a:endParaRPr lang="ko-KR" sz="800" dirty="0"/>
-          </a:p>
-        </p:txBody>
-      </p:sp>
-      <p:sp>
-        <p:nvSpPr>
-          <p:cNvPr id="30" name="Shape 25"/>
-          <p:cNvSpPr/>
-          <p:nvPr/>
-        </p:nvSpPr>
-        <p:spPr>
-          <a:xfrm>
-            <a:off x="753831" y="5201107"/>
-            <a:ext cx="1747601" cy="73152"/>
-          </a:xfrm>
-          <a:prstGeom prst="roundRect">
-            <a:avLst>
-              <a:gd name="adj" fmla="val 50000"/>
-            </a:avLst>
-          </a:prstGeom>
-          <a:solidFill>
-            <a:srgbClr val="1E3A66"/>
-          </a:solidFill>
-          <a:ln/>
-        </p:spPr>
-      </p:sp>
-      <p:sp>
-        <p:nvSpPr>
-          <p:cNvPr id="31" name="Shape 26"/>
-          <p:cNvSpPr/>
-          <p:nvPr/>
-        </p:nvSpPr>
-        <p:spPr>
-          <a:xfrm>
-            <a:off x="753831" y="5201107"/>
-            <a:ext cx="576708" cy="73152"/>
-          </a:xfrm>
-          <a:prstGeom prst="roundRect">
-            <a:avLst>
-              <a:gd name="adj" fmla="val 50000"/>
-            </a:avLst>
+            <a:off x="6003036" y="3575304"/>
+            <a:ext cx="182880" cy="365760"/>
+          </a:xfrm>
+          <a:prstGeom prst="chevron">
+            <a:avLst/>
           </a:prstGeom>
           <a:solidFill>
             <a:srgbClr val="19B3B1"/>
@@ -12258,173 +10169,7 @@
       </p:sp>
       <p:sp>
         <p:nvSpPr>
-          <p:cNvPr id="32" name="Shape 27"/>
-          <p:cNvSpPr/>
-          <p:nvPr/>
-        </p:nvSpPr>
-        <p:spPr>
-          <a:xfrm>
-            <a:off x="753831" y="5305349"/>
-            <a:ext cx="1747601" cy="457200"/>
-          </a:xfrm>
-          <a:prstGeom prst="roundRect">
-            <a:avLst>
-              <a:gd name="adj" fmla="val 24000"/>
-            </a:avLst>
-          </a:prstGeom>
-          <a:solidFill>
-            <a:srgbClr val="19B3B1"/>
-          </a:solidFill>
-          <a:ln/>
-        </p:spPr>
-      </p:sp>
-      <p:pic>
-        <p:nvPicPr>
-          <p:cNvPr id="33" name="Image 3" descr="preencoded.png">    </p:cNvPr>
-          <p:cNvPicPr>
-            <a:picLocks noChangeAspect="1"/>
-          </p:cNvPicPr>
-          <p:nvPr/>
-        </p:nvPicPr>
-        <p:blipFill>
-          <a:blip r:embed="rId4"/>
-          <a:stretch>
-            <a:fillRect/>
-          </a:stretch>
-        </p:blipFill>
-        <p:spPr>
-          <a:xfrm>
-            <a:off x="1165311" y="5424221"/>
-            <a:ext cx="201168" cy="201168"/>
-          </a:xfrm>
-          <a:prstGeom prst="rect">
-            <a:avLst/>
-          </a:prstGeom>
-        </p:spPr>
-      </p:pic>
-      <p:sp>
-        <p:nvSpPr>
-          <p:cNvPr id="34" name="Text 28"/>
-          <p:cNvSpPr txBox="1"/>
-          <p:nvPr/>
-        </p:nvSpPr>
-        <p:spPr>
-          <a:xfrm>
-            <a:off x="1028151" y="5305349"/>
-            <a:ext cx="1473281" cy="457200"/>
-          </a:xfrm>
-          <a:prstGeom prst="rect">
-            <a:avLst/>
-          </a:prstGeom>
-          <a:noFill/>
-          <a:ln/>
-        </p:spPr>
-        <p:txBody>
-          <a:bodyPr wrap="square" lIns="0" tIns="0" rIns="0" bIns="0" rtlCol="0" anchor="ctr"/>
-          <a:lstStyle/>
-          <a:p>
-            <a:pPr algn="ctr" indent="0" marL="0">
-              <a:buNone/>
-            </a:pPr>
-            <a:r>
-              <a:rPr lang="ko-KR" altLang="en-US" sz="1300" b="1" dirty="0">
-                <a:solidFill>
-                  <a:srgbClr val="06122A"/>
-                </a:solidFill>
-                <a:latin typeface="맑은 고딕" pitchFamily="34" charset="0"/>
-                <a:ea typeface="맑은 고딕" pitchFamily="34" charset="-122"/>
-                <a:cs typeface="맑은 고딕" pitchFamily="34" charset="-120"/>
-              </a:rPr>
-              <a:t>검토 시작</a:t>
-            </a:r>
-            <a:endParaRPr lang="ko-KR" sz="1300" dirty="0"/>
-          </a:p>
-        </p:txBody>
-      </p:sp>
-      <p:sp>
-        <p:nvSpPr>
-          <p:cNvPr id="35" name="Shape 29"/>
-          <p:cNvSpPr/>
-          <p:nvPr/>
-        </p:nvSpPr>
-        <p:spPr>
-          <a:xfrm>
-            <a:off x="3828288" y="1078992"/>
-            <a:ext cx="1554480" cy="310896"/>
-          </a:xfrm>
-          <a:prstGeom prst="roundRect">
-            <a:avLst>
-              <a:gd name="adj" fmla="val 50000"/>
-            </a:avLst>
-          </a:prstGeom>
-          <a:solidFill>
-            <a:srgbClr val="19B3B1"/>
-          </a:solidFill>
-          <a:ln/>
-        </p:spPr>
-      </p:sp>
-      <p:sp>
-        <p:nvSpPr>
-          <p:cNvPr id="36" name="Text 30"/>
-          <p:cNvSpPr txBox="1"/>
-          <p:nvPr/>
-        </p:nvSpPr>
-        <p:spPr>
-          <a:xfrm>
-            <a:off x="3828288" y="1078992"/>
-            <a:ext cx="1554480" cy="310896"/>
-          </a:xfrm>
-          <a:prstGeom prst="rect">
-            <a:avLst/>
-          </a:prstGeom>
-          <a:noFill/>
-          <a:ln/>
-        </p:spPr>
-        <p:txBody>
-          <a:bodyPr wrap="square" lIns="0" tIns="0" rIns="0" bIns="0" rtlCol="0" anchor="ctr"/>
-          <a:lstStyle/>
-          <a:p>
-            <a:pPr algn="ctr" indent="0" marL="0">
-              <a:buNone/>
-            </a:pPr>
-            <a:r>
-              <a:rPr lang="ko-KR" altLang="en-US" sz="1300" b="1" dirty="0">
-                <a:solidFill>
-                  <a:srgbClr val="06122A"/>
-                </a:solidFill>
-                <a:latin typeface="맑은 고딕" pitchFamily="34" charset="0"/>
-                <a:ea typeface="맑은 고딕" pitchFamily="34" charset="-122"/>
-                <a:cs typeface="맑은 고딕" pitchFamily="34" charset="-120"/>
-              </a:rPr>
-              <a:t>B  문서 확인</a:t>
-            </a:r>
-            <a:endParaRPr lang="ko-KR" sz="1300" dirty="0"/>
-          </a:p>
-        </p:txBody>
-      </p:sp>
-      <p:sp>
-        <p:nvSpPr>
-          <p:cNvPr id="37" name="Shape 31"/>
-          <p:cNvSpPr/>
-          <p:nvPr/>
-        </p:nvSpPr>
-        <p:spPr>
-          <a:xfrm>
-            <a:off x="6003036" y="3575304"/>
-            <a:ext cx="182880" cy="365760"/>
-          </a:xfrm>
-          <a:prstGeom prst="chevron">
-            <a:avLst/>
-          </a:prstGeom>
-          <a:solidFill>
-            <a:srgbClr val="19B3B1"/>
-          </a:solidFill>
-          <a:ln/>
-        </p:spPr>
-      </p:sp>
-      <p:sp>
-        <p:nvSpPr>
-          <p:cNvPr id="38" name="Text 32"/>
+          <p:cNvPr id="15" name="Text 12"/>
           <p:cNvSpPr txBox="1"/>
           <p:nvPr/>
         </p:nvSpPr>
@@ -12455,7 +10200,7 @@
                 <a:ea typeface="맑은 고딕" pitchFamily="34" charset="-122"/>
                 <a:cs typeface="맑은 고딕" pitchFamily="34" charset="-120"/>
               </a:rPr>
-              <a:t>메시지 필드를 탭해 상세 열기</a:t>
+              <a:t>요청 카드 · 문서 탭 · 내 기록</a:t>
             </a:r>
             <a:endParaRPr lang="ko-KR" sz="1200" dirty="0"/>
           </a:p>
@@ -12463,7 +10208,7 @@
       </p:sp>
       <p:sp>
         <p:nvSpPr>
-          <p:cNvPr id="39" name="Shape 33"/>
+          <p:cNvPr id="16" name="Shape 13"/>
           <p:cNvSpPr/>
           <p:nvPr/>
         </p:nvSpPr>
@@ -12497,7 +10242,7 @@
       </p:sp>
       <p:sp>
         <p:nvSpPr>
-          <p:cNvPr id="40" name="Shape 34"/>
+          <p:cNvPr id="17" name="Shape 14"/>
           <p:cNvSpPr/>
           <p:nvPr/>
         </p:nvSpPr>
@@ -12517,158 +10262,40 @@
           <a:ln/>
         </p:spPr>
       </p:sp>
-      <p:sp>
-        <p:nvSpPr>
-          <p:cNvPr id="41" name="Text 35"/>
-          <p:cNvSpPr txBox="1"/>
-          <p:nvPr/>
-        </p:nvSpPr>
-        <p:spPr>
-          <a:xfrm>
-            <a:off x="3612855" y="5908853"/>
-            <a:ext cx="1985345" cy="91440"/>
-          </a:xfrm>
-          <a:prstGeom prst="rect">
-            <a:avLst/>
-          </a:prstGeom>
-          <a:noFill/>
-          <a:ln/>
-        </p:spPr>
-        <p:txBody>
-          <a:bodyPr wrap="square" lIns="0" tIns="0" rIns="0" bIns="0" rtlCol="0" anchor="t"/>
-          <a:lstStyle/>
-          <a:p>
-            <a:pPr algn="ctr" indent="0" marL="0">
-              <a:buNone/>
-            </a:pPr>
-            <a:r>
-              <a:rPr lang="ko-KR" altLang="en-US" sz="550" b="1" spc="300" kern="0" dirty="0">
-                <a:solidFill>
-                  <a:srgbClr val="6F86A6"/>
-                </a:solidFill>
-                <a:latin typeface="맑은 고딕" pitchFamily="34" charset="0"/>
-                <a:ea typeface="맑은 고딕" pitchFamily="34" charset="-122"/>
-                <a:cs typeface="맑은 고딕" pitchFamily="34" charset="-120"/>
-              </a:rPr>
-              <a:t>MOCKUP</a:t>
-            </a:r>
-            <a:endParaRPr lang="ko-KR" sz="550" dirty="0"/>
-          </a:p>
-        </p:txBody>
-      </p:sp>
-      <p:sp>
-        <p:nvSpPr>
-          <p:cNvPr id="42" name="Shape 36"/>
+      <p:pic>
+        <p:nvPicPr>
+          <p:cNvPr id="18" name="Image 1" descr="HTML 시제품 화면: 문서 확인">    </p:cNvPr>
+          <p:cNvPicPr>
+            <a:picLocks noChangeAspect="1"/>
+          </p:cNvPicPr>
+          <p:nvPr/>
+        </p:nvPicPr>
+        <p:blipFill>
+          <a:blip r:embed="rId2"/>
+          <a:stretch>
+            <a:fillRect/>
+          </a:stretch>
+        </p:blipFill>
+        <p:spPr>
+          <a:xfrm>
+            <a:off x="3671644" y="1680667"/>
+            <a:ext cx="1867768" cy="4155034"/>
+          </a:xfrm>
+          <a:prstGeom prst="rect">
+            <a:avLst/>
+          </a:prstGeom>
+        </p:spPr>
+      </p:pic>
+      <p:sp>
+        <p:nvSpPr>
+          <p:cNvPr id="19" name="Shape 15"/>
           <p:cNvSpPr/>
           <p:nvPr/>
         </p:nvSpPr>
         <p:spPr>
           <a:xfrm>
-            <a:off x="3612855" y="1589227"/>
-            <a:ext cx="1985345" cy="4337914"/>
-          </a:xfrm>
-          <a:prstGeom prst="roundRect">
-            <a:avLst>
-              <a:gd name="adj" fmla="val 10870"/>
-            </a:avLst>
-          </a:prstGeom>
-          <a:solidFill>
-            <a:srgbClr val="F4F6FA"/>
-          </a:solidFill>
-          <a:ln/>
-        </p:spPr>
-      </p:sp>
-      <p:sp>
-        <p:nvSpPr>
-          <p:cNvPr id="43" name="Shape 37"/>
-          <p:cNvSpPr/>
-          <p:nvPr/>
-        </p:nvSpPr>
-        <p:spPr>
-          <a:xfrm>
-            <a:off x="3612855" y="1589227"/>
-            <a:ext cx="1985345" cy="566928"/>
-          </a:xfrm>
-          <a:prstGeom prst="roundRect">
-            <a:avLst>
-              <a:gd name="adj" fmla="val 38065"/>
-            </a:avLst>
-          </a:prstGeom>
-          <a:solidFill>
-            <a:srgbClr val="0B1A33"/>
-          </a:solidFill>
-          <a:ln/>
-        </p:spPr>
-      </p:sp>
-      <p:sp>
-        <p:nvSpPr>
-          <p:cNvPr id="44" name="Shape 38"/>
-          <p:cNvSpPr/>
-          <p:nvPr/>
-        </p:nvSpPr>
-        <p:spPr>
-          <a:xfrm>
-            <a:off x="3612855" y="1954987"/>
-            <a:ext cx="1985345" cy="201168"/>
-          </a:xfrm>
-          <a:prstGeom prst="rect">
-            <a:avLst/>
-          </a:prstGeom>
-          <a:solidFill>
-            <a:srgbClr val="0B1A33"/>
-          </a:solidFill>
-          <a:ln/>
-        </p:spPr>
-      </p:sp>
-      <p:sp>
-        <p:nvSpPr>
-          <p:cNvPr id="45" name="Text 39"/>
-          <p:cNvSpPr txBox="1"/>
-          <p:nvPr/>
-        </p:nvSpPr>
-        <p:spPr>
-          <a:xfrm>
-            <a:off x="3759159" y="1634947"/>
-            <a:ext cx="457200" cy="164592"/>
-          </a:xfrm>
-          <a:prstGeom prst="rect">
-            <a:avLst/>
-          </a:prstGeom>
-          <a:noFill/>
-          <a:ln/>
-        </p:spPr>
-        <p:txBody>
-          <a:bodyPr wrap="square" lIns="0" tIns="0" rIns="0" bIns="0" rtlCol="0" anchor="t"/>
-          <a:lstStyle/>
-          <a:p>
-            <a:pPr indent="0" marL="0">
-              <a:buNone/>
-            </a:pPr>
-            <a:r>
-              <a:rPr lang="ko-KR" altLang="en-US" sz="750" b="1" dirty="0">
-                <a:solidFill>
-                  <a:srgbClr val="FFFFFF"/>
-                </a:solidFill>
-                <a:latin typeface="맑은 고딕" pitchFamily="34" charset="0"/>
-                <a:ea typeface="맑은 고딕" pitchFamily="34" charset="-122"/>
-                <a:cs typeface="맑은 고딕" pitchFamily="34" charset="-120"/>
-              </a:rPr>
-              <a:t>9:41</a:t>
-            </a:r>
-            <a:endParaRPr lang="ko-KR" sz="750" dirty="0"/>
-          </a:p>
-        </p:txBody>
-      </p:sp>
-      <p:sp>
-        <p:nvSpPr>
-          <p:cNvPr id="46" name="Shape 40"/>
-          <p:cNvSpPr/>
-          <p:nvPr/>
-        </p:nvSpPr>
-        <p:spPr>
-          <a:xfrm>
-            <a:off x="4349496" y="1644091"/>
-            <a:ext cx="512064" cy="137160"/>
+            <a:off x="6806184" y="1078992"/>
+            <a:ext cx="1554480" cy="310896"/>
           </a:xfrm>
           <a:prstGeom prst="roundRect">
             <a:avLst>
@@ -12676,977 +10303,15 @@
             </a:avLst>
           </a:prstGeom>
           <a:solidFill>
-            <a:srgbClr val="040B17"/>
+            <a:srgbClr val="19B3B1"/>
           </a:solidFill>
           <a:ln/>
         </p:spPr>
       </p:sp>
       <p:sp>
         <p:nvSpPr>
-          <p:cNvPr id="47" name="Shape 41"/>
-          <p:cNvSpPr/>
-          <p:nvPr/>
-        </p:nvSpPr>
-        <p:spPr>
-          <a:xfrm>
-            <a:off x="5214153" y="1666951"/>
-            <a:ext cx="219456" cy="100584"/>
-          </a:xfrm>
-          <a:prstGeom prst="roundRect">
-            <a:avLst>
-              <a:gd name="adj" fmla="val 27273"/>
-            </a:avLst>
-          </a:prstGeom>
-          <a:solidFill>
-            <a:srgbClr val="FFFFFF">
-              <a:alpha val="90000"/>
-            </a:srgbClr>
-          </a:solidFill>
-          <a:ln/>
-        </p:spPr>
-      </p:sp>
-      <p:sp>
-        <p:nvSpPr>
-          <p:cNvPr id="48" name="Text 42"/>
+          <p:cNvPr id="20" name="Text 16"/>
           <p:cNvSpPr txBox="1"/>
-          <p:nvPr/>
-        </p:nvSpPr>
-        <p:spPr>
-          <a:xfrm>
-            <a:off x="3731727" y="1881835"/>
-            <a:ext cx="1747601" cy="219456"/>
-          </a:xfrm>
-          <a:prstGeom prst="rect">
-            <a:avLst/>
-          </a:prstGeom>
-          <a:noFill/>
-          <a:ln/>
-        </p:spPr>
-        <p:txBody>
-          <a:bodyPr wrap="square" lIns="0" tIns="0" rIns="0" bIns="0" rtlCol="0" anchor="ctr"/>
-          <a:lstStyle/>
-          <a:p>
-            <a:pPr indent="0" marL="0">
-              <a:buNone/>
-            </a:pPr>
-            <a:r>
-              <a:rPr lang="ko-KR" altLang="en-US" sz="850" b="1" dirty="0">
-                <a:solidFill>
-                  <a:srgbClr val="FFFFFF"/>
-                </a:solidFill>
-                <a:latin typeface="맑은 고딕" pitchFamily="34" charset="0"/>
-                <a:ea typeface="맑은 고딕" pitchFamily="34" charset="-122"/>
-                <a:cs typeface="맑은 고딕" pitchFamily="34" charset="-120"/>
-              </a:rPr>
-              <a:t>사건 2/6 · 문서 확인</a:t>
-            </a:r>
-            <a:endParaRPr lang="ko-KR" sz="850" dirty="0"/>
-          </a:p>
-        </p:txBody>
-      </p:sp>
-      <p:sp>
-        <p:nvSpPr>
-          <p:cNvPr id="49" name="Shape 43"/>
-          <p:cNvSpPr/>
-          <p:nvPr/>
-        </p:nvSpPr>
-        <p:spPr>
-          <a:xfrm>
-            <a:off x="3731727" y="2275027"/>
-            <a:ext cx="1747601" cy="411480"/>
-          </a:xfrm>
-          <a:prstGeom prst="roundRect">
-            <a:avLst>
-              <a:gd name="adj" fmla="val 22222"/>
-            </a:avLst>
-          </a:prstGeom>
-          <a:solidFill>
-            <a:srgbClr val="FFFFFF"/>
-          </a:solidFill>
-          <a:ln/>
-        </p:spPr>
-      </p:sp>
-      <p:sp>
-        <p:nvSpPr>
-          <p:cNvPr id="50" name="Shape 44"/>
-          <p:cNvSpPr/>
-          <p:nvPr/>
-        </p:nvSpPr>
-        <p:spPr>
-          <a:xfrm>
-            <a:off x="3804879" y="2339035"/>
-            <a:ext cx="274320" cy="274320"/>
-          </a:xfrm>
-          <a:prstGeom prst="ellipse">
-            <a:avLst/>
-          </a:prstGeom>
-          <a:solidFill>
-            <a:srgbClr val="FFD9A8"/>
-          </a:solidFill>
-          <a:ln/>
-        </p:spPr>
-      </p:sp>
-      <p:sp>
-        <p:nvSpPr>
-          <p:cNvPr id="51" name="Text 45"/>
-          <p:cNvSpPr txBox="1"/>
-          <p:nvPr/>
-        </p:nvSpPr>
-        <p:spPr>
-          <a:xfrm>
-            <a:off x="4143207" y="2275027"/>
-            <a:ext cx="1290401" cy="411480"/>
-          </a:xfrm>
-          <a:prstGeom prst="rect">
-            <a:avLst/>
-          </a:prstGeom>
-          <a:noFill/>
-          <a:ln/>
-        </p:spPr>
-        <p:txBody>
-          <a:bodyPr wrap="square" lIns="0" tIns="0" rIns="0" bIns="0" rtlCol="0" anchor="ctr"/>
-          <a:lstStyle/>
-          <a:p>
-            <a:pPr indent="0" marL="0">
-              <a:buNone/>
-            </a:pPr>
-            <a:r>
-              <a:rPr lang="ko-KR" altLang="en-US" sz="800" b="1" dirty="0">
-                <a:solidFill>
-                  <a:srgbClr val="1C2433"/>
-                </a:solidFill>
-                <a:latin typeface="맑은 고딕" pitchFamily="34" charset="0"/>
-                <a:ea typeface="맑은 고딕" pitchFamily="34" charset="-122"/>
-                <a:cs typeface="맑은 고딕" pitchFamily="34" charset="-120"/>
-              </a:rPr>
-              <a:t>은솔: “이 메시지 진짜인가요?”</a:t>
-            </a:r>
-            <a:endParaRPr lang="ko-KR" sz="800" dirty="0"/>
-          </a:p>
-        </p:txBody>
-      </p:sp>
-      <p:sp>
-        <p:nvSpPr>
-          <p:cNvPr id="52" name="Shape 46"/>
-          <p:cNvSpPr/>
-          <p:nvPr/>
-        </p:nvSpPr>
-        <p:spPr>
-          <a:xfrm>
-            <a:off x="3731727" y="2796235"/>
-            <a:ext cx="1747601" cy="2103120"/>
-          </a:xfrm>
-          <a:prstGeom prst="roundRect">
-            <a:avLst>
-              <a:gd name="adj" fmla="val 6279"/>
-            </a:avLst>
-          </a:prstGeom>
-          <a:solidFill>
-            <a:srgbClr val="FFFFFF"/>
-          </a:solidFill>
-          <a:ln/>
-          <a:effectLst>
-            <a:outerShdw sx="100000" sy="100000" kx="0" ky="0" algn="bl" rotWithShape="0" blurRad="127000" dist="38100" dir="5400000">
-              <a:srgbClr val="000000">
-                <a:alpha val="35000"/>
-              </a:srgbClr>
-            </a:outerShdw>
-          </a:effectLst>
-        </p:spPr>
-      </p:sp>
-      <p:pic>
-        <p:nvPicPr>
-          <p:cNvPr id="53" name="Image 4" descr="preencoded.png">    </p:cNvPr>
-          <p:cNvPicPr>
-            <a:picLocks noChangeAspect="1"/>
-          </p:cNvPicPr>
-          <p:nvPr/>
-        </p:nvPicPr>
-        <p:blipFill>
-          <a:blip r:embed="rId5"/>
-          <a:stretch>
-            <a:fillRect/>
-          </a:stretch>
-        </p:blipFill>
-        <p:spPr>
-          <a:xfrm>
-            <a:off x="3841455" y="2896819"/>
-            <a:ext cx="201168" cy="201168"/>
-          </a:xfrm>
-          <a:prstGeom prst="rect">
-            <a:avLst/>
-          </a:prstGeom>
-        </p:spPr>
-      </p:pic>
-      <p:sp>
-        <p:nvSpPr>
-          <p:cNvPr id="54" name="Text 47"/>
-          <p:cNvSpPr txBox="1"/>
-          <p:nvPr/>
-        </p:nvSpPr>
-        <p:spPr>
-          <a:xfrm>
-            <a:off x="4115775" y="2896819"/>
-            <a:ext cx="1097280" cy="201168"/>
-          </a:xfrm>
-          <a:prstGeom prst="rect">
-            <a:avLst/>
-          </a:prstGeom>
-          <a:noFill/>
-          <a:ln/>
-        </p:spPr>
-        <p:txBody>
-          <a:bodyPr wrap="square" lIns="0" tIns="0" rIns="0" bIns="0" rtlCol="0" anchor="ctr"/>
-          <a:lstStyle/>
-          <a:p>
-            <a:pPr indent="0" marL="0">
-              <a:buNone/>
-            </a:pPr>
-            <a:r>
-              <a:rPr lang="ko-KR" altLang="en-US" sz="900" b="1" dirty="0">
-                <a:solidFill>
-                  <a:srgbClr val="1C2433"/>
-                </a:solidFill>
-                <a:latin typeface="맑은 고딕" pitchFamily="34" charset="0"/>
-                <a:ea typeface="맑은 고딕" pitchFamily="34" charset="-122"/>
-                <a:cs typeface="맑은 고딕" pitchFamily="34" charset="-120"/>
-              </a:rPr>
-              <a:t>받은 메시지</a:t>
-            </a:r>
-            <a:endParaRPr lang="ko-KR" sz="900" dirty="0"/>
-          </a:p>
-        </p:txBody>
-      </p:sp>
-      <p:sp>
-        <p:nvSpPr>
-          <p:cNvPr id="55" name="Shape 48"/>
-          <p:cNvSpPr/>
-          <p:nvPr/>
-        </p:nvSpPr>
-        <p:spPr>
-          <a:xfrm>
-            <a:off x="3786591" y="3189427"/>
-            <a:ext cx="1637873" cy="603504"/>
-          </a:xfrm>
-          <a:prstGeom prst="roundRect">
-            <a:avLst>
-              <a:gd name="adj" fmla="val 12121"/>
-            </a:avLst>
-          </a:prstGeom>
-          <a:solidFill>
-            <a:srgbClr val="E8F7F6"/>
-          </a:solidFill>
-          <a:ln w="25400">
-            <a:solidFill>
-              <a:srgbClr val="19B3B1"/>
-            </a:solidFill>
-            <a:prstDash val="solid"/>
-          </a:ln>
-        </p:spPr>
-      </p:sp>
-      <p:sp>
-        <p:nvSpPr>
-          <p:cNvPr id="56" name="Text 49"/>
-          <p:cNvSpPr txBox="1"/>
-          <p:nvPr/>
-        </p:nvSpPr>
-        <p:spPr>
-          <a:xfrm>
-            <a:off x="3859743" y="3235147"/>
-            <a:ext cx="914400" cy="146304"/>
-          </a:xfrm>
-          <a:prstGeom prst="rect">
-            <a:avLst/>
-          </a:prstGeom>
-          <a:noFill/>
-          <a:ln/>
-        </p:spPr>
-        <p:txBody>
-          <a:bodyPr wrap="square" lIns="0" tIns="0" rIns="0" bIns="0" rtlCol="0" anchor="t"/>
-          <a:lstStyle/>
-          <a:p>
-            <a:pPr indent="0" marL="0">
-              <a:buNone/>
-            </a:pPr>
-            <a:r>
-              <a:rPr lang="ko-KR" altLang="en-US" sz="700" dirty="0">
-                <a:solidFill>
-                  <a:srgbClr val="5A6576"/>
-                </a:solidFill>
-                <a:latin typeface="맑은 고딕" pitchFamily="34" charset="0"/>
-                <a:ea typeface="맑은 고딕" pitchFamily="34" charset="-122"/>
-                <a:cs typeface="맑은 고딕" pitchFamily="34" charset="-120"/>
-              </a:rPr>
-              <a:t>보낸 사람</a:t>
-            </a:r>
-            <a:endParaRPr lang="ko-KR" sz="700" dirty="0"/>
-          </a:p>
-        </p:txBody>
-      </p:sp>
-      <p:sp>
-        <p:nvSpPr>
-          <p:cNvPr id="57" name="Text 50"/>
-          <p:cNvSpPr txBox="1"/>
-          <p:nvPr/>
-        </p:nvSpPr>
-        <p:spPr>
-          <a:xfrm>
-            <a:off x="3859743" y="3381451"/>
-            <a:ext cx="1473281" cy="384048"/>
-          </a:xfrm>
-          <a:prstGeom prst="rect">
-            <a:avLst/>
-          </a:prstGeom>
-          <a:noFill/>
-          <a:ln/>
-        </p:spPr>
-        <p:txBody>
-          <a:bodyPr wrap="square" lIns="0" tIns="0" rIns="0" bIns="0" rtlCol="0" anchor="t"/>
-          <a:lstStyle/>
-          <a:p>
-            <a:pPr indent="0" marL="0">
-              <a:buNone/>
-            </a:pPr>
-            <a:r>
-              <a:rPr lang="ko-KR" altLang="en-US" sz="750" b="1" dirty="0">
-                <a:solidFill>
-                  <a:srgbClr val="1C2433"/>
-                </a:solidFill>
-                <a:latin typeface="맑은 고딕" pitchFamily="34" charset="0"/>
-                <a:ea typeface="맑은 고딕" pitchFamily="34" charset="-122"/>
-                <a:cs typeface="맑은 고딕" pitchFamily="34" charset="-120"/>
-              </a:rPr>
-              <a:t>학교 지원팀</a:t>
-            </a:r>
-            <a:endParaRPr lang="ko-KR" sz="750" dirty="0"/>
-          </a:p>
-          <a:p>
-            <a:pPr indent="0" marL="0">
-              <a:buNone/>
-            </a:pPr>
-            <a:r>
-              <a:rPr lang="ko-KR" altLang="en-US" sz="750" b="1" dirty="0">
-                <a:solidFill>
-                  <a:srgbClr val="1C2433"/>
-                </a:solidFill>
-                <a:latin typeface="맑은 고딕" pitchFamily="34" charset="0"/>
-                <a:ea typeface="맑은 고딕" pitchFamily="34" charset="-122"/>
-                <a:cs typeface="맑은 고딕" pitchFamily="34" charset="-120"/>
-              </a:rPr>
-              <a:t>help@nuri-help.example</a:t>
-            </a:r>
-            <a:endParaRPr lang="ko-KR" sz="750" dirty="0"/>
-          </a:p>
-        </p:txBody>
-      </p:sp>
-      <p:sp>
-        <p:nvSpPr>
-          <p:cNvPr id="58" name="Text 51"/>
-          <p:cNvSpPr txBox="1"/>
-          <p:nvPr/>
-        </p:nvSpPr>
-        <p:spPr>
-          <a:xfrm>
-            <a:off x="3859743" y="4003243"/>
-            <a:ext cx="914400" cy="146304"/>
-          </a:xfrm>
-          <a:prstGeom prst="rect">
-            <a:avLst/>
-          </a:prstGeom>
-          <a:noFill/>
-          <a:ln/>
-        </p:spPr>
-        <p:txBody>
-          <a:bodyPr wrap="square" lIns="0" tIns="0" rIns="0" bIns="0" rtlCol="0" anchor="t"/>
-          <a:lstStyle/>
-          <a:p>
-            <a:pPr indent="0" marL="0">
-              <a:buNone/>
-            </a:pPr>
-            <a:r>
-              <a:rPr lang="ko-KR" altLang="en-US" sz="700" dirty="0">
-                <a:solidFill>
-                  <a:srgbClr val="5A6576"/>
-                </a:solidFill>
-                <a:latin typeface="맑은 고딕" pitchFamily="34" charset="0"/>
-                <a:ea typeface="맑은 고딕" pitchFamily="34" charset="-122"/>
-                <a:cs typeface="맑은 고딕" pitchFamily="34" charset="-120"/>
-              </a:rPr>
-              <a:t>내용</a:t>
-            </a:r>
-            <a:endParaRPr lang="ko-KR" sz="700" dirty="0"/>
-          </a:p>
-        </p:txBody>
-      </p:sp>
-      <p:sp>
-        <p:nvSpPr>
-          <p:cNvPr id="59" name="Text 52"/>
-          <p:cNvSpPr txBox="1"/>
-          <p:nvPr/>
-        </p:nvSpPr>
-        <p:spPr>
-          <a:xfrm>
-            <a:off x="3859743" y="4149547"/>
-            <a:ext cx="1491569" cy="384048"/>
-          </a:xfrm>
-          <a:prstGeom prst="rect">
-            <a:avLst/>
-          </a:prstGeom>
-          <a:noFill/>
-          <a:ln/>
-        </p:spPr>
-        <p:txBody>
-          <a:bodyPr wrap="square" lIns="0" tIns="0" rIns="0" bIns="0" rtlCol="0" anchor="t"/>
-          <a:lstStyle/>
-          <a:p>
-            <a:pPr indent="0" marL="0">
-              <a:buNone/>
-            </a:pPr>
-            <a:r>
-              <a:rPr lang="ko-KR" altLang="en-US" sz="800" dirty="0">
-                <a:solidFill>
-                  <a:srgbClr val="1C2433"/>
-                </a:solidFill>
-                <a:latin typeface="맑은 고딕" pitchFamily="34" charset="0"/>
-                <a:ea typeface="맑은 고딕" pitchFamily="34" charset="-122"/>
-                <a:cs typeface="맑은 고딕" pitchFamily="34" charset="-120"/>
-              </a:rPr>
-              <a:t>계정이 곧 잠겨요. 아래 링크에서 비밀번호를 입력하세요.</a:t>
-            </a:r>
-            <a:endParaRPr lang="ko-KR" sz="800" dirty="0"/>
-          </a:p>
-        </p:txBody>
-      </p:sp>
-      <p:sp>
-        <p:nvSpPr>
-          <p:cNvPr id="60" name="Text 53"/>
-          <p:cNvSpPr txBox="1"/>
-          <p:nvPr/>
-        </p:nvSpPr>
-        <p:spPr>
-          <a:xfrm>
-            <a:off x="3859743" y="4579315"/>
-            <a:ext cx="1491569" cy="256032"/>
-          </a:xfrm>
-          <a:prstGeom prst="rect">
-            <a:avLst/>
-          </a:prstGeom>
-          <a:noFill/>
-          <a:ln/>
-        </p:spPr>
-        <p:txBody>
-          <a:bodyPr wrap="square" lIns="0" tIns="0" rIns="0" bIns="0" rtlCol="0" anchor="t"/>
-          <a:lstStyle/>
-          <a:p>
-            <a:pPr indent="0" marL="0">
-              <a:buNone/>
-            </a:pPr>
-            <a:r>
-              <a:rPr lang="ko-KR" altLang="en-US" sz="750" dirty="0">
-                <a:solidFill>
-                  <a:srgbClr val="2C6DB5"/>
-                </a:solidFill>
-                <a:latin typeface="맑은 고딕" pitchFamily="34" charset="0"/>
-                <a:ea typeface="맑은 고딕" pitchFamily="34" charset="-122"/>
-                <a:cs typeface="맑은 고딕" pitchFamily="34" charset="-120"/>
-              </a:rPr>
-              <a:t>링크  nuri-help.example/login</a:t>
-            </a:r>
-            <a:endParaRPr lang="ko-KR" sz="750" dirty="0"/>
-          </a:p>
-        </p:txBody>
-      </p:sp>
-      <p:pic>
-        <p:nvPicPr>
-          <p:cNvPr id="61" name="Image 5" descr="preencoded.png">    </p:cNvPr>
-          <p:cNvPicPr>
-            <a:picLocks noChangeAspect="1"/>
-          </p:cNvPicPr>
-          <p:nvPr/>
-        </p:nvPicPr>
-        <p:blipFill>
-          <a:blip r:embed="rId6"/>
-          <a:stretch>
-            <a:fillRect/>
-          </a:stretch>
-        </p:blipFill>
-        <p:spPr>
-          <a:xfrm>
-            <a:off x="5095281" y="3527755"/>
-            <a:ext cx="329184" cy="329184"/>
-          </a:xfrm>
-          <a:prstGeom prst="rect">
-            <a:avLst/>
-          </a:prstGeom>
-        </p:spPr>
-      </p:pic>
-      <p:sp>
-        <p:nvSpPr>
-          <p:cNvPr id="62" name="Shape 54"/>
-          <p:cNvSpPr/>
-          <p:nvPr/>
-        </p:nvSpPr>
-        <p:spPr>
-          <a:xfrm>
-            <a:off x="4583217" y="3820363"/>
-            <a:ext cx="841248" cy="182880"/>
-          </a:xfrm>
-          <a:prstGeom prst="roundRect">
-            <a:avLst>
-              <a:gd name="adj" fmla="val 50000"/>
-            </a:avLst>
-          </a:prstGeom>
-          <a:solidFill>
-            <a:srgbClr val="0B1A33"/>
-          </a:solidFill>
-          <a:ln/>
-        </p:spPr>
-      </p:sp>
-      <p:sp>
-        <p:nvSpPr>
-          <p:cNvPr id="63" name="Text 55"/>
-          <p:cNvSpPr txBox="1"/>
-          <p:nvPr/>
-        </p:nvSpPr>
-        <p:spPr>
-          <a:xfrm>
-            <a:off x="4583217" y="3820363"/>
-            <a:ext cx="841248" cy="182880"/>
-          </a:xfrm>
-          <a:prstGeom prst="rect">
-            <a:avLst/>
-          </a:prstGeom>
-          <a:noFill/>
-          <a:ln/>
-        </p:spPr>
-        <p:txBody>
-          <a:bodyPr wrap="square" lIns="0" tIns="0" rIns="0" bIns="0" rtlCol="0" anchor="ctr"/>
-          <a:lstStyle/>
-          <a:p>
-            <a:pPr algn="ctr" indent="0" marL="0">
-              <a:buNone/>
-            </a:pPr>
-            <a:r>
-              <a:rPr lang="ko-KR" altLang="en-US" sz="750" b="1" dirty="0">
-                <a:solidFill>
-                  <a:srgbClr val="FFFFFF"/>
-                </a:solidFill>
-                <a:latin typeface="맑은 고딕" pitchFamily="34" charset="0"/>
-                <a:ea typeface="맑은 고딕" pitchFamily="34" charset="-122"/>
-                <a:cs typeface="맑은 고딕" pitchFamily="34" charset="-120"/>
-              </a:rPr>
-              <a:t>탭해서 열기</a:t>
-            </a:r>
-            <a:endParaRPr lang="ko-KR" sz="750" dirty="0"/>
-          </a:p>
-        </p:txBody>
-      </p:sp>
-      <p:sp>
-        <p:nvSpPr>
-          <p:cNvPr id="64" name="Shape 56"/>
-          <p:cNvSpPr/>
-          <p:nvPr/>
-        </p:nvSpPr>
-        <p:spPr>
-          <a:xfrm>
-            <a:off x="3731727" y="5018227"/>
-            <a:ext cx="552054" cy="274320"/>
-          </a:xfrm>
-          <a:prstGeom prst="roundRect">
-            <a:avLst>
-              <a:gd name="adj" fmla="val 50000"/>
-            </a:avLst>
-          </a:prstGeom>
-          <a:solidFill>
-            <a:srgbClr val="14284B"/>
-          </a:solidFill>
-          <a:ln/>
-        </p:spPr>
-      </p:sp>
-      <p:sp>
-        <p:nvSpPr>
-          <p:cNvPr id="65" name="Text 57"/>
-          <p:cNvSpPr txBox="1"/>
-          <p:nvPr/>
-        </p:nvSpPr>
-        <p:spPr>
-          <a:xfrm>
-            <a:off x="3731727" y="5018227"/>
-            <a:ext cx="552054" cy="274320"/>
-          </a:xfrm>
-          <a:prstGeom prst="rect">
-            <a:avLst/>
-          </a:prstGeom>
-          <a:noFill/>
-          <a:ln/>
-        </p:spPr>
-        <p:txBody>
-          <a:bodyPr wrap="square" lIns="0" tIns="0" rIns="0" bIns="0" rtlCol="0" anchor="ctr"/>
-          <a:lstStyle/>
-          <a:p>
-            <a:pPr algn="ctr" indent="0" marL="0">
-              <a:buNone/>
-            </a:pPr>
-            <a:r>
-              <a:rPr lang="ko-KR" altLang="en-US" sz="750" b="1" dirty="0">
-                <a:solidFill>
-                  <a:srgbClr val="FFFFFF"/>
-                </a:solidFill>
-                <a:latin typeface="맑은 고딕" pitchFamily="34" charset="0"/>
-                <a:ea typeface="맑은 고딕" pitchFamily="34" charset="-122"/>
-                <a:cs typeface="맑은 고딕" pitchFamily="34" charset="-120"/>
-              </a:rPr>
-              <a:t>메시지</a:t>
-            </a:r>
-            <a:endParaRPr lang="ko-KR" sz="750" dirty="0"/>
-          </a:p>
-        </p:txBody>
-      </p:sp>
-      <p:sp>
-        <p:nvSpPr>
-          <p:cNvPr id="66" name="Shape 58"/>
-          <p:cNvSpPr/>
-          <p:nvPr/>
-        </p:nvSpPr>
-        <p:spPr>
-          <a:xfrm>
-            <a:off x="4329501" y="5018227"/>
-            <a:ext cx="552054" cy="274320"/>
-          </a:xfrm>
-          <a:prstGeom prst="roundRect">
-            <a:avLst>
-              <a:gd name="adj" fmla="val 50000"/>
-            </a:avLst>
-          </a:prstGeom>
-          <a:solidFill>
-            <a:srgbClr val="FFFFFF"/>
-          </a:solidFill>
-          <a:ln w="12700">
-            <a:solidFill>
-              <a:srgbClr val="D5DEEA"/>
-            </a:solidFill>
-            <a:prstDash val="solid"/>
-          </a:ln>
-        </p:spPr>
-      </p:sp>
-      <p:sp>
-        <p:nvSpPr>
-          <p:cNvPr id="67" name="Text 59"/>
-          <p:cNvSpPr txBox="1"/>
-          <p:nvPr/>
-        </p:nvSpPr>
-        <p:spPr>
-          <a:xfrm>
-            <a:off x="4329501" y="5018227"/>
-            <a:ext cx="552054" cy="274320"/>
-          </a:xfrm>
-          <a:prstGeom prst="rect">
-            <a:avLst/>
-          </a:prstGeom>
-          <a:noFill/>
-          <a:ln/>
-        </p:spPr>
-        <p:txBody>
-          <a:bodyPr wrap="square" lIns="0" tIns="0" rIns="0" bIns="0" rtlCol="0" anchor="ctr"/>
-          <a:lstStyle/>
-          <a:p>
-            <a:pPr algn="ctr" indent="0" marL="0">
-              <a:buNone/>
-            </a:pPr>
-            <a:r>
-              <a:rPr lang="ko-KR" altLang="en-US" sz="750" b="1" dirty="0">
-                <a:solidFill>
-                  <a:srgbClr val="1C2433"/>
-                </a:solidFill>
-                <a:latin typeface="맑은 고딕" pitchFamily="34" charset="0"/>
-                <a:ea typeface="맑은 고딕" pitchFamily="34" charset="-122"/>
-                <a:cs typeface="맑은 고딕" pitchFamily="34" charset="-120"/>
-              </a:rPr>
-              <a:t>등록 연락처</a:t>
-            </a:r>
-            <a:endParaRPr lang="ko-KR" sz="750" dirty="0"/>
-          </a:p>
-        </p:txBody>
-      </p:sp>
-      <p:sp>
-        <p:nvSpPr>
-          <p:cNvPr id="68" name="Shape 60"/>
-          <p:cNvSpPr/>
-          <p:nvPr/>
-        </p:nvSpPr>
-        <p:spPr>
-          <a:xfrm>
-            <a:off x="4927275" y="5018227"/>
-            <a:ext cx="552054" cy="274320"/>
-          </a:xfrm>
-          <a:prstGeom prst="roundRect">
-            <a:avLst>
-              <a:gd name="adj" fmla="val 50000"/>
-            </a:avLst>
-          </a:prstGeom>
-          <a:solidFill>
-            <a:srgbClr val="FFFFFF"/>
-          </a:solidFill>
-          <a:ln w="12700">
-            <a:solidFill>
-              <a:srgbClr val="D5DEEA"/>
-            </a:solidFill>
-            <a:prstDash val="solid"/>
-          </a:ln>
-        </p:spPr>
-      </p:sp>
-      <p:sp>
-        <p:nvSpPr>
-          <p:cNvPr id="69" name="Text 61"/>
-          <p:cNvSpPr txBox="1"/>
-          <p:nvPr/>
-        </p:nvSpPr>
-        <p:spPr>
-          <a:xfrm>
-            <a:off x="4927275" y="5018227"/>
-            <a:ext cx="552054" cy="274320"/>
-          </a:xfrm>
-          <a:prstGeom prst="rect">
-            <a:avLst/>
-          </a:prstGeom>
-          <a:noFill/>
-          <a:ln/>
-        </p:spPr>
-        <p:txBody>
-          <a:bodyPr wrap="square" lIns="0" tIns="0" rIns="0" bIns="0" rtlCol="0" anchor="ctr"/>
-          <a:lstStyle/>
-          <a:p>
-            <a:pPr algn="ctr" indent="0" marL="0">
-              <a:buNone/>
-            </a:pPr>
-            <a:r>
-              <a:rPr lang="ko-KR" altLang="en-US" sz="750" b="1" dirty="0">
-                <a:solidFill>
-                  <a:srgbClr val="1C2433"/>
-                </a:solidFill>
-                <a:latin typeface="맑은 고딕" pitchFamily="34" charset="0"/>
-                <a:ea typeface="맑은 고딕" pitchFamily="34" charset="-122"/>
-                <a:cs typeface="맑은 고딕" pitchFamily="34" charset="-120"/>
-              </a:rPr>
-              <a:t>공지</a:t>
-            </a:r>
-            <a:endParaRPr lang="ko-KR" sz="750" dirty="0"/>
-          </a:p>
-        </p:txBody>
-      </p:sp>
-      <p:sp>
-        <p:nvSpPr>
-          <p:cNvPr id="70" name="Shape 62"/>
-          <p:cNvSpPr/>
-          <p:nvPr/>
-        </p:nvSpPr>
-        <p:spPr>
-          <a:xfrm>
-            <a:off x="3612855" y="5323637"/>
-            <a:ext cx="1985345" cy="603504"/>
-          </a:xfrm>
-          <a:prstGeom prst="rect">
-            <a:avLst/>
-          </a:prstGeom>
-          <a:solidFill>
-            <a:srgbClr val="FFFFFF"/>
-          </a:solidFill>
-          <a:ln/>
-        </p:spPr>
-      </p:sp>
-      <p:pic>
-        <p:nvPicPr>
-          <p:cNvPr id="71" name="Image 6" descr="preencoded.png">    </p:cNvPr>
-          <p:cNvPicPr>
-            <a:picLocks noChangeAspect="1"/>
-          </p:cNvPicPr>
-          <p:nvPr/>
-        </p:nvPicPr>
-        <p:blipFill>
-          <a:blip r:embed="rId7"/>
-          <a:stretch>
-            <a:fillRect/>
-          </a:stretch>
-        </p:blipFill>
-        <p:spPr>
-          <a:xfrm>
-            <a:off x="3996903" y="5396789"/>
-            <a:ext cx="219456" cy="219456"/>
-          </a:xfrm>
-          <a:prstGeom prst="rect">
-            <a:avLst/>
-          </a:prstGeom>
-        </p:spPr>
-      </p:pic>
-      <p:sp>
-        <p:nvSpPr>
-          <p:cNvPr id="72" name="Text 63"/>
-          <p:cNvSpPr txBox="1"/>
-          <p:nvPr/>
-        </p:nvSpPr>
-        <p:spPr>
-          <a:xfrm>
-            <a:off x="3795735" y="5643677"/>
-            <a:ext cx="621792" cy="182880"/>
-          </a:xfrm>
-          <a:prstGeom prst="rect">
-            <a:avLst/>
-          </a:prstGeom>
-          <a:noFill/>
-          <a:ln/>
-        </p:spPr>
-        <p:txBody>
-          <a:bodyPr wrap="square" lIns="0" tIns="0" rIns="0" bIns="0" rtlCol="0" anchor="t"/>
-          <a:lstStyle/>
-          <a:p>
-            <a:pPr algn="ctr" indent="0" marL="0">
-              <a:buNone/>
-            </a:pPr>
-            <a:r>
-              <a:rPr lang="ko-KR" altLang="en-US" sz="750" b="1" dirty="0">
-                <a:solidFill>
-                  <a:srgbClr val="1C2433"/>
-                </a:solidFill>
-                <a:latin typeface="맑은 고딕" pitchFamily="34" charset="0"/>
-                <a:ea typeface="맑은 고딕" pitchFamily="34" charset="-122"/>
-                <a:cs typeface="맑은 고딕" pitchFamily="34" charset="-120"/>
-              </a:rPr>
-              <a:t>대조</a:t>
-            </a:r>
-            <a:endParaRPr lang="ko-KR" sz="750" dirty="0"/>
-          </a:p>
-        </p:txBody>
-      </p:sp>
-      <p:pic>
-        <p:nvPicPr>
-          <p:cNvPr id="73" name="Image 7" descr="preencoded.png">    </p:cNvPr>
-          <p:cNvPicPr>
-            <a:picLocks noChangeAspect="1"/>
-          </p:cNvPicPr>
-          <p:nvPr/>
-        </p:nvPicPr>
-        <p:blipFill>
-          <a:blip r:embed="rId8"/>
-          <a:stretch>
-            <a:fillRect/>
-          </a:stretch>
-        </p:blipFill>
-        <p:spPr>
-          <a:xfrm>
-            <a:off x="4536765" y="5396789"/>
-            <a:ext cx="219456" cy="219456"/>
-          </a:xfrm>
-          <a:prstGeom prst="rect">
-            <a:avLst/>
-          </a:prstGeom>
-        </p:spPr>
-      </p:pic>
-      <p:sp>
-        <p:nvSpPr>
-          <p:cNvPr id="74" name="Text 64"/>
-          <p:cNvSpPr txBox="1"/>
-          <p:nvPr/>
-        </p:nvSpPr>
-        <p:spPr>
-          <a:xfrm>
-            <a:off x="4335597" y="5643677"/>
-            <a:ext cx="621792" cy="182880"/>
-          </a:xfrm>
-          <a:prstGeom prst="rect">
-            <a:avLst/>
-          </a:prstGeom>
-          <a:noFill/>
-          <a:ln/>
-        </p:spPr>
-        <p:txBody>
-          <a:bodyPr wrap="square" lIns="0" tIns="0" rIns="0" bIns="0" rtlCol="0" anchor="t"/>
-          <a:lstStyle/>
-          <a:p>
-            <a:pPr algn="ctr" indent="0" marL="0">
-              <a:buNone/>
-            </a:pPr>
-            <a:r>
-              <a:rPr lang="ko-KR" altLang="en-US" sz="750" b="1" dirty="0">
-                <a:solidFill>
-                  <a:srgbClr val="1C2433"/>
-                </a:solidFill>
-                <a:latin typeface="맑은 고딕" pitchFamily="34" charset="0"/>
-                <a:ea typeface="맑은 고딕" pitchFamily="34" charset="-122"/>
-                <a:cs typeface="맑은 고딕" pitchFamily="34" charset="-120"/>
-              </a:rPr>
-              <a:t>표시</a:t>
-            </a:r>
-            <a:endParaRPr lang="ko-KR" sz="750" dirty="0"/>
-          </a:p>
-        </p:txBody>
-      </p:sp>
-      <p:pic>
-        <p:nvPicPr>
-          <p:cNvPr id="75" name="Image 8" descr="preencoded.png">    </p:cNvPr>
-          <p:cNvPicPr>
-            <a:picLocks noChangeAspect="1"/>
-          </p:cNvPicPr>
-          <p:nvPr/>
-        </p:nvPicPr>
-        <p:blipFill>
-          <a:blip r:embed="rId9"/>
-          <a:stretch>
-            <a:fillRect/>
-          </a:stretch>
-        </p:blipFill>
-        <p:spPr>
-          <a:xfrm>
-            <a:off x="5076627" y="5396789"/>
-            <a:ext cx="219456" cy="219456"/>
-          </a:xfrm>
-          <a:prstGeom prst="rect">
-            <a:avLst/>
-          </a:prstGeom>
-        </p:spPr>
-      </p:pic>
-      <p:sp>
-        <p:nvSpPr>
-          <p:cNvPr id="76" name="Text 65"/>
-          <p:cNvSpPr txBox="1"/>
-          <p:nvPr/>
-        </p:nvSpPr>
-        <p:spPr>
-          <a:xfrm>
-            <a:off x="4875459" y="5643677"/>
-            <a:ext cx="621792" cy="182880"/>
-          </a:xfrm>
-          <a:prstGeom prst="rect">
-            <a:avLst/>
-          </a:prstGeom>
-          <a:noFill/>
-          <a:ln/>
-        </p:spPr>
-        <p:txBody>
-          <a:bodyPr wrap="square" lIns="0" tIns="0" rIns="0" bIns="0" rtlCol="0" anchor="t"/>
-          <a:lstStyle/>
-          <a:p>
-            <a:pPr algn="ctr" indent="0" marL="0">
-              <a:buNone/>
-            </a:pPr>
-            <a:r>
-              <a:rPr lang="ko-KR" altLang="en-US" sz="750" b="1" dirty="0">
-                <a:solidFill>
-                  <a:srgbClr val="1C2433"/>
-                </a:solidFill>
-                <a:latin typeface="맑은 고딕" pitchFamily="34" charset="0"/>
-                <a:ea typeface="맑은 고딕" pitchFamily="34" charset="-122"/>
-                <a:cs typeface="맑은 고딕" pitchFamily="34" charset="-120"/>
-              </a:rPr>
-              <a:t>규칙</a:t>
-            </a:r>
-            <a:endParaRPr lang="ko-KR" sz="750" dirty="0"/>
-          </a:p>
-        </p:txBody>
-      </p:sp>
-      <p:sp>
-        <p:nvSpPr>
-          <p:cNvPr id="77" name="Shape 66"/>
-          <p:cNvSpPr/>
           <p:nvPr/>
         </p:nvSpPr>
         <p:spPr>
@@ -13654,10 +10319,47 @@
             <a:off x="6806184" y="1078992"/>
             <a:ext cx="1554480" cy="310896"/>
           </a:xfrm>
-          <a:prstGeom prst="roundRect">
-            <a:avLst>
-              <a:gd name="adj" fmla="val 50000"/>
-            </a:avLst>
+          <a:prstGeom prst="rect">
+            <a:avLst/>
+          </a:prstGeom>
+          <a:noFill/>
+          <a:ln/>
+        </p:spPr>
+        <p:txBody>
+          <a:bodyPr wrap="square" lIns="0" tIns="0" rIns="0" bIns="0" rtlCol="0" anchor="ctr"/>
+          <a:lstStyle/>
+          <a:p>
+            <a:pPr algn="ctr" indent="0" marL="0">
+              <a:buNone/>
+            </a:pPr>
+            <a:r>
+              <a:rPr lang="ko-KR" altLang="en-US" sz="1300" b="1" dirty="0">
+                <a:solidFill>
+                  <a:srgbClr val="06122A"/>
+                </a:solidFill>
+                <a:latin typeface="맑은 고딕" pitchFamily="34" charset="0"/>
+                <a:ea typeface="맑은 고딕" pitchFamily="34" charset="-122"/>
+                <a:cs typeface="맑은 고딕" pitchFamily="34" charset="-120"/>
+              </a:rPr>
+              <a:t>C  정보 대조</a:t>
+            </a:r>
+            <a:endParaRPr lang="ko-KR" sz="1300" dirty="0"/>
+          </a:p>
+        </p:txBody>
+      </p:sp>
+      <p:sp>
+        <p:nvSpPr>
+          <p:cNvPr id="21" name="Shape 17"/>
+          <p:cNvSpPr/>
+          <p:nvPr/>
+        </p:nvSpPr>
+        <p:spPr>
+          <a:xfrm>
+            <a:off x="8980932" y="3575304"/>
+            <a:ext cx="182880" cy="365760"/>
+          </a:xfrm>
+          <a:prstGeom prst="chevron">
+            <a:avLst/>
           </a:prstGeom>
           <a:solidFill>
             <a:srgbClr val="19B3B1"/>
@@ -13667,66 +10369,7 @@
       </p:sp>
       <p:sp>
         <p:nvSpPr>
-          <p:cNvPr id="78" name="Text 67"/>
-          <p:cNvSpPr txBox="1"/>
-          <p:nvPr/>
-        </p:nvSpPr>
-        <p:spPr>
-          <a:xfrm>
-            <a:off x="6806184" y="1078992"/>
-            <a:ext cx="1554480" cy="310896"/>
-          </a:xfrm>
-          <a:prstGeom prst="rect">
-            <a:avLst/>
-          </a:prstGeom>
-          <a:noFill/>
-          <a:ln/>
-        </p:spPr>
-        <p:txBody>
-          <a:bodyPr wrap="square" lIns="0" tIns="0" rIns="0" bIns="0" rtlCol="0" anchor="ctr"/>
-          <a:lstStyle/>
-          <a:p>
-            <a:pPr algn="ctr" indent="0" marL="0">
-              <a:buNone/>
-            </a:pPr>
-            <a:r>
-              <a:rPr lang="ko-KR" altLang="en-US" sz="1300" b="1" dirty="0">
-                <a:solidFill>
-                  <a:srgbClr val="06122A"/>
-                </a:solidFill>
-                <a:latin typeface="맑은 고딕" pitchFamily="34" charset="0"/>
-                <a:ea typeface="맑은 고딕" pitchFamily="34" charset="-122"/>
-                <a:cs typeface="맑은 고딕" pitchFamily="34" charset="-120"/>
-              </a:rPr>
-              <a:t>C  정보 대조</a:t>
-            </a:r>
-            <a:endParaRPr lang="ko-KR" sz="1300" dirty="0"/>
-          </a:p>
-        </p:txBody>
-      </p:sp>
-      <p:sp>
-        <p:nvSpPr>
-          <p:cNvPr id="79" name="Shape 68"/>
-          <p:cNvSpPr/>
-          <p:nvPr/>
-        </p:nvSpPr>
-        <p:spPr>
-          <a:xfrm>
-            <a:off x="8980932" y="3575304"/>
-            <a:ext cx="182880" cy="365760"/>
-          </a:xfrm>
-          <a:prstGeom prst="chevron">
-            <a:avLst/>
-          </a:prstGeom>
-          <a:solidFill>
-            <a:srgbClr val="19B3B1"/>
-          </a:solidFill>
-          <a:ln/>
-        </p:spPr>
-      </p:sp>
-      <p:sp>
-        <p:nvSpPr>
-          <p:cNvPr id="80" name="Text 69"/>
+          <p:cNvPr id="22" name="Text 18"/>
           <p:cNvSpPr txBox="1"/>
           <p:nvPr/>
         </p:nvSpPr>
@@ -13757,7 +10400,7 @@
                 <a:ea typeface="맑은 고딕" pitchFamily="34" charset="-122"/>
                 <a:cs typeface="맑은 고딕" pitchFamily="34" charset="-120"/>
               </a:rPr>
-              <a:t>발신 정보 ↔ 등록 정보 대조</a:t>
+              <a:t>대조 단서 + 의심 깃발</a:t>
             </a:r>
             <a:endParaRPr lang="ko-KR" sz="1200" dirty="0"/>
           </a:p>
@@ -13765,7 +10408,7 @@
       </p:sp>
       <p:sp>
         <p:nvSpPr>
-          <p:cNvPr id="81" name="Shape 70"/>
+          <p:cNvPr id="23" name="Shape 19"/>
           <p:cNvSpPr/>
           <p:nvPr/>
         </p:nvSpPr>
@@ -13799,7 +10442,7 @@
       </p:sp>
       <p:sp>
         <p:nvSpPr>
-          <p:cNvPr id="82" name="Shape 71"/>
+          <p:cNvPr id="24" name="Shape 20"/>
           <p:cNvSpPr/>
           <p:nvPr/>
         </p:nvSpPr>
@@ -13819,158 +10462,40 @@
           <a:ln/>
         </p:spPr>
       </p:sp>
-      <p:sp>
-        <p:nvSpPr>
-          <p:cNvPr id="83" name="Text 72"/>
-          <p:cNvSpPr txBox="1"/>
-          <p:nvPr/>
-        </p:nvSpPr>
-        <p:spPr>
-          <a:xfrm>
-            <a:off x="6590751" y="5908853"/>
-            <a:ext cx="1985345" cy="91440"/>
-          </a:xfrm>
-          <a:prstGeom prst="rect">
-            <a:avLst/>
-          </a:prstGeom>
-          <a:noFill/>
-          <a:ln/>
-        </p:spPr>
-        <p:txBody>
-          <a:bodyPr wrap="square" lIns="0" tIns="0" rIns="0" bIns="0" rtlCol="0" anchor="t"/>
-          <a:lstStyle/>
-          <a:p>
-            <a:pPr algn="ctr" indent="0" marL="0">
-              <a:buNone/>
-            </a:pPr>
-            <a:r>
-              <a:rPr lang="ko-KR" altLang="en-US" sz="550" b="1" spc="300" kern="0" dirty="0">
-                <a:solidFill>
-                  <a:srgbClr val="6F86A6"/>
-                </a:solidFill>
-                <a:latin typeface="맑은 고딕" pitchFamily="34" charset="0"/>
-                <a:ea typeface="맑은 고딕" pitchFamily="34" charset="-122"/>
-                <a:cs typeface="맑은 고딕" pitchFamily="34" charset="-120"/>
-              </a:rPr>
-              <a:t>MOCKUP</a:t>
-            </a:r>
-            <a:endParaRPr lang="ko-KR" sz="550" dirty="0"/>
-          </a:p>
-        </p:txBody>
-      </p:sp>
-      <p:sp>
-        <p:nvSpPr>
-          <p:cNvPr id="84" name="Shape 73"/>
+      <p:pic>
+        <p:nvPicPr>
+          <p:cNvPr id="25" name="Image 2" descr="HTML 시제품 화면: 정보 대조">    </p:cNvPr>
+          <p:cNvPicPr>
+            <a:picLocks noChangeAspect="1"/>
+          </p:cNvPicPr>
+          <p:nvPr/>
+        </p:nvPicPr>
+        <p:blipFill>
+          <a:blip r:embed="rId3"/>
+          <a:stretch>
+            <a:fillRect/>
+          </a:stretch>
+        </p:blipFill>
+        <p:spPr>
+          <a:xfrm>
+            <a:off x="6649540" y="1680667"/>
+            <a:ext cx="1867768" cy="4155034"/>
+          </a:xfrm>
+          <a:prstGeom prst="rect">
+            <a:avLst/>
+          </a:prstGeom>
+        </p:spPr>
+      </p:pic>
+      <p:sp>
+        <p:nvSpPr>
+          <p:cNvPr id="26" name="Shape 21"/>
           <p:cNvSpPr/>
           <p:nvPr/>
         </p:nvSpPr>
         <p:spPr>
           <a:xfrm>
-            <a:off x="6590751" y="1589227"/>
-            <a:ext cx="1985345" cy="4337914"/>
-          </a:xfrm>
-          <a:prstGeom prst="roundRect">
-            <a:avLst>
-              <a:gd name="adj" fmla="val 10870"/>
-            </a:avLst>
-          </a:prstGeom>
-          <a:solidFill>
-            <a:srgbClr val="F4F6FA"/>
-          </a:solidFill>
-          <a:ln/>
-        </p:spPr>
-      </p:sp>
-      <p:sp>
-        <p:nvSpPr>
-          <p:cNvPr id="85" name="Shape 74"/>
-          <p:cNvSpPr/>
-          <p:nvPr/>
-        </p:nvSpPr>
-        <p:spPr>
-          <a:xfrm>
-            <a:off x="6590751" y="1589227"/>
-            <a:ext cx="1985345" cy="566928"/>
-          </a:xfrm>
-          <a:prstGeom prst="roundRect">
-            <a:avLst>
-              <a:gd name="adj" fmla="val 38065"/>
-            </a:avLst>
-          </a:prstGeom>
-          <a:solidFill>
-            <a:srgbClr val="0B1A33"/>
-          </a:solidFill>
-          <a:ln/>
-        </p:spPr>
-      </p:sp>
-      <p:sp>
-        <p:nvSpPr>
-          <p:cNvPr id="86" name="Shape 75"/>
-          <p:cNvSpPr/>
-          <p:nvPr/>
-        </p:nvSpPr>
-        <p:spPr>
-          <a:xfrm>
-            <a:off x="6590751" y="1954987"/>
-            <a:ext cx="1985345" cy="201168"/>
-          </a:xfrm>
-          <a:prstGeom prst="rect">
-            <a:avLst/>
-          </a:prstGeom>
-          <a:solidFill>
-            <a:srgbClr val="0B1A33"/>
-          </a:solidFill>
-          <a:ln/>
-        </p:spPr>
-      </p:sp>
-      <p:sp>
-        <p:nvSpPr>
-          <p:cNvPr id="87" name="Text 76"/>
-          <p:cNvSpPr txBox="1"/>
-          <p:nvPr/>
-        </p:nvSpPr>
-        <p:spPr>
-          <a:xfrm>
-            <a:off x="6737055" y="1634947"/>
-            <a:ext cx="457200" cy="164592"/>
-          </a:xfrm>
-          <a:prstGeom prst="rect">
-            <a:avLst/>
-          </a:prstGeom>
-          <a:noFill/>
-          <a:ln/>
-        </p:spPr>
-        <p:txBody>
-          <a:bodyPr wrap="square" lIns="0" tIns="0" rIns="0" bIns="0" rtlCol="0" anchor="t"/>
-          <a:lstStyle/>
-          <a:p>
-            <a:pPr indent="0" marL="0">
-              <a:buNone/>
-            </a:pPr>
-            <a:r>
-              <a:rPr lang="ko-KR" altLang="en-US" sz="750" b="1" dirty="0">
-                <a:solidFill>
-                  <a:srgbClr val="FFFFFF"/>
-                </a:solidFill>
-                <a:latin typeface="맑은 고딕" pitchFamily="34" charset="0"/>
-                <a:ea typeface="맑은 고딕" pitchFamily="34" charset="-122"/>
-                <a:cs typeface="맑은 고딕" pitchFamily="34" charset="-120"/>
-              </a:rPr>
-              <a:t>9:41</a:t>
-            </a:r>
-            <a:endParaRPr lang="ko-KR" sz="750" dirty="0"/>
-          </a:p>
-        </p:txBody>
-      </p:sp>
-      <p:sp>
-        <p:nvSpPr>
-          <p:cNvPr id="88" name="Shape 77"/>
-          <p:cNvSpPr/>
-          <p:nvPr/>
-        </p:nvSpPr>
-        <p:spPr>
-          <a:xfrm>
-            <a:off x="7327392" y="1644091"/>
-            <a:ext cx="512064" cy="137160"/>
+            <a:off x="9784080" y="1078992"/>
+            <a:ext cx="1554480" cy="310896"/>
           </a:xfrm>
           <a:prstGeom prst="roundRect">
             <a:avLst>
@@ -13978,737 +10503,15 @@
             </a:avLst>
           </a:prstGeom>
           <a:solidFill>
-            <a:srgbClr val="040B17"/>
+            <a:srgbClr val="19B3B1"/>
           </a:solidFill>
           <a:ln/>
         </p:spPr>
       </p:sp>
       <p:sp>
         <p:nvSpPr>
-          <p:cNvPr id="89" name="Shape 78"/>
-          <p:cNvSpPr/>
-          <p:nvPr/>
-        </p:nvSpPr>
-        <p:spPr>
-          <a:xfrm>
-            <a:off x="8192049" y="1666951"/>
-            <a:ext cx="219456" cy="100584"/>
-          </a:xfrm>
-          <a:prstGeom prst="roundRect">
-            <a:avLst>
-              <a:gd name="adj" fmla="val 27273"/>
-            </a:avLst>
-          </a:prstGeom>
-          <a:solidFill>
-            <a:srgbClr val="FFFFFF">
-              <a:alpha val="90000"/>
-            </a:srgbClr>
-          </a:solidFill>
-          <a:ln/>
-        </p:spPr>
-      </p:sp>
-      <p:sp>
-        <p:nvSpPr>
-          <p:cNvPr id="90" name="Text 79"/>
+          <p:cNvPr id="27" name="Text 22"/>
           <p:cNvSpPr txBox="1"/>
-          <p:nvPr/>
-        </p:nvSpPr>
-        <p:spPr>
-          <a:xfrm>
-            <a:off x="6709623" y="1881835"/>
-            <a:ext cx="1747601" cy="219456"/>
-          </a:xfrm>
-          <a:prstGeom prst="rect">
-            <a:avLst/>
-          </a:prstGeom>
-          <a:noFill/>
-          <a:ln/>
-        </p:spPr>
-        <p:txBody>
-          <a:bodyPr wrap="square" lIns="0" tIns="0" rIns="0" bIns="0" rtlCol="0" anchor="ctr"/>
-          <a:lstStyle/>
-          <a:p>
-            <a:pPr indent="0" marL="0">
-              <a:buNone/>
-            </a:pPr>
-            <a:r>
-              <a:rPr lang="ko-KR" altLang="en-US" sz="850" b="1" dirty="0">
-                <a:solidFill>
-                  <a:srgbClr val="FFFFFF"/>
-                </a:solidFill>
-                <a:latin typeface="맑은 고딕" pitchFamily="34" charset="0"/>
-                <a:ea typeface="맑은 고딕" pitchFamily="34" charset="-122"/>
-                <a:cs typeface="맑은 고딕" pitchFamily="34" charset="-120"/>
-              </a:rPr>
-              <a:t>비교 모드</a:t>
-            </a:r>
-            <a:endParaRPr lang="ko-KR" sz="850" dirty="0"/>
-          </a:p>
-        </p:txBody>
-      </p:sp>
-      <p:sp>
-        <p:nvSpPr>
-          <p:cNvPr id="91" name="Text 80"/>
-          <p:cNvSpPr txBox="1"/>
-          <p:nvPr/>
-        </p:nvSpPr>
-        <p:spPr>
-          <a:xfrm>
-            <a:off x="6709623" y="2247595"/>
-            <a:ext cx="1747601" cy="182880"/>
-          </a:xfrm>
-          <a:prstGeom prst="rect">
-            <a:avLst/>
-          </a:prstGeom>
-          <a:noFill/>
-          <a:ln/>
-        </p:spPr>
-        <p:txBody>
-          <a:bodyPr wrap="square" lIns="0" tIns="0" rIns="0" bIns="0" rtlCol="0" anchor="t"/>
-          <a:lstStyle/>
-          <a:p>
-            <a:pPr indent="0" marL="0">
-              <a:buNone/>
-            </a:pPr>
-            <a:r>
-              <a:rPr lang="ko-KR" altLang="en-US" sz="750" b="1" dirty="0">
-                <a:solidFill>
-                  <a:srgbClr val="5A6576"/>
-                </a:solidFill>
-                <a:latin typeface="맑은 고딕" pitchFamily="34" charset="0"/>
-                <a:ea typeface="맑은 고딕" pitchFamily="34" charset="-122"/>
-                <a:cs typeface="맑은 고딕" pitchFamily="34" charset="-120"/>
-              </a:rPr>
-              <a:t>▼ 받은 메시지</a:t>
-            </a:r>
-            <a:endParaRPr lang="ko-KR" sz="750" dirty="0"/>
-          </a:p>
-        </p:txBody>
-      </p:sp>
-      <p:sp>
-        <p:nvSpPr>
-          <p:cNvPr id="92" name="Shape 81"/>
-          <p:cNvSpPr/>
-          <p:nvPr/>
-        </p:nvSpPr>
-        <p:spPr>
-          <a:xfrm>
-            <a:off x="6709623" y="2457907"/>
-            <a:ext cx="1747601" cy="566928"/>
-          </a:xfrm>
-          <a:prstGeom prst="roundRect">
-            <a:avLst>
-              <a:gd name="adj" fmla="val 16129"/>
-            </a:avLst>
-          </a:prstGeom>
-          <a:solidFill>
-            <a:srgbClr val="FFFFFF"/>
-          </a:solidFill>
-          <a:ln w="28575">
-            <a:solidFill>
-              <a:srgbClr val="F2B33D"/>
-            </a:solidFill>
-            <a:prstDash val="solid"/>
-          </a:ln>
-        </p:spPr>
-      </p:sp>
-      <p:sp>
-        <p:nvSpPr>
-          <p:cNvPr id="93" name="Text 82"/>
-          <p:cNvSpPr txBox="1"/>
-          <p:nvPr/>
-        </p:nvSpPr>
-        <p:spPr>
-          <a:xfrm>
-            <a:off x="6801063" y="2494483"/>
-            <a:ext cx="914400" cy="146304"/>
-          </a:xfrm>
-          <a:prstGeom prst="rect">
-            <a:avLst/>
-          </a:prstGeom>
-          <a:noFill/>
-          <a:ln/>
-        </p:spPr>
-        <p:txBody>
-          <a:bodyPr wrap="square" lIns="0" tIns="0" rIns="0" bIns="0" rtlCol="0" anchor="t"/>
-          <a:lstStyle/>
-          <a:p>
-            <a:pPr indent="0" marL="0">
-              <a:buNone/>
-            </a:pPr>
-            <a:r>
-              <a:rPr lang="ko-KR" altLang="en-US" sz="700" dirty="0">
-                <a:solidFill>
-                  <a:srgbClr val="5A6576"/>
-                </a:solidFill>
-                <a:latin typeface="맑은 고딕" pitchFamily="34" charset="0"/>
-                <a:ea typeface="맑은 고딕" pitchFamily="34" charset="-122"/>
-                <a:cs typeface="맑은 고딕" pitchFamily="34" charset="-120"/>
-              </a:rPr>
-              <a:t>보낸 사람</a:t>
-            </a:r>
-            <a:endParaRPr lang="ko-KR" sz="700" dirty="0"/>
-          </a:p>
-        </p:txBody>
-      </p:sp>
-      <p:sp>
-        <p:nvSpPr>
-          <p:cNvPr id="94" name="Text 83"/>
-          <p:cNvSpPr txBox="1"/>
-          <p:nvPr/>
-        </p:nvSpPr>
-        <p:spPr>
-          <a:xfrm>
-            <a:off x="6801063" y="2668219"/>
-            <a:ext cx="1564721" cy="274320"/>
-          </a:xfrm>
-          <a:prstGeom prst="rect">
-            <a:avLst/>
-          </a:prstGeom>
-          <a:noFill/>
-          <a:ln/>
-        </p:spPr>
-        <p:txBody>
-          <a:bodyPr wrap="square" lIns="0" tIns="0" rIns="0" bIns="0" rtlCol="0" anchor="t"/>
-          <a:lstStyle/>
-          <a:p>
-            <a:pPr indent="0" marL="0">
-              <a:buNone/>
-            </a:pPr>
-            <a:r>
-              <a:rPr lang="ko-KR" altLang="en-US" sz="850" b="1" dirty="0">
-                <a:solidFill>
-                  <a:srgbClr val="1C2433"/>
-                </a:solidFill>
-                <a:latin typeface="맑은 고딕" pitchFamily="34" charset="0"/>
-                <a:ea typeface="맑은 고딕" pitchFamily="34" charset="-122"/>
-                <a:cs typeface="맑은 고딕" pitchFamily="34" charset="-120"/>
-              </a:rPr>
-              <a:t>help@nuri-help.example</a:t>
-            </a:r>
-            <a:endParaRPr lang="ko-KR" sz="850" dirty="0"/>
-          </a:p>
-        </p:txBody>
-      </p:sp>
-      <p:sp>
-        <p:nvSpPr>
-          <p:cNvPr id="95" name="Shape 84"/>
-          <p:cNvSpPr/>
-          <p:nvPr/>
-        </p:nvSpPr>
-        <p:spPr>
-          <a:xfrm>
-            <a:off x="7309104" y="3125419"/>
-            <a:ext cx="548640" cy="45720"/>
-          </a:xfrm>
-          <a:prstGeom prst="roundRect">
-            <a:avLst>
-              <a:gd name="adj" fmla="val 50000"/>
-            </a:avLst>
-          </a:prstGeom>
-          <a:solidFill>
-            <a:srgbClr val="9AA8BA"/>
-          </a:solidFill>
-          <a:ln/>
-        </p:spPr>
-      </p:sp>
-      <p:sp>
-        <p:nvSpPr>
-          <p:cNvPr id="96" name="Shape 85"/>
-          <p:cNvSpPr/>
-          <p:nvPr/>
-        </p:nvSpPr>
-        <p:spPr>
-          <a:xfrm>
-            <a:off x="6755343" y="3253435"/>
-            <a:ext cx="1656161" cy="292608"/>
-          </a:xfrm>
-          <a:prstGeom prst="roundRect">
-            <a:avLst>
-              <a:gd name="adj" fmla="val 50000"/>
-            </a:avLst>
-          </a:prstGeom>
-          <a:solidFill>
-            <a:srgbClr val="F2B33D"/>
-          </a:solidFill>
-          <a:ln/>
-        </p:spPr>
-      </p:sp>
-      <p:sp>
-        <p:nvSpPr>
-          <p:cNvPr id="97" name="Text 86"/>
-          <p:cNvSpPr txBox="1"/>
-          <p:nvPr/>
-        </p:nvSpPr>
-        <p:spPr>
-          <a:xfrm>
-            <a:off x="6755343" y="3253435"/>
-            <a:ext cx="1656161" cy="292608"/>
-          </a:xfrm>
-          <a:prstGeom prst="rect">
-            <a:avLst/>
-          </a:prstGeom>
-          <a:noFill/>
-          <a:ln/>
-        </p:spPr>
-        <p:txBody>
-          <a:bodyPr wrap="square" lIns="0" tIns="0" rIns="0" bIns="0" rtlCol="0" anchor="ctr"/>
-          <a:lstStyle/>
-          <a:p>
-            <a:pPr algn="ctr" indent="0" marL="0">
-              <a:buNone/>
-            </a:pPr>
-            <a:r>
-              <a:rPr lang="ko-KR" altLang="en-US" sz="850" b="1" dirty="0">
-                <a:solidFill>
-                  <a:srgbClr val="0B1A33"/>
-                </a:solidFill>
-                <a:latin typeface="맑은 고딕" pitchFamily="34" charset="0"/>
-                <a:ea typeface="맑은 고딕" pitchFamily="34" charset="-122"/>
-                <a:cs typeface="맑은 고딕" pitchFamily="34" charset="-120"/>
-              </a:rPr>
-              <a:t>! 불일치 · 도메인이 달라요</a:t>
-            </a:r>
-            <a:endParaRPr lang="ko-KR" sz="850" dirty="0"/>
-          </a:p>
-        </p:txBody>
-      </p:sp>
-      <p:sp>
-        <p:nvSpPr>
-          <p:cNvPr id="98" name="Text 87"/>
-          <p:cNvSpPr txBox="1"/>
-          <p:nvPr/>
-        </p:nvSpPr>
-        <p:spPr>
-          <a:xfrm>
-            <a:off x="6709623" y="3646627"/>
-            <a:ext cx="1747601" cy="182880"/>
-          </a:xfrm>
-          <a:prstGeom prst="rect">
-            <a:avLst/>
-          </a:prstGeom>
-          <a:noFill/>
-          <a:ln/>
-        </p:spPr>
-        <p:txBody>
-          <a:bodyPr wrap="square" lIns="0" tIns="0" rIns="0" bIns="0" rtlCol="0" anchor="t"/>
-          <a:lstStyle/>
-          <a:p>
-            <a:pPr indent="0" marL="0">
-              <a:buNone/>
-            </a:pPr>
-            <a:r>
-              <a:rPr lang="ko-KR" altLang="en-US" sz="750" b="1" dirty="0">
-                <a:solidFill>
-                  <a:srgbClr val="5A6576"/>
-                </a:solidFill>
-                <a:latin typeface="맑은 고딕" pitchFamily="34" charset="0"/>
-                <a:ea typeface="맑은 고딕" pitchFamily="34" charset="-122"/>
-                <a:cs typeface="맑은 고딕" pitchFamily="34" charset="-120"/>
-              </a:rPr>
-              <a:t>▲ 등록 연락처</a:t>
-            </a:r>
-            <a:endParaRPr lang="ko-KR" sz="750" dirty="0"/>
-          </a:p>
-        </p:txBody>
-      </p:sp>
-      <p:sp>
-        <p:nvSpPr>
-          <p:cNvPr id="99" name="Shape 88"/>
-          <p:cNvSpPr/>
-          <p:nvPr/>
-        </p:nvSpPr>
-        <p:spPr>
-          <a:xfrm>
-            <a:off x="6709623" y="3856939"/>
-            <a:ext cx="1747601" cy="566928"/>
-          </a:xfrm>
-          <a:prstGeom prst="roundRect">
-            <a:avLst>
-              <a:gd name="adj" fmla="val 16129"/>
-            </a:avLst>
-          </a:prstGeom>
-          <a:solidFill>
-            <a:srgbClr val="FFFFFF"/>
-          </a:solidFill>
-          <a:ln w="28575">
-            <a:solidFill>
-              <a:srgbClr val="F2B33D"/>
-            </a:solidFill>
-            <a:prstDash val="solid"/>
-          </a:ln>
-        </p:spPr>
-      </p:sp>
-      <p:sp>
-        <p:nvSpPr>
-          <p:cNvPr id="100" name="Text 89"/>
-          <p:cNvSpPr txBox="1"/>
-          <p:nvPr/>
-        </p:nvSpPr>
-        <p:spPr>
-          <a:xfrm>
-            <a:off x="6801063" y="3893515"/>
-            <a:ext cx="1564721" cy="146304"/>
-          </a:xfrm>
-          <a:prstGeom prst="rect">
-            <a:avLst/>
-          </a:prstGeom>
-          <a:noFill/>
-          <a:ln/>
-        </p:spPr>
-        <p:txBody>
-          <a:bodyPr wrap="square" lIns="0" tIns="0" rIns="0" bIns="0" rtlCol="0" anchor="t"/>
-          <a:lstStyle/>
-          <a:p>
-            <a:pPr indent="0" marL="0">
-              <a:buNone/>
-            </a:pPr>
-            <a:r>
-              <a:rPr lang="ko-KR" altLang="en-US" sz="700" dirty="0">
-                <a:solidFill>
-                  <a:srgbClr val="5A6576"/>
-                </a:solidFill>
-                <a:latin typeface="맑은 고딕" pitchFamily="34" charset="0"/>
-                <a:ea typeface="맑은 고딕" pitchFamily="34" charset="-122"/>
-                <a:cs typeface="맑은 고딕" pitchFamily="34" charset="-120"/>
-              </a:rPr>
-              <a:t>누리중 학교 지원팀 (공식)</a:t>
-            </a:r>
-            <a:endParaRPr lang="ko-KR" sz="700" dirty="0"/>
-          </a:p>
-        </p:txBody>
-      </p:sp>
-      <p:sp>
-        <p:nvSpPr>
-          <p:cNvPr id="101" name="Text 90"/>
-          <p:cNvSpPr txBox="1"/>
-          <p:nvPr/>
-        </p:nvSpPr>
-        <p:spPr>
-          <a:xfrm>
-            <a:off x="6801063" y="4067251"/>
-            <a:ext cx="1564721" cy="274320"/>
-          </a:xfrm>
-          <a:prstGeom prst="rect">
-            <a:avLst/>
-          </a:prstGeom>
-          <a:noFill/>
-          <a:ln/>
-        </p:spPr>
-        <p:txBody>
-          <a:bodyPr wrap="square" lIns="0" tIns="0" rIns="0" bIns="0" rtlCol="0" anchor="t"/>
-          <a:lstStyle/>
-          <a:p>
-            <a:pPr indent="0" marL="0">
-              <a:buNone/>
-            </a:pPr>
-            <a:r>
-              <a:rPr lang="ko-KR" altLang="en-US" sz="850" b="1" dirty="0">
-                <a:solidFill>
-                  <a:srgbClr val="1C2433"/>
-                </a:solidFill>
-                <a:latin typeface="맑은 고딕" pitchFamily="34" charset="0"/>
-                <a:ea typeface="맑은 고딕" pitchFamily="34" charset="-122"/>
-                <a:cs typeface="맑은 고딕" pitchFamily="34" charset="-120"/>
-              </a:rPr>
-              <a:t>help@baeumteo.example</a:t>
-            </a:r>
-            <a:endParaRPr lang="ko-KR" sz="850" dirty="0"/>
-          </a:p>
-        </p:txBody>
-      </p:sp>
-      <p:sp>
-        <p:nvSpPr>
-          <p:cNvPr id="102" name="Text 91"/>
-          <p:cNvSpPr txBox="1"/>
-          <p:nvPr/>
-        </p:nvSpPr>
-        <p:spPr>
-          <a:xfrm>
-            <a:off x="6709623" y="4561027"/>
-            <a:ext cx="1747601" cy="182880"/>
-          </a:xfrm>
-          <a:prstGeom prst="rect">
-            <a:avLst/>
-          </a:prstGeom>
-          <a:noFill/>
-          <a:ln/>
-        </p:spPr>
-        <p:txBody>
-          <a:bodyPr wrap="square" lIns="0" tIns="0" rIns="0" bIns="0" rtlCol="0" anchor="t"/>
-          <a:lstStyle/>
-          <a:p>
-            <a:pPr indent="0" marL="0">
-              <a:buNone/>
-            </a:pPr>
-            <a:r>
-              <a:rPr lang="ko-KR" altLang="en-US" sz="750" b="1" dirty="0">
-                <a:solidFill>
-                  <a:srgbClr val="5A6576"/>
-                </a:solidFill>
-                <a:latin typeface="맑은 고딕" pitchFamily="34" charset="0"/>
-                <a:ea typeface="맑은 고딕" pitchFamily="34" charset="-122"/>
-                <a:cs typeface="맑은 고딕" pitchFamily="34" charset="-120"/>
-              </a:rPr>
-              <a:t>근거 트레이</a:t>
-            </a:r>
-            <a:endParaRPr lang="ko-KR" sz="750" dirty="0"/>
-          </a:p>
-        </p:txBody>
-      </p:sp>
-      <p:sp>
-        <p:nvSpPr>
-          <p:cNvPr id="103" name="Shape 92"/>
-          <p:cNvSpPr/>
-          <p:nvPr/>
-        </p:nvSpPr>
-        <p:spPr>
-          <a:xfrm>
-            <a:off x="6709623" y="4789627"/>
-            <a:ext cx="850392" cy="246888"/>
-          </a:xfrm>
-          <a:prstGeom prst="roundRect">
-            <a:avLst>
-              <a:gd name="adj" fmla="val 50000"/>
-            </a:avLst>
-          </a:prstGeom>
-          <a:solidFill>
-            <a:srgbClr val="F2B33D"/>
-          </a:solidFill>
-          <a:ln/>
-        </p:spPr>
-      </p:sp>
-      <p:sp>
-        <p:nvSpPr>
-          <p:cNvPr id="104" name="Text 93"/>
-          <p:cNvSpPr txBox="1"/>
-          <p:nvPr/>
-        </p:nvSpPr>
-        <p:spPr>
-          <a:xfrm>
-            <a:off x="6709623" y="4789627"/>
-            <a:ext cx="850392" cy="246888"/>
-          </a:xfrm>
-          <a:prstGeom prst="rect">
-            <a:avLst/>
-          </a:prstGeom>
-          <a:noFill/>
-          <a:ln/>
-        </p:spPr>
-        <p:txBody>
-          <a:bodyPr wrap="square" lIns="0" tIns="0" rIns="0" bIns="0" rtlCol="0" anchor="ctr"/>
-          <a:lstStyle/>
-          <a:p>
-            <a:pPr algn="ctr" indent="0" marL="0">
-              <a:buNone/>
-            </a:pPr>
-            <a:r>
-              <a:rPr lang="ko-KR" altLang="en-US" sz="750" b="1" dirty="0">
-                <a:solidFill>
-                  <a:srgbClr val="0B1A33"/>
-                </a:solidFill>
-                <a:latin typeface="맑은 고딕" pitchFamily="34" charset="0"/>
-                <a:ea typeface="맑은 고딕" pitchFamily="34" charset="-122"/>
-                <a:cs typeface="맑은 고딕" pitchFamily="34" charset="-120"/>
-              </a:rPr>
-              <a:t>도메인 불일치</a:t>
-            </a:r>
-            <a:endParaRPr lang="ko-KR" sz="750" dirty="0"/>
-          </a:p>
-        </p:txBody>
-      </p:sp>
-      <p:sp>
-        <p:nvSpPr>
-          <p:cNvPr id="105" name="Shape 94"/>
-          <p:cNvSpPr/>
-          <p:nvPr/>
-        </p:nvSpPr>
-        <p:spPr>
-          <a:xfrm>
-            <a:off x="7614879" y="4789627"/>
-            <a:ext cx="850392" cy="246888"/>
-          </a:xfrm>
-          <a:prstGeom prst="roundRect">
-            <a:avLst>
-              <a:gd name="adj" fmla="val 50000"/>
-            </a:avLst>
-          </a:prstGeom>
-          <a:solidFill>
-            <a:srgbClr val="FF6B5E"/>
-          </a:solidFill>
-          <a:ln/>
-        </p:spPr>
-      </p:sp>
-      <p:sp>
-        <p:nvSpPr>
-          <p:cNvPr id="106" name="Text 95"/>
-          <p:cNvSpPr txBox="1"/>
-          <p:nvPr/>
-        </p:nvSpPr>
-        <p:spPr>
-          <a:xfrm>
-            <a:off x="7614879" y="4789627"/>
-            <a:ext cx="850392" cy="246888"/>
-          </a:xfrm>
-          <a:prstGeom prst="rect">
-            <a:avLst/>
-          </a:prstGeom>
-          <a:noFill/>
-          <a:ln/>
-        </p:spPr>
-        <p:txBody>
-          <a:bodyPr wrap="square" lIns="0" tIns="0" rIns="0" bIns="0" rtlCol="0" anchor="ctr"/>
-          <a:lstStyle/>
-          <a:p>
-            <a:pPr algn="ctr" indent="0" marL="0">
-              <a:buNone/>
-            </a:pPr>
-            <a:r>
-              <a:rPr lang="ko-KR" altLang="en-US" sz="750" b="1" dirty="0">
-                <a:solidFill>
-                  <a:srgbClr val="0B1A33"/>
-                </a:solidFill>
-                <a:latin typeface="맑은 고딕" pitchFamily="34" charset="0"/>
-                <a:ea typeface="맑은 고딕" pitchFamily="34" charset="-122"/>
-                <a:cs typeface="맑은 고딕" pitchFamily="34" charset="-120"/>
-              </a:rPr>
-              <a:t>비밀번호 요구</a:t>
-            </a:r>
-            <a:endParaRPr lang="ko-KR" sz="750" dirty="0"/>
-          </a:p>
-        </p:txBody>
-      </p:sp>
-      <p:sp>
-        <p:nvSpPr>
-          <p:cNvPr id="107" name="Shape 96"/>
-          <p:cNvSpPr/>
-          <p:nvPr/>
-        </p:nvSpPr>
-        <p:spPr>
-          <a:xfrm>
-            <a:off x="6709623" y="5323637"/>
-            <a:ext cx="837225" cy="402336"/>
-          </a:xfrm>
-          <a:prstGeom prst="roundRect">
-            <a:avLst>
-              <a:gd name="adj" fmla="val 22727"/>
-            </a:avLst>
-          </a:prstGeom>
-          <a:solidFill>
-            <a:srgbClr val="FFFFFF"/>
-          </a:solidFill>
-          <a:ln w="15875">
-            <a:solidFill>
-              <a:srgbClr val="14284B"/>
-            </a:solidFill>
-            <a:prstDash val="solid"/>
-          </a:ln>
-        </p:spPr>
-      </p:sp>
-      <p:sp>
-        <p:nvSpPr>
-          <p:cNvPr id="108" name="Text 97"/>
-          <p:cNvSpPr txBox="1"/>
-          <p:nvPr/>
-        </p:nvSpPr>
-        <p:spPr>
-          <a:xfrm>
-            <a:off x="6709623" y="5323637"/>
-            <a:ext cx="837225" cy="402336"/>
-          </a:xfrm>
-          <a:prstGeom prst="rect">
-            <a:avLst/>
-          </a:prstGeom>
-          <a:noFill/>
-          <a:ln/>
-        </p:spPr>
-        <p:txBody>
-          <a:bodyPr wrap="square" lIns="0" tIns="0" rIns="0" bIns="0" rtlCol="0" anchor="ctr"/>
-          <a:lstStyle/>
-          <a:p>
-            <a:pPr algn="ctr" indent="0" marL="0">
-              <a:buNone/>
-            </a:pPr>
-            <a:r>
-              <a:rPr lang="ko-KR" altLang="en-US" sz="850" b="1" dirty="0">
-                <a:solidFill>
-                  <a:srgbClr val="14284B"/>
-                </a:solidFill>
-                <a:latin typeface="맑은 고딕" pitchFamily="34" charset="0"/>
-                <a:ea typeface="맑은 고딕" pitchFamily="34" charset="-122"/>
-                <a:cs typeface="맑은 고딕" pitchFamily="34" charset="-120"/>
-              </a:rPr>
-              <a:t>+ 추가 문서</a:t>
-            </a:r>
-            <a:endParaRPr lang="ko-KR" sz="850" dirty="0"/>
-          </a:p>
-        </p:txBody>
-      </p:sp>
-      <p:sp>
-        <p:nvSpPr>
-          <p:cNvPr id="109" name="Shape 98"/>
-          <p:cNvSpPr/>
-          <p:nvPr/>
-        </p:nvSpPr>
-        <p:spPr>
-          <a:xfrm>
-            <a:off x="7620000" y="5323637"/>
-            <a:ext cx="837225" cy="402336"/>
-          </a:xfrm>
-          <a:prstGeom prst="roundRect">
-            <a:avLst>
-              <a:gd name="adj" fmla="val 22727"/>
-            </a:avLst>
-          </a:prstGeom>
-          <a:solidFill>
-            <a:srgbClr val="14284B"/>
-          </a:solidFill>
-          <a:ln/>
-        </p:spPr>
-      </p:sp>
-      <p:sp>
-        <p:nvSpPr>
-          <p:cNvPr id="110" name="Text 99"/>
-          <p:cNvSpPr txBox="1"/>
-          <p:nvPr/>
-        </p:nvSpPr>
-        <p:spPr>
-          <a:xfrm>
-            <a:off x="7620000" y="5323637"/>
-            <a:ext cx="837225" cy="402336"/>
-          </a:xfrm>
-          <a:prstGeom prst="rect">
-            <a:avLst/>
-          </a:prstGeom>
-          <a:noFill/>
-          <a:ln/>
-        </p:spPr>
-        <p:txBody>
-          <a:bodyPr wrap="square" lIns="0" tIns="0" rIns="0" bIns="0" rtlCol="0" anchor="ctr"/>
-          <a:lstStyle/>
-          <a:p>
-            <a:pPr algn="ctr" indent="0" marL="0">
-              <a:buNone/>
-            </a:pPr>
-            <a:r>
-              <a:rPr lang="ko-KR" altLang="en-US" sz="850" b="1" dirty="0">
-                <a:solidFill>
-                  <a:srgbClr val="FFFFFF"/>
-                </a:solidFill>
-                <a:latin typeface="맑은 고딕" pitchFamily="34" charset="0"/>
-                <a:ea typeface="맑은 고딕" pitchFamily="34" charset="-122"/>
-                <a:cs typeface="맑은 고딕" pitchFamily="34" charset="-120"/>
-              </a:rPr>
-              <a:t>근거 선택</a:t>
-            </a:r>
-            <a:endParaRPr lang="ko-KR" sz="850" dirty="0"/>
-          </a:p>
-        </p:txBody>
-      </p:sp>
-      <p:sp>
-        <p:nvSpPr>
-          <p:cNvPr id="111" name="Shape 100"/>
-          <p:cNvSpPr/>
           <p:nvPr/>
         </p:nvSpPr>
         <p:spPr>
@@ -14716,28 +10519,6 @@
             <a:off x="9784080" y="1078992"/>
             <a:ext cx="1554480" cy="310896"/>
           </a:xfrm>
-          <a:prstGeom prst="roundRect">
-            <a:avLst>
-              <a:gd name="adj" fmla="val 50000"/>
-            </a:avLst>
-          </a:prstGeom>
-          <a:solidFill>
-            <a:srgbClr val="19B3B1"/>
-          </a:solidFill>
-          <a:ln/>
-        </p:spPr>
-      </p:sp>
-      <p:sp>
-        <p:nvSpPr>
-          <p:cNvPr id="112" name="Text 101"/>
-          <p:cNvSpPr txBox="1"/>
-          <p:nvPr/>
-        </p:nvSpPr>
-        <p:spPr>
-          <a:xfrm>
-            <a:off x="9784080" y="1078992"/>
-            <a:ext cx="1554480" cy="310896"/>
-          </a:xfrm>
           <a:prstGeom prst="rect">
             <a:avLst/>
           </a:prstGeom>
@@ -14768,7 +10549,7 @@
       </p:sp>
       <p:sp>
         <p:nvSpPr>
-          <p:cNvPr id="113" name="Text 102"/>
+          <p:cNvPr id="28" name="Text 23"/>
           <p:cNvSpPr txBox="1"/>
           <p:nvPr/>
         </p:nvSpPr>
@@ -14799,7 +10580,7 @@
                 <a:ea typeface="맑은 고딕" pitchFamily="34" charset="-122"/>
                 <a:cs typeface="맑은 고딕" pitchFamily="34" charset="-120"/>
               </a:rPr>
-              <a:t>하단 버튼 판정 → 결과·해설</a:t>
+              <a:t>판정 → 신고 → 결과·해설</a:t>
             </a:r>
             <a:endParaRPr lang="ko-KR" sz="1200" dirty="0"/>
           </a:p>
@@ -14807,7 +10588,7 @@
       </p:sp>
       <p:sp>
         <p:nvSpPr>
-          <p:cNvPr id="114" name="Shape 103"/>
+          <p:cNvPr id="29" name="Shape 24"/>
           <p:cNvSpPr/>
           <p:nvPr/>
         </p:nvSpPr>
@@ -14841,7 +10622,7 @@
       </p:sp>
       <p:sp>
         <p:nvSpPr>
-          <p:cNvPr id="115" name="Shape 104"/>
+          <p:cNvPr id="30" name="Shape 25"/>
           <p:cNvSpPr/>
           <p:nvPr/>
         </p:nvSpPr>
@@ -14861,785 +10642,30 @@
           <a:ln/>
         </p:spPr>
       </p:sp>
-      <p:sp>
-        <p:nvSpPr>
-          <p:cNvPr id="116" name="Text 105"/>
-          <p:cNvSpPr txBox="1"/>
-          <p:nvPr/>
-        </p:nvSpPr>
-        <p:spPr>
-          <a:xfrm>
-            <a:off x="9568647" y="5908853"/>
-            <a:ext cx="1985345" cy="91440"/>
-          </a:xfrm>
-          <a:prstGeom prst="rect">
-            <a:avLst/>
-          </a:prstGeom>
-          <a:noFill/>
-          <a:ln/>
-        </p:spPr>
-        <p:txBody>
-          <a:bodyPr wrap="square" lIns="0" tIns="0" rIns="0" bIns="0" rtlCol="0" anchor="t"/>
-          <a:lstStyle/>
-          <a:p>
-            <a:pPr algn="ctr" indent="0" marL="0">
-              <a:buNone/>
-            </a:pPr>
-            <a:r>
-              <a:rPr lang="ko-KR" altLang="en-US" sz="550" b="1" spc="300" kern="0" dirty="0">
-                <a:solidFill>
-                  <a:srgbClr val="6F86A6"/>
-                </a:solidFill>
-                <a:latin typeface="맑은 고딕" pitchFamily="34" charset="0"/>
-                <a:ea typeface="맑은 고딕" pitchFamily="34" charset="-122"/>
-                <a:cs typeface="맑은 고딕" pitchFamily="34" charset="-120"/>
-              </a:rPr>
-              <a:t>MOCKUP</a:t>
-            </a:r>
-            <a:endParaRPr lang="ko-KR" sz="550" dirty="0"/>
-          </a:p>
-        </p:txBody>
-      </p:sp>
-      <p:sp>
-        <p:nvSpPr>
-          <p:cNvPr id="117" name="Shape 106"/>
-          <p:cNvSpPr/>
-          <p:nvPr/>
-        </p:nvSpPr>
-        <p:spPr>
-          <a:xfrm>
-            <a:off x="9568647" y="1589227"/>
-            <a:ext cx="1985345" cy="4337914"/>
-          </a:xfrm>
-          <a:prstGeom prst="roundRect">
-            <a:avLst>
-              <a:gd name="adj" fmla="val 10870"/>
-            </a:avLst>
-          </a:prstGeom>
-          <a:solidFill>
-            <a:srgbClr val="C9D3E0"/>
-          </a:solidFill>
-          <a:ln/>
-        </p:spPr>
-      </p:sp>
-      <p:sp>
-        <p:nvSpPr>
-          <p:cNvPr id="118" name="Text 107"/>
-          <p:cNvSpPr txBox="1"/>
-          <p:nvPr/>
-        </p:nvSpPr>
-        <p:spPr>
-          <a:xfrm>
-            <a:off x="9714951" y="1634947"/>
-            <a:ext cx="457200" cy="164592"/>
-          </a:xfrm>
-          <a:prstGeom prst="rect">
-            <a:avLst/>
-          </a:prstGeom>
-          <a:noFill/>
-          <a:ln/>
-        </p:spPr>
-        <p:txBody>
-          <a:bodyPr wrap="square" lIns="0" tIns="0" rIns="0" bIns="0" rtlCol="0" anchor="t"/>
-          <a:lstStyle/>
-          <a:p>
-            <a:pPr indent="0" marL="0">
-              <a:buNone/>
-            </a:pPr>
-            <a:r>
-              <a:rPr lang="ko-KR" altLang="en-US" sz="750" b="1" dirty="0">
-                <a:solidFill>
-                  <a:srgbClr val="1C2433"/>
-                </a:solidFill>
-                <a:latin typeface="맑은 고딕" pitchFamily="34" charset="0"/>
-                <a:ea typeface="맑은 고딕" pitchFamily="34" charset="-122"/>
-                <a:cs typeface="맑은 고딕" pitchFamily="34" charset="-120"/>
-              </a:rPr>
-              <a:t>9:41</a:t>
-            </a:r>
-            <a:endParaRPr lang="ko-KR" sz="750" dirty="0"/>
-          </a:p>
-        </p:txBody>
-      </p:sp>
-      <p:sp>
-        <p:nvSpPr>
-          <p:cNvPr id="119" name="Shape 108"/>
-          <p:cNvSpPr/>
-          <p:nvPr/>
-        </p:nvSpPr>
-        <p:spPr>
-          <a:xfrm>
-            <a:off x="10305288" y="1644091"/>
-            <a:ext cx="512064" cy="137160"/>
-          </a:xfrm>
-          <a:prstGeom prst="roundRect">
-            <a:avLst>
-              <a:gd name="adj" fmla="val 50000"/>
-            </a:avLst>
-          </a:prstGeom>
-          <a:solidFill>
-            <a:srgbClr val="040B17"/>
-          </a:solidFill>
-          <a:ln/>
-        </p:spPr>
-      </p:sp>
-      <p:sp>
-        <p:nvSpPr>
-          <p:cNvPr id="120" name="Shape 109"/>
-          <p:cNvSpPr/>
-          <p:nvPr/>
-        </p:nvSpPr>
-        <p:spPr>
-          <a:xfrm>
-            <a:off x="11169945" y="1666951"/>
-            <a:ext cx="219456" cy="100584"/>
-          </a:xfrm>
-          <a:prstGeom prst="roundRect">
-            <a:avLst>
-              <a:gd name="adj" fmla="val 27273"/>
-            </a:avLst>
-          </a:prstGeom>
-          <a:solidFill>
-            <a:srgbClr val="1C2433">
-              <a:alpha val="90000"/>
-            </a:srgbClr>
-          </a:solidFill>
-          <a:ln/>
-        </p:spPr>
-      </p:sp>
-      <p:sp>
-        <p:nvSpPr>
-          <p:cNvPr id="121" name="Text 110"/>
-          <p:cNvSpPr txBox="1"/>
-          <p:nvPr/>
-        </p:nvSpPr>
-        <p:spPr>
-          <a:xfrm>
-            <a:off x="9687519" y="1881835"/>
-            <a:ext cx="1747601" cy="219456"/>
-          </a:xfrm>
-          <a:prstGeom prst="rect">
-            <a:avLst/>
-          </a:prstGeom>
-          <a:noFill/>
-          <a:ln/>
-        </p:spPr>
-        <p:txBody>
-          <a:bodyPr wrap="square" lIns="0" tIns="0" rIns="0" bIns="0" rtlCol="0" anchor="ctr"/>
-          <a:lstStyle/>
-          <a:p>
-            <a:pPr indent="0" marL="0">
-              <a:buNone/>
-            </a:pPr>
-            <a:r>
-              <a:rPr lang="ko-KR" altLang="en-US" sz="850" b="1" dirty="0">
-                <a:solidFill>
-                  <a:srgbClr val="1C2433"/>
-                </a:solidFill>
-                <a:latin typeface="맑은 고딕" pitchFamily="34" charset="0"/>
-                <a:ea typeface="맑은 고딕" pitchFamily="34" charset="-122"/>
-                <a:cs typeface="맑은 고딕" pitchFamily="34" charset="-120"/>
-              </a:rPr>
-              <a:t>사건 2/6</a:t>
-            </a:r>
-            <a:endParaRPr lang="ko-KR" sz="850" dirty="0"/>
-          </a:p>
-        </p:txBody>
-      </p:sp>
-      <p:sp>
-        <p:nvSpPr>
-          <p:cNvPr id="122" name="Shape 111"/>
-          <p:cNvSpPr/>
-          <p:nvPr/>
-        </p:nvSpPr>
-        <p:spPr>
-          <a:xfrm>
-            <a:off x="9623511" y="2229307"/>
-            <a:ext cx="1875617" cy="2697480"/>
-          </a:xfrm>
-          <a:prstGeom prst="roundRect">
-            <a:avLst>
-              <a:gd name="adj" fmla="val 7800"/>
-            </a:avLst>
-          </a:prstGeom>
-          <a:solidFill>
-            <a:srgbClr val="FFFFFF"/>
-          </a:solidFill>
-          <a:ln/>
-          <a:effectLst>
-            <a:outerShdw sx="100000" sy="100000" kx="0" ky="0" algn="bl" rotWithShape="0" blurRad="127000" dist="38100" dir="5400000">
-              <a:srgbClr val="000000">
-                <a:alpha val="35000"/>
-              </a:srgbClr>
-            </a:outerShdw>
-          </a:effectLst>
-        </p:spPr>
-      </p:sp>
       <p:pic>
         <p:nvPicPr>
-          <p:cNvPr id="123" name="Image 9" descr="preencoded.png">    </p:cNvPr>
+          <p:cNvPr id="31" name="Image 3" descr="HTML 시제품 화면: 최종 판정">    </p:cNvPr>
           <p:cNvPicPr>
             <a:picLocks noChangeAspect="1"/>
           </p:cNvPicPr>
           <p:nvPr/>
         </p:nvPicPr>
         <p:blipFill>
-          <a:blip r:embed="rId10"/>
+          <a:blip r:embed="rId4"/>
           <a:stretch>
             <a:fillRect/>
           </a:stretch>
         </p:blipFill>
         <p:spPr>
           <a:xfrm>
-            <a:off x="10287000" y="2375611"/>
-            <a:ext cx="548640" cy="548640"/>
+            <a:off x="9627436" y="1680667"/>
+            <a:ext cx="1867768" cy="4155034"/>
           </a:xfrm>
           <a:prstGeom prst="rect">
             <a:avLst/>
           </a:prstGeom>
         </p:spPr>
       </p:pic>
-      <p:sp>
-        <p:nvSpPr>
-          <p:cNvPr id="124" name="Text 112"/>
-          <p:cNvSpPr txBox="1"/>
-          <p:nvPr/>
-        </p:nvSpPr>
-        <p:spPr>
-          <a:xfrm>
-            <a:off x="9568647" y="3006547"/>
-            <a:ext cx="1985345" cy="274320"/>
-          </a:xfrm>
-          <a:prstGeom prst="rect">
-            <a:avLst/>
-          </a:prstGeom>
-          <a:noFill/>
-          <a:ln/>
-        </p:spPr>
-        <p:txBody>
-          <a:bodyPr wrap="square" lIns="0" tIns="0" rIns="0" bIns="0" rtlCol="0" anchor="t"/>
-          <a:lstStyle/>
-          <a:p>
-            <a:pPr algn="ctr" indent="0" marL="0">
-              <a:buNone/>
-            </a:pPr>
-            <a:r>
-              <a:rPr lang="ko-KR" altLang="en-US" sz="1200" b="1" dirty="0">
-                <a:solidFill>
-                  <a:srgbClr val="1C2433"/>
-                </a:solidFill>
-                <a:latin typeface="맑은 고딕" pitchFamily="34" charset="0"/>
-                <a:ea typeface="맑은 고딕" pitchFamily="34" charset="-122"/>
-                <a:cs typeface="맑은 고딕" pitchFamily="34" charset="-120"/>
-              </a:rPr>
-              <a:t>정확한 판단이에요!</a:t>
-            </a:r>
-            <a:endParaRPr lang="ko-KR" sz="1200" dirty="0"/>
-          </a:p>
-        </p:txBody>
-      </p:sp>
-      <p:sp>
-        <p:nvSpPr>
-          <p:cNvPr id="125" name="Text 113"/>
-          <p:cNvSpPr txBox="1"/>
-          <p:nvPr/>
-        </p:nvSpPr>
-        <p:spPr>
-          <a:xfrm>
-            <a:off x="9568647" y="3290011"/>
-            <a:ext cx="1985345" cy="237744"/>
-          </a:xfrm>
-          <a:prstGeom prst="rect">
-            <a:avLst/>
-          </a:prstGeom>
-          <a:noFill/>
-          <a:ln/>
-        </p:spPr>
-        <p:txBody>
-          <a:bodyPr wrap="square" lIns="0" tIns="0" rIns="0" bIns="0" rtlCol="0" anchor="t"/>
-          <a:lstStyle/>
-          <a:p>
-            <a:pPr algn="ctr" indent="0" marL="0">
-              <a:buNone/>
-            </a:pPr>
-            <a:r>
-              <a:rPr lang="ko-KR" altLang="en-US" sz="1100" b="1" dirty="0">
-                <a:solidFill>
-                  <a:srgbClr val="0E7C7B"/>
-                </a:solidFill>
-                <a:latin typeface="맑은 고딕" pitchFamily="34" charset="0"/>
-                <a:ea typeface="맑은 고딕" pitchFamily="34" charset="-122"/>
-                <a:cs typeface="맑은 고딕" pitchFamily="34" charset="-120"/>
-              </a:rPr>
-              <a:t>+170점</a:t>
-            </a:r>
-            <a:endParaRPr lang="ko-KR" sz="1100" dirty="0"/>
-          </a:p>
-        </p:txBody>
-      </p:sp>
-      <p:sp>
-        <p:nvSpPr>
-          <p:cNvPr id="126" name="Text 114"/>
-          <p:cNvSpPr txBox="1"/>
-          <p:nvPr/>
-        </p:nvSpPr>
-        <p:spPr>
-          <a:xfrm>
-            <a:off x="9742383" y="3573475"/>
-            <a:ext cx="1637873" cy="566928"/>
-          </a:xfrm>
-          <a:prstGeom prst="rect">
-            <a:avLst/>
-          </a:prstGeom>
-          <a:noFill/>
-          <a:ln/>
-        </p:spPr>
-        <p:txBody>
-          <a:bodyPr wrap="square" lIns="0" tIns="0" rIns="0" bIns="0" rtlCol="0" anchor="t"/>
-          <a:lstStyle/>
-          <a:p>
-            <a:pPr algn="ctr" indent="0" marL="0">
-              <a:buNone/>
-            </a:pPr>
-            <a:r>
-              <a:rPr lang="ko-KR" altLang="en-US" sz="800" dirty="0">
-                <a:solidFill>
-                  <a:srgbClr val="1C2433"/>
-                </a:solidFill>
-                <a:latin typeface="맑은 고딕" pitchFamily="34" charset="0"/>
-                <a:ea typeface="맑은 고딕" pitchFamily="34" charset="-122"/>
-                <a:cs typeface="맑은 고딕" pitchFamily="34" charset="-120"/>
-              </a:rPr>
-              <a:t>공식 주소는 baeumteo.example이에요. 비밀번호를 묻는 메시지는 거부하고 신고해요.</a:t>
-            </a:r>
-            <a:endParaRPr lang="ko-KR" sz="800" dirty="0"/>
-          </a:p>
-        </p:txBody>
-      </p:sp>
-      <p:sp>
-        <p:nvSpPr>
-          <p:cNvPr id="127" name="Shape 115"/>
-          <p:cNvSpPr/>
-          <p:nvPr/>
-        </p:nvSpPr>
-        <p:spPr>
-          <a:xfrm>
-            <a:off x="9921240" y="4195267"/>
-            <a:ext cx="1280160" cy="237744"/>
-          </a:xfrm>
-          <a:prstGeom prst="roundRect">
-            <a:avLst>
-              <a:gd name="adj" fmla="val 50000"/>
-            </a:avLst>
-          </a:prstGeom>
-          <a:solidFill>
-            <a:srgbClr val="D7F0EF"/>
-          </a:solidFill>
-          <a:ln/>
-        </p:spPr>
-      </p:sp>
-      <p:sp>
-        <p:nvSpPr>
-          <p:cNvPr id="128" name="Text 116"/>
-          <p:cNvSpPr txBox="1"/>
-          <p:nvPr/>
-        </p:nvSpPr>
-        <p:spPr>
-          <a:xfrm>
-            <a:off x="9921240" y="4195267"/>
-            <a:ext cx="1280160" cy="237744"/>
-          </a:xfrm>
-          <a:prstGeom prst="rect">
-            <a:avLst/>
-          </a:prstGeom>
-          <a:noFill/>
-          <a:ln/>
-        </p:spPr>
-        <p:txBody>
-          <a:bodyPr wrap="square" lIns="0" tIns="0" rIns="0" bIns="0" rtlCol="0" anchor="ctr"/>
-          <a:lstStyle/>
-          <a:p>
-            <a:pPr algn="ctr" indent="0" marL="0">
-              <a:buNone/>
-            </a:pPr>
-            <a:r>
-              <a:rPr lang="ko-KR" altLang="en-US" sz="800" b="1" dirty="0">
-                <a:solidFill>
-                  <a:srgbClr val="0E7C7B"/>
-                </a:solidFill>
-                <a:latin typeface="맑은 고딕" pitchFamily="34" charset="0"/>
-                <a:ea typeface="맑은 고딕" pitchFamily="34" charset="-122"/>
-                <a:cs typeface="맑은 고딕" pitchFamily="34" charset="-120"/>
-              </a:rPr>
-              <a:t>사칭 단서 2/2 발견</a:t>
-            </a:r>
-            <a:endParaRPr lang="ko-KR" sz="800" dirty="0"/>
-          </a:p>
-        </p:txBody>
-      </p:sp>
-      <p:sp>
-        <p:nvSpPr>
-          <p:cNvPr id="129" name="Shape 117"/>
-          <p:cNvSpPr/>
-          <p:nvPr/>
-        </p:nvSpPr>
-        <p:spPr>
-          <a:xfrm>
-            <a:off x="9916119" y="4515307"/>
-            <a:ext cx="1290401" cy="301752"/>
-          </a:xfrm>
-          <a:prstGeom prst="roundRect">
-            <a:avLst>
-              <a:gd name="adj" fmla="val 30303"/>
-            </a:avLst>
-          </a:prstGeom>
-          <a:solidFill>
-            <a:srgbClr val="14284B"/>
-          </a:solidFill>
-          <a:ln/>
-        </p:spPr>
-      </p:sp>
-      <p:sp>
-        <p:nvSpPr>
-          <p:cNvPr id="130" name="Text 118"/>
-          <p:cNvSpPr txBox="1"/>
-          <p:nvPr/>
-        </p:nvSpPr>
-        <p:spPr>
-          <a:xfrm>
-            <a:off x="9916119" y="4515307"/>
-            <a:ext cx="1290401" cy="301752"/>
-          </a:xfrm>
-          <a:prstGeom prst="rect">
-            <a:avLst/>
-          </a:prstGeom>
-          <a:noFill/>
-          <a:ln/>
-        </p:spPr>
-        <p:txBody>
-          <a:bodyPr wrap="square" lIns="0" tIns="0" rIns="0" bIns="0" rtlCol="0" anchor="ctr"/>
-          <a:lstStyle/>
-          <a:p>
-            <a:pPr algn="ctr" indent="0" marL="0">
-              <a:buNone/>
-            </a:pPr>
-            <a:r>
-              <a:rPr lang="ko-KR" altLang="en-US" sz="900" b="1" dirty="0">
-                <a:solidFill>
-                  <a:srgbClr val="FFFFFF"/>
-                </a:solidFill>
-                <a:latin typeface="맑은 고딕" pitchFamily="34" charset="0"/>
-                <a:ea typeface="맑은 고딕" pitchFamily="34" charset="-122"/>
-                <a:cs typeface="맑은 고딕" pitchFamily="34" charset="-120"/>
-              </a:rPr>
-              <a:t>다음 사건 ▶</a:t>
-            </a:r>
-            <a:endParaRPr lang="ko-KR" sz="900" dirty="0"/>
-          </a:p>
-        </p:txBody>
-      </p:sp>
-      <p:sp>
-        <p:nvSpPr>
-          <p:cNvPr id="131" name="Shape 119"/>
-          <p:cNvSpPr/>
-          <p:nvPr/>
-        </p:nvSpPr>
-        <p:spPr>
-          <a:xfrm>
-            <a:off x="9568647" y="4903013"/>
-            <a:ext cx="1985345" cy="1024128"/>
-          </a:xfrm>
-          <a:prstGeom prst="rect">
-            <a:avLst/>
-          </a:prstGeom>
-          <a:solidFill>
-            <a:srgbClr val="0B1A33"/>
-          </a:solidFill>
-          <a:ln/>
-        </p:spPr>
-      </p:sp>
-      <p:sp>
-        <p:nvSpPr>
-          <p:cNvPr id="132" name="Shape 120"/>
-          <p:cNvSpPr/>
-          <p:nvPr/>
-        </p:nvSpPr>
-        <p:spPr>
-          <a:xfrm>
-            <a:off x="9687519" y="5031029"/>
-            <a:ext cx="545958" cy="658368"/>
-          </a:xfrm>
-          <a:prstGeom prst="roundRect">
-            <a:avLst>
-              <a:gd name="adj" fmla="val 20098"/>
-            </a:avLst>
-          </a:prstGeom>
-          <a:solidFill>
-            <a:srgbClr val="19B3B1"/>
-          </a:solidFill>
-          <a:ln/>
-        </p:spPr>
-      </p:sp>
-      <p:pic>
-        <p:nvPicPr>
-          <p:cNvPr id="133" name="Image 10" descr="preencoded.png">    </p:cNvPr>
-          <p:cNvPicPr>
-            <a:picLocks noChangeAspect="1"/>
-          </p:cNvPicPr>
-          <p:nvPr/>
-        </p:nvPicPr>
-        <p:blipFill>
-          <a:blip r:embed="rId11"/>
-          <a:stretch>
-            <a:fillRect/>
-          </a:stretch>
-        </p:blipFill>
-        <p:spPr>
-          <a:xfrm>
-            <a:off x="9850770" y="5104181"/>
-            <a:ext cx="219456" cy="219456"/>
-          </a:xfrm>
-          <a:prstGeom prst="rect">
-            <a:avLst/>
-          </a:prstGeom>
-        </p:spPr>
-      </p:pic>
-      <p:sp>
-        <p:nvSpPr>
-          <p:cNvPr id="134" name="Text 121"/>
-          <p:cNvSpPr txBox="1"/>
-          <p:nvPr/>
-        </p:nvSpPr>
-        <p:spPr>
-          <a:xfrm>
-            <a:off x="9687519" y="5378501"/>
-            <a:ext cx="545958" cy="256032"/>
-          </a:xfrm>
-          <a:prstGeom prst="rect">
-            <a:avLst/>
-          </a:prstGeom>
-          <a:noFill/>
-          <a:ln/>
-        </p:spPr>
-        <p:txBody>
-          <a:bodyPr wrap="square" lIns="0" tIns="0" rIns="0" bIns="0" rtlCol="0" anchor="ctr"/>
-          <a:lstStyle/>
-          <a:p>
-            <a:pPr algn="ctr" indent="0" marL="0">
-              <a:buNone/>
-            </a:pPr>
-            <a:r>
-              <a:rPr lang="ko-KR" altLang="en-US" sz="850" b="1" dirty="0">
-                <a:solidFill>
-                  <a:srgbClr val="0B1A33"/>
-                </a:solidFill>
-                <a:latin typeface="맑은 고딕" pitchFamily="34" charset="0"/>
-                <a:ea typeface="맑은 고딕" pitchFamily="34" charset="-122"/>
-                <a:cs typeface="맑은 고딕" pitchFamily="34" charset="-120"/>
-              </a:rPr>
-              <a:t>승인</a:t>
-            </a:r>
-            <a:endParaRPr lang="ko-KR" sz="850" dirty="0"/>
-          </a:p>
-        </p:txBody>
-      </p:sp>
-      <p:sp>
-        <p:nvSpPr>
-          <p:cNvPr id="135" name="Shape 122"/>
-          <p:cNvSpPr/>
-          <p:nvPr/>
-        </p:nvSpPr>
-        <p:spPr>
-          <a:xfrm>
-            <a:off x="10251765" y="4994453"/>
-            <a:ext cx="619110" cy="731520"/>
-          </a:xfrm>
-          <a:prstGeom prst="roundRect">
-            <a:avLst>
-              <a:gd name="adj" fmla="val 17724"/>
-            </a:avLst>
-          </a:prstGeom>
-          <a:solidFill>
-            <a:srgbClr val="0B1A33"/>
-          </a:solidFill>
-          <a:ln w="25400">
-            <a:solidFill>
-              <a:srgbClr val="FFFFFF"/>
-            </a:solidFill>
-            <a:prstDash val="solid"/>
-          </a:ln>
-        </p:spPr>
-      </p:sp>
-      <p:sp>
-        <p:nvSpPr>
-          <p:cNvPr id="136" name="Shape 123"/>
-          <p:cNvSpPr/>
-          <p:nvPr/>
-        </p:nvSpPr>
-        <p:spPr>
-          <a:xfrm>
-            <a:off x="10288341" y="5031029"/>
-            <a:ext cx="545958" cy="658368"/>
-          </a:xfrm>
-          <a:prstGeom prst="roundRect">
-            <a:avLst>
-              <a:gd name="adj" fmla="val 20098"/>
-            </a:avLst>
-          </a:prstGeom>
-          <a:solidFill>
-            <a:srgbClr val="FF6B5E"/>
-          </a:solidFill>
-          <a:ln/>
-        </p:spPr>
-      </p:sp>
-      <p:pic>
-        <p:nvPicPr>
-          <p:cNvPr id="137" name="Image 11" descr="preencoded.png">    </p:cNvPr>
-          <p:cNvPicPr>
-            <a:picLocks noChangeAspect="1"/>
-          </p:cNvPicPr>
-          <p:nvPr/>
-        </p:nvPicPr>
-        <p:blipFill>
-          <a:blip r:embed="rId12"/>
-          <a:stretch>
-            <a:fillRect/>
-          </a:stretch>
-        </p:blipFill>
-        <p:spPr>
-          <a:xfrm>
-            <a:off x="10451592" y="5104181"/>
-            <a:ext cx="219456" cy="219456"/>
-          </a:xfrm>
-          <a:prstGeom prst="rect">
-            <a:avLst/>
-          </a:prstGeom>
-        </p:spPr>
-      </p:pic>
-      <p:sp>
-        <p:nvSpPr>
-          <p:cNvPr id="138" name="Text 124"/>
-          <p:cNvSpPr txBox="1"/>
-          <p:nvPr/>
-        </p:nvSpPr>
-        <p:spPr>
-          <a:xfrm>
-            <a:off x="10288341" y="5378501"/>
-            <a:ext cx="545958" cy="256032"/>
-          </a:xfrm>
-          <a:prstGeom prst="rect">
-            <a:avLst/>
-          </a:prstGeom>
-          <a:noFill/>
-          <a:ln/>
-        </p:spPr>
-        <p:txBody>
-          <a:bodyPr wrap="square" lIns="0" tIns="0" rIns="0" bIns="0" rtlCol="0" anchor="ctr"/>
-          <a:lstStyle/>
-          <a:p>
-            <a:pPr algn="ctr" indent="0" marL="0">
-              <a:buNone/>
-            </a:pPr>
-            <a:r>
-              <a:rPr lang="ko-KR" altLang="en-US" sz="850" b="1" dirty="0">
-                <a:solidFill>
-                  <a:srgbClr val="0B1A33"/>
-                </a:solidFill>
-                <a:latin typeface="맑은 고딕" pitchFamily="34" charset="0"/>
-                <a:ea typeface="맑은 고딕" pitchFamily="34" charset="-122"/>
-                <a:cs typeface="맑은 고딕" pitchFamily="34" charset="-120"/>
-              </a:rPr>
-              <a:t>거부</a:t>
-            </a:r>
-            <a:endParaRPr lang="ko-KR" sz="850" dirty="0"/>
-          </a:p>
-        </p:txBody>
-      </p:sp>
-      <p:sp>
-        <p:nvSpPr>
-          <p:cNvPr id="139" name="Shape 125"/>
-          <p:cNvSpPr/>
-          <p:nvPr/>
-        </p:nvSpPr>
-        <p:spPr>
-          <a:xfrm>
-            <a:off x="10889163" y="5031029"/>
-            <a:ext cx="545958" cy="658368"/>
-          </a:xfrm>
-          <a:prstGeom prst="roundRect">
-            <a:avLst>
-              <a:gd name="adj" fmla="val 20098"/>
-            </a:avLst>
-          </a:prstGeom>
-          <a:solidFill>
-            <a:srgbClr val="F2B33D"/>
-          </a:solidFill>
-          <a:ln/>
-        </p:spPr>
-      </p:sp>
-      <p:pic>
-        <p:nvPicPr>
-          <p:cNvPr id="140" name="Image 12" descr="preencoded.png">    </p:cNvPr>
-          <p:cNvPicPr>
-            <a:picLocks noChangeAspect="1"/>
-          </p:cNvPicPr>
-          <p:nvPr/>
-        </p:nvPicPr>
-        <p:blipFill>
-          <a:blip r:embed="rId13"/>
-          <a:stretch>
-            <a:fillRect/>
-          </a:stretch>
-        </p:blipFill>
-        <p:spPr>
-          <a:xfrm>
-            <a:off x="11052414" y="5104181"/>
-            <a:ext cx="219456" cy="219456"/>
-          </a:xfrm>
-          <a:prstGeom prst="rect">
-            <a:avLst/>
-          </a:prstGeom>
-        </p:spPr>
-      </p:pic>
-      <p:sp>
-        <p:nvSpPr>
-          <p:cNvPr id="141" name="Text 126"/>
-          <p:cNvSpPr txBox="1"/>
-          <p:nvPr/>
-        </p:nvSpPr>
-        <p:spPr>
-          <a:xfrm>
-            <a:off x="10889163" y="5378501"/>
-            <a:ext cx="545958" cy="256032"/>
-          </a:xfrm>
-          <a:prstGeom prst="rect">
-            <a:avLst/>
-          </a:prstGeom>
-          <a:noFill/>
-          <a:ln/>
-        </p:spPr>
-        <p:txBody>
-          <a:bodyPr wrap="square" lIns="0" tIns="0" rIns="0" bIns="0" rtlCol="0" anchor="ctr"/>
-          <a:lstStyle/>
-          <a:p>
-            <a:pPr algn="ctr" indent="0" marL="0">
-              <a:buNone/>
-            </a:pPr>
-            <a:r>
-              <a:rPr lang="ko-KR" altLang="en-US" sz="850" b="1" dirty="0">
-                <a:solidFill>
-                  <a:srgbClr val="0B1A33"/>
-                </a:solidFill>
-                <a:latin typeface="맑은 고딕" pitchFamily="34" charset="0"/>
-                <a:ea typeface="맑은 고딕" pitchFamily="34" charset="-122"/>
-                <a:cs typeface="맑은 고딕" pitchFamily="34" charset="-120"/>
-              </a:rPr>
-              <a:t>추가 확인</a:t>
-            </a:r>
-            <a:endParaRPr lang="ko-KR" sz="850" dirty="0"/>
-          </a:p>
-        </p:txBody>
-      </p:sp>
       <p:sp>
         <p:nvSpPr>
           <p:cNvPr id="25" name="Slide Number Placeholder 0"/>
@@ -16426,7 +11452,7 @@
                 <a:ea typeface="맑은 고딕" pitchFamily="34" charset="-122"/>
                 <a:cs typeface="맑은 고딕" pitchFamily="34" charset="-120"/>
               </a:rPr>
-              <a:t>‘계정 정지’ 가짜 공지 메일</a:t>
+              <a:t>가짜 택배 문자·이중 확장자</a:t>
             </a:r>
             <a:endParaRPr lang="ko-KR" sz="1300" dirty="0"/>
           </a:p>
@@ -16504,7 +11530,7 @@
                 <a:ea typeface="맑은 고딕" pitchFamily="34" charset="-122"/>
                 <a:cs typeface="맑은 고딕" pitchFamily="34" charset="-120"/>
               </a:rPr>
-              <a:t>기기 기록 조회</a:t>
+              <a:t>내 기록 · 파일 정보 · 자료 조회</a:t>
             </a:r>
             <a:endParaRPr lang="ko-KR" sz="1200" dirty="0"/>
           </a:p>
@@ -16792,7 +11818,7 @@
                 <a:ea typeface="맑은 고딕" pitchFamily="34" charset="-122"/>
                 <a:cs typeface="맑은 고딕" pitchFamily="34" charset="-120"/>
               </a:rPr>
-              <a:t>개인정보 담긴 공개 링크</a:t>
+              <a:t>손녀를 사칭한 새 번호</a:t>
             </a:r>
             <a:endParaRPr lang="ko-KR" sz="1300" dirty="0"/>
           </a:p>
@@ -17236,7 +12262,7 @@
                 <a:ea typeface="맑은 고딕" pitchFamily="34" charset="-122"/>
                 <a:cs typeface="맑은 고딕" pitchFamily="34" charset="-120"/>
               </a:rPr>
-              <a:t>공식 연락처 확인 · 2단계 판정</a:t>
+              <a:t>확인 결과 카드 · 2단계 판정</a:t>
             </a:r>
             <a:endParaRPr lang="ko-KR" sz="1200" dirty="0"/>
           </a:p>
@@ -18276,7 +13302,7 @@
                 <a:ea typeface="맑은 고딕" pitchFamily="34" charset="-122"/>
                 <a:cs typeface="맑은 고딕" pitchFamily="34" charset="-120"/>
               </a:rPr>
-              <a:t>help@nuri-support</a:t>
+              <a:t>help@nuri-help</a:t>
             </a:r>
             <a:endParaRPr lang="ko-KR" sz="650" dirty="0"/>
           </a:p>
@@ -18679,7 +13705,7 @@
       </p:sp>
       <p:pic>
         <p:nvPicPr>
-          <p:cNvPr id="28" name="Image 0" descr="assets/pixel_screen.png">    </p:cNvPr>
+          <p:cNvPr id="28" name="Image 0" descr="도트 테마 HTML 시제품의 검토 데스크 화면">    </p:cNvPr>
           <p:cNvPicPr>
             <a:picLocks noChangeAspect="1"/>
           </p:cNvPicPr>
@@ -18693,8 +13719,8 @@
         </p:blipFill>
         <p:spPr>
           <a:xfrm>
-            <a:off x="10062972" y="1271016"/>
-            <a:ext cx="1514246" cy="3355848"/>
+            <a:off x="10098719" y="1344168"/>
+            <a:ext cx="1442752" cy="3209544"/>
           </a:xfrm>
           <a:prstGeom prst="rect">
             <a:avLst/>
@@ -18709,34 +13735,34 @@
         </p:nvSpPr>
         <p:spPr>
           <a:xfrm>
-            <a:off x="10441534" y="2364638"/>
-            <a:ext cx="1072591" cy="252374"/>
-          </a:xfrm>
-          <a:prstGeom prst="rect">
-            <a:avLst/>
-          </a:prstGeom>
-          <a:noFill/>
-          <a:ln/>
-        </p:spPr>
-        <p:txBody>
-          <a:bodyPr wrap="square" lIns="0" tIns="0" rIns="0" bIns="0" rtlCol="0" anchor="ctr"/>
-          <a:lstStyle/>
-          <a:p>
-            <a:pPr algn="ctr" indent="0" marL="0">
-              <a:buNone/>
-            </a:pPr>
-            <a:r>
-              <a:rPr lang="ko-KR" altLang="en-US" sz="700" b="1" dirty="0">
-                <a:solidFill>
-                  <a:srgbClr val="22201F"/>
-                </a:solidFill>
-                <a:latin typeface="맑은 고딕" pitchFamily="34" charset="0"/>
-                <a:ea typeface="맑은 고딕" pitchFamily="34" charset="-122"/>
-                <a:cs typeface="맑은 고딕" pitchFamily="34" charset="-120"/>
-              </a:rPr>
-              <a:t>새 사건 도착!</a:t>
-            </a:r>
-            <a:endParaRPr lang="ko-KR" sz="700" dirty="0"/>
+            <a:off x="2377440" y="1234440"/>
+            <a:ext cx="914400" cy="274320"/>
+          </a:xfrm>
+          <a:prstGeom prst="rect">
+            <a:avLst/>
+          </a:prstGeom>
+          <a:noFill/>
+          <a:ln/>
+        </p:spPr>
+        <p:txBody>
+          <a:bodyPr wrap="square" lIns="0" tIns="0" rIns="0" bIns="0" rtlCol="0" anchor="t"/>
+          <a:lstStyle/>
+          <a:p>
+            <a:pPr indent="0" marL="0">
+              <a:buNone/>
+            </a:pPr>
+            <a:r>
+              <a:rPr lang="ko-KR" altLang="en-US" sz="1300" b="1" dirty="0">
+                <a:solidFill>
+                  <a:srgbClr val="19B3B1"/>
+                </a:solidFill>
+                <a:latin typeface="맑은 고딕" pitchFamily="34" charset="0"/>
+                <a:ea typeface="맑은 고딕" pitchFamily="34" charset="-122"/>
+                <a:cs typeface="맑은 고딕" pitchFamily="34" charset="-120"/>
+              </a:rPr>
+              <a:t>A안</a:t>
+            </a:r>
+            <a:endParaRPr lang="ko-KR" sz="1300" dirty="0"/>
           </a:p>
         </p:txBody>
       </p:sp>
@@ -18748,279 +13774,6 @@
         </p:nvSpPr>
         <p:spPr>
           <a:xfrm>
-            <a:off x="10189159" y="2732684"/>
-            <a:ext cx="841248" cy="147218"/>
-          </a:xfrm>
-          <a:prstGeom prst="rect">
-            <a:avLst/>
-          </a:prstGeom>
-          <a:noFill/>
-          <a:ln/>
-        </p:spPr>
-        <p:txBody>
-          <a:bodyPr wrap="square" lIns="0" tIns="0" rIns="0" bIns="0" rtlCol="0" anchor="ctr"/>
-          <a:lstStyle/>
-          <a:p>
-            <a:pPr indent="0" marL="0">
-              <a:buNone/>
-            </a:pPr>
-            <a:r>
-              <a:rPr lang="ko-KR" altLang="en-US" sz="650" b="1" dirty="0">
-                <a:solidFill>
-                  <a:srgbClr val="F2EBD9"/>
-                </a:solidFill>
-                <a:latin typeface="맑은 고딕" pitchFamily="34" charset="0"/>
-                <a:ea typeface="맑은 고딕" pitchFamily="34" charset="-122"/>
-                <a:cs typeface="맑은 고딕" pitchFamily="34" charset="-120"/>
-              </a:rPr>
-              <a:t>받은 메시지</a:t>
-            </a:r>
-            <a:endParaRPr lang="ko-KR" sz="650" dirty="0"/>
-          </a:p>
-        </p:txBody>
-      </p:sp>
-      <p:sp>
-        <p:nvSpPr>
-          <p:cNvPr id="31" name="Text 28"/>
-          <p:cNvSpPr txBox="1"/>
-          <p:nvPr/>
-        </p:nvSpPr>
-        <p:spPr>
-          <a:xfrm>
-            <a:off x="10210190" y="3058668"/>
-            <a:ext cx="1219810" cy="189281"/>
-          </a:xfrm>
-          <a:prstGeom prst="rect">
-            <a:avLst/>
-          </a:prstGeom>
-          <a:noFill/>
-          <a:ln/>
-        </p:spPr>
-        <p:txBody>
-          <a:bodyPr wrap="square" lIns="0" tIns="0" rIns="0" bIns="0" rtlCol="0" anchor="ctr"/>
-          <a:lstStyle/>
-          <a:p>
-            <a:pPr indent="0" marL="0">
-              <a:buNone/>
-            </a:pPr>
-            <a:r>
-              <a:rPr lang="ko-KR" altLang="en-US" sz="650" b="1" dirty="0">
-                <a:solidFill>
-                  <a:srgbClr val="22201F"/>
-                </a:solidFill>
-                <a:latin typeface="맑은 고딕" pitchFamily="34" charset="0"/>
-                <a:ea typeface="맑은 고딕" pitchFamily="34" charset="-122"/>
-                <a:cs typeface="맑은 고딕" pitchFamily="34" charset="-120"/>
-              </a:rPr>
-              <a:t>nuri-support ! 불일치</a:t>
-            </a:r>
-            <a:endParaRPr lang="ko-KR" sz="650" dirty="0"/>
-          </a:p>
-        </p:txBody>
-      </p:sp>
-      <p:sp>
-        <p:nvSpPr>
-          <p:cNvPr id="32" name="Text 29"/>
-          <p:cNvSpPr txBox="1"/>
-          <p:nvPr/>
-        </p:nvSpPr>
-        <p:spPr>
-          <a:xfrm>
-            <a:off x="10105034" y="3878885"/>
-            <a:ext cx="441655" cy="189281"/>
-          </a:xfrm>
-          <a:prstGeom prst="rect">
-            <a:avLst/>
-          </a:prstGeom>
-          <a:noFill/>
-          <a:ln/>
-        </p:spPr>
-        <p:txBody>
-          <a:bodyPr wrap="square" lIns="0" tIns="0" rIns="0" bIns="0" rtlCol="0" anchor="ctr"/>
-          <a:lstStyle/>
-          <a:p>
-            <a:pPr algn="ctr" indent="0" marL="0">
-              <a:buNone/>
-            </a:pPr>
-            <a:r>
-              <a:rPr lang="ko-KR" altLang="en-US" sz="750" b="1" dirty="0">
-                <a:solidFill>
-                  <a:srgbClr val="22201F"/>
-                </a:solidFill>
-                <a:latin typeface="맑은 고딕" pitchFamily="34" charset="0"/>
-                <a:ea typeface="맑은 고딕" pitchFamily="34" charset="-122"/>
-                <a:cs typeface="맑은 고딕" pitchFamily="34" charset="-120"/>
-              </a:rPr>
-              <a:t>승인</a:t>
-            </a:r>
-            <a:endParaRPr lang="ko-KR" sz="750" dirty="0"/>
-          </a:p>
-        </p:txBody>
-      </p:sp>
-      <p:sp>
-        <p:nvSpPr>
-          <p:cNvPr id="33" name="Text 30"/>
-          <p:cNvSpPr txBox="1"/>
-          <p:nvPr/>
-        </p:nvSpPr>
-        <p:spPr>
-          <a:xfrm>
-            <a:off x="10588752" y="3878885"/>
-            <a:ext cx="441655" cy="189281"/>
-          </a:xfrm>
-          <a:prstGeom prst="rect">
-            <a:avLst/>
-          </a:prstGeom>
-          <a:noFill/>
-          <a:ln/>
-        </p:spPr>
-        <p:txBody>
-          <a:bodyPr wrap="square" lIns="0" tIns="0" rIns="0" bIns="0" rtlCol="0" anchor="ctr"/>
-          <a:lstStyle/>
-          <a:p>
-            <a:pPr algn="ctr" indent="0" marL="0">
-              <a:buNone/>
-            </a:pPr>
-            <a:r>
-              <a:rPr lang="ko-KR" altLang="en-US" sz="750" b="1" dirty="0">
-                <a:solidFill>
-                  <a:srgbClr val="22201F"/>
-                </a:solidFill>
-                <a:latin typeface="맑은 고딕" pitchFamily="34" charset="0"/>
-                <a:ea typeface="맑은 고딕" pitchFamily="34" charset="-122"/>
-                <a:cs typeface="맑은 고딕" pitchFamily="34" charset="-120"/>
-              </a:rPr>
-              <a:t>거부</a:t>
-            </a:r>
-            <a:endParaRPr lang="ko-KR" sz="750" dirty="0"/>
-          </a:p>
-        </p:txBody>
-      </p:sp>
-      <p:sp>
-        <p:nvSpPr>
-          <p:cNvPr id="34" name="Text 31"/>
-          <p:cNvSpPr txBox="1"/>
-          <p:nvPr/>
-        </p:nvSpPr>
-        <p:spPr>
-          <a:xfrm>
-            <a:off x="11072470" y="3878885"/>
-            <a:ext cx="441655" cy="189281"/>
-          </a:xfrm>
-          <a:prstGeom prst="rect">
-            <a:avLst/>
-          </a:prstGeom>
-          <a:noFill/>
-          <a:ln/>
-        </p:spPr>
-        <p:txBody>
-          <a:bodyPr wrap="square" lIns="0" tIns="0" rIns="0" bIns="0" rtlCol="0" anchor="ctr"/>
-          <a:lstStyle/>
-          <a:p>
-            <a:pPr algn="ctr" indent="0" marL="0">
-              <a:buNone/>
-            </a:pPr>
-            <a:r>
-              <a:rPr lang="ko-KR" altLang="en-US" sz="750" b="1" dirty="0">
-                <a:solidFill>
-                  <a:srgbClr val="22201F"/>
-                </a:solidFill>
-                <a:latin typeface="맑은 고딕" pitchFamily="34" charset="0"/>
-                <a:ea typeface="맑은 고딕" pitchFamily="34" charset="-122"/>
-                <a:cs typeface="맑은 고딕" pitchFamily="34" charset="-120"/>
-              </a:rPr>
-              <a:t>확인</a:t>
-            </a:r>
-            <a:endParaRPr lang="ko-KR" sz="750" dirty="0"/>
-          </a:p>
-        </p:txBody>
-      </p:sp>
-      <p:sp>
-        <p:nvSpPr>
-          <p:cNvPr id="35" name="Text 32"/>
-          <p:cNvSpPr txBox="1"/>
-          <p:nvPr/>
-        </p:nvSpPr>
-        <p:spPr>
-          <a:xfrm>
-            <a:off x="10062972" y="4299509"/>
-            <a:ext cx="1514246" cy="252374"/>
-          </a:xfrm>
-          <a:prstGeom prst="rect">
-            <a:avLst/>
-          </a:prstGeom>
-          <a:noFill/>
-          <a:ln/>
-        </p:spPr>
-        <p:txBody>
-          <a:bodyPr wrap="square" lIns="0" tIns="0" rIns="0" bIns="0" rtlCol="0" anchor="ctr"/>
-          <a:lstStyle/>
-          <a:p>
-            <a:pPr algn="ctr" indent="0" marL="0">
-              <a:buNone/>
-            </a:pPr>
-            <a:r>
-              <a:rPr lang="ko-KR" altLang="en-US" sz="650" b="1" spc="100" kern="0" dirty="0">
-                <a:solidFill>
-                  <a:srgbClr val="45C7C1"/>
-                </a:solidFill>
-                <a:latin typeface="맑은 고딕" pitchFamily="34" charset="0"/>
-                <a:ea typeface="맑은 고딕" pitchFamily="34" charset="-122"/>
-                <a:cs typeface="맑은 고딕" pitchFamily="34" charset="-120"/>
-              </a:rPr>
-              <a:t>DAY 05  CASE 2/6</a:t>
-            </a:r>
-            <a:endParaRPr lang="ko-KR" sz="650" dirty="0"/>
-          </a:p>
-        </p:txBody>
-      </p:sp>
-      <p:sp>
-        <p:nvSpPr>
-          <p:cNvPr id="36" name="Text 33"/>
-          <p:cNvSpPr txBox="1"/>
-          <p:nvPr/>
-        </p:nvSpPr>
-        <p:spPr>
-          <a:xfrm>
-            <a:off x="2377440" y="1234440"/>
-            <a:ext cx="914400" cy="274320"/>
-          </a:xfrm>
-          <a:prstGeom prst="rect">
-            <a:avLst/>
-          </a:prstGeom>
-          <a:noFill/>
-          <a:ln/>
-        </p:spPr>
-        <p:txBody>
-          <a:bodyPr wrap="square" lIns="0" tIns="0" rIns="0" bIns="0" rtlCol="0" anchor="t"/>
-          <a:lstStyle/>
-          <a:p>
-            <a:pPr indent="0" marL="0">
-              <a:buNone/>
-            </a:pPr>
-            <a:r>
-              <a:rPr lang="ko-KR" altLang="en-US" sz="1300" b="1" dirty="0">
-                <a:solidFill>
-                  <a:srgbClr val="19B3B1"/>
-                </a:solidFill>
-                <a:latin typeface="맑은 고딕" pitchFamily="34" charset="0"/>
-                <a:ea typeface="맑은 고딕" pitchFamily="34" charset="-122"/>
-                <a:cs typeface="맑은 고딕" pitchFamily="34" charset="-120"/>
-              </a:rPr>
-              <a:t>A안</a:t>
-            </a:r>
-            <a:endParaRPr lang="ko-KR" sz="1300" dirty="0"/>
-          </a:p>
-        </p:txBody>
-      </p:sp>
-      <p:sp>
-        <p:nvSpPr>
-          <p:cNvPr id="37" name="Text 34"/>
-          <p:cNvSpPr txBox="1"/>
-          <p:nvPr/>
-        </p:nvSpPr>
-        <p:spPr>
-          <a:xfrm>
             <a:off x="2377440" y="1508760"/>
             <a:ext cx="2286000" cy="384048"/>
           </a:xfrm>
@@ -19054,7 +13807,7 @@
       </p:sp>
       <p:sp>
         <p:nvSpPr>
-          <p:cNvPr id="38" name="Text 35"/>
+          <p:cNvPr id="31" name="Text 28"/>
           <p:cNvSpPr txBox="1"/>
           <p:nvPr/>
         </p:nvSpPr>
@@ -19139,7 +13892,7 @@
       </p:sp>
       <p:sp>
         <p:nvSpPr>
-          <p:cNvPr id="39" name="Text 36"/>
+          <p:cNvPr id="32" name="Text 29"/>
           <p:cNvSpPr txBox="1"/>
           <p:nvPr/>
         </p:nvSpPr>
@@ -19170,7 +13923,7 @@
                 <a:ea typeface="맑은 고딕" pitchFamily="34" charset="-122"/>
                 <a:cs typeface="맑은 고딕" pitchFamily="34" charset="-120"/>
               </a:rPr>
-              <a:t>B안</a:t>
+              <a:t>B안 · 기본 시안</a:t>
             </a:r>
             <a:endParaRPr lang="ko-KR" sz="1300" dirty="0"/>
           </a:p>
@@ -19178,7 +13931,7 @@
       </p:sp>
       <p:sp>
         <p:nvSpPr>
-          <p:cNvPr id="40" name="Text 37"/>
+          <p:cNvPr id="33" name="Text 30"/>
           <p:cNvSpPr txBox="1"/>
           <p:nvPr/>
         </p:nvSpPr>
@@ -19217,7 +13970,7 @@
       </p:sp>
       <p:sp>
         <p:nvSpPr>
-          <p:cNvPr id="41" name="Text 38"/>
+          <p:cNvPr id="34" name="Text 31"/>
           <p:cNvSpPr txBox="1"/>
           <p:nvPr/>
         </p:nvSpPr>
@@ -19299,7 +14052,7 @@
       </p:sp>
       <p:sp>
         <p:nvSpPr>
-          <p:cNvPr id="42" name="Shape 39"/>
+          <p:cNvPr id="35" name="Shape 32"/>
           <p:cNvSpPr/>
           <p:nvPr/>
         </p:nvSpPr>
@@ -19326,7 +14079,7 @@
       </p:sp>
       <p:sp>
         <p:nvSpPr>
-          <p:cNvPr id="43" name="Text 40"/>
+          <p:cNvPr id="36" name="Text 33"/>
           <p:cNvSpPr txBox="1"/>
           <p:nvPr/>
         </p:nvSpPr>
@@ -19365,7 +14118,7 @@
       </p:sp>
       <p:sp>
         <p:nvSpPr>
-          <p:cNvPr id="44" name="Shape 41"/>
+          <p:cNvPr id="37" name="Shape 34"/>
           <p:cNvSpPr/>
           <p:nvPr/>
         </p:nvSpPr>
@@ -19387,7 +14140,7 @@
       </p:sp>
       <p:pic>
         <p:nvPicPr>
-          <p:cNvPr id="45" name="Image 1" descr="preencoded.png">    </p:cNvPr>
+          <p:cNvPr id="38" name="Image 1" descr="preencoded.png">    </p:cNvPr>
           <p:cNvPicPr>
             <a:picLocks noChangeAspect="1"/>
           </p:cNvPicPr>
@@ -19411,7 +14164,7 @@
       </p:pic>
       <p:sp>
         <p:nvSpPr>
-          <p:cNvPr id="46" name="Text 42"/>
+          <p:cNvPr id="39" name="Text 35"/>
           <p:cNvSpPr txBox="1"/>
           <p:nvPr/>
         </p:nvSpPr>
@@ -19450,7 +14203,7 @@
       </p:sp>
       <p:sp>
         <p:nvSpPr>
-          <p:cNvPr id="47" name="Shape 43"/>
+          <p:cNvPr id="40" name="Shape 36"/>
           <p:cNvSpPr/>
           <p:nvPr/>
         </p:nvSpPr>
@@ -19472,7 +14225,7 @@
       </p:sp>
       <p:pic>
         <p:nvPicPr>
-          <p:cNvPr id="48" name="Image 2" descr="preencoded.png">    </p:cNvPr>
+          <p:cNvPr id="41" name="Image 2" descr="preencoded.png">    </p:cNvPr>
           <p:cNvPicPr>
             <a:picLocks noChangeAspect="1"/>
           </p:cNvPicPr>
@@ -19496,7 +14249,7 @@
       </p:pic>
       <p:sp>
         <p:nvSpPr>
-          <p:cNvPr id="49" name="Text 44"/>
+          <p:cNvPr id="42" name="Text 37"/>
           <p:cNvSpPr txBox="1"/>
           <p:nvPr/>
         </p:nvSpPr>
@@ -19535,7 +14288,7 @@
       </p:sp>
       <p:sp>
         <p:nvSpPr>
-          <p:cNvPr id="50" name="Shape 45"/>
+          <p:cNvPr id="43" name="Shape 38"/>
           <p:cNvSpPr/>
           <p:nvPr/>
         </p:nvSpPr>
@@ -19557,7 +14310,7 @@
       </p:sp>
       <p:pic>
         <p:nvPicPr>
-          <p:cNvPr id="51" name="Image 3" descr="preencoded.png">    </p:cNvPr>
+          <p:cNvPr id="44" name="Image 3" descr="preencoded.png">    </p:cNvPr>
           <p:cNvPicPr>
             <a:picLocks noChangeAspect="1"/>
           </p:cNvPicPr>
@@ -19581,7 +14334,7 @@
       </p:pic>
       <p:sp>
         <p:nvSpPr>
-          <p:cNvPr id="52" name="Text 46"/>
+          <p:cNvPr id="45" name="Text 39"/>
           <p:cNvSpPr txBox="1"/>
           <p:nvPr/>
         </p:nvSpPr>
@@ -19620,7 +14373,7 @@
       </p:sp>
       <p:sp>
         <p:nvSpPr>
-          <p:cNvPr id="53" name="Shape 47"/>
+          <p:cNvPr id="46" name="Shape 40"/>
           <p:cNvSpPr/>
           <p:nvPr/>
         </p:nvSpPr>
@@ -19642,7 +14395,7 @@
       </p:sp>
       <p:pic>
         <p:nvPicPr>
-          <p:cNvPr id="54" name="Image 4" descr="preencoded.png">    </p:cNvPr>
+          <p:cNvPr id="47" name="Image 4" descr="preencoded.png">    </p:cNvPr>
           <p:cNvPicPr>
             <a:picLocks noChangeAspect="1"/>
           </p:cNvPicPr>
@@ -19666,7 +14419,7 @@
       </p:pic>
       <p:sp>
         <p:nvSpPr>
-          <p:cNvPr id="55" name="Text 48"/>
+          <p:cNvPr id="48" name="Text 41"/>
           <p:cNvSpPr txBox="1"/>
           <p:nvPr/>
         </p:nvSpPr>
@@ -19705,7 +14458,7 @@
       </p:sp>
       <p:sp>
         <p:nvSpPr>
-          <p:cNvPr id="56" name="Text 49"/>
+          <p:cNvPr id="49" name="Text 42"/>
           <p:cNvSpPr txBox="1"/>
           <p:nvPr/>
         </p:nvSpPr>
@@ -19744,14 +14497,14 @@
       </p:sp>
       <p:sp>
         <p:nvSpPr>
-          <p:cNvPr id="57" name="Text 50"/>
+          <p:cNvPr id="50" name="Text 43"/>
           <p:cNvSpPr txBox="1"/>
           <p:nvPr/>
         </p:nvSpPr>
         <p:spPr>
           <a:xfrm>
-            <a:off x="7525512" y="4023360"/>
-            <a:ext cx="2286000" cy="274320"/>
+            <a:off x="7525512" y="3886200"/>
+            <a:ext cx="2286000" cy="457200"/>
           </a:xfrm>
           <a:prstGeom prst="rect">
             <a:avLst/>
@@ -19775,15 +14528,32 @@
                 <a:ea typeface="맑은 고딕" pitchFamily="34" charset="-122"/>
                 <a:cs typeface="맑은 고딕" pitchFamily="34" charset="-120"/>
               </a:rPr>
-              <a:t>※ 두 화면 모두 UI 목업</a:t>
+              <a:t>※ A안은 UI 목업,</a:t>
             </a:r>
             <a:endParaRPr lang="ko-KR" sz="1100" dirty="0"/>
           </a:p>
-        </p:txBody>
-      </p:sp>
-      <p:sp>
-        <p:nvSpPr>
-          <p:cNvPr id="58" name="Shape 51"/>
+          <a:p>
+            <a:pPr algn="r" indent="0" marL="0">
+              <a:buNone/>
+            </a:pPr>
+            <a:r>
+              <a:rPr lang="ko-KR" altLang="en-US" sz="1100" dirty="0">
+                <a:solidFill>
+                  <a:srgbClr val="F2B33D"/>
+                </a:solidFill>
+                <a:latin typeface="맑은 고딕" pitchFamily="34" charset="0"/>
+                <a:ea typeface="맑은 고딕" pitchFamily="34" charset="-122"/>
+                <a:cs typeface="맑은 고딕" pitchFamily="34" charset="-120"/>
+              </a:rPr>
+              <a:t>B안은 HTML 시제품 화면</a:t>
+            </a:r>
+            <a:endParaRPr lang="ko-KR" sz="1100" dirty="0"/>
+          </a:p>
+        </p:txBody>
+      </p:sp>
+      <p:sp>
+        <p:nvSpPr>
+          <p:cNvPr id="51" name="Shape 44"/>
           <p:cNvSpPr/>
           <p:nvPr/>
         </p:nvSpPr>
@@ -19807,7 +14577,7 @@
       </p:sp>
       <p:sp>
         <p:nvSpPr>
-          <p:cNvPr id="59" name="Shape 52"/>
+          <p:cNvPr id="52" name="Shape 45"/>
           <p:cNvSpPr/>
           <p:nvPr/>
         </p:nvSpPr>
@@ -19831,7 +14601,7 @@
       </p:sp>
       <p:sp>
         <p:nvSpPr>
-          <p:cNvPr id="60" name="Text 53"/>
+          <p:cNvPr id="53" name="Text 46"/>
           <p:cNvSpPr txBox="1"/>
           <p:nvPr/>
         </p:nvSpPr>
@@ -19870,7 +14640,7 @@
       </p:sp>
       <p:sp>
         <p:nvSpPr>
-          <p:cNvPr id="61" name="Text 54"/>
+          <p:cNvPr id="54" name="Text 47"/>
           <p:cNvSpPr txBox="1"/>
           <p:nvPr/>
         </p:nvSpPr>
@@ -19909,7 +14679,7 @@
       </p:sp>
       <p:sp>
         <p:nvSpPr>
-          <p:cNvPr id="62" name="Shape 55"/>
+          <p:cNvPr id="55" name="Shape 48"/>
           <p:cNvSpPr/>
           <p:nvPr/>
         </p:nvSpPr>
@@ -19934,7 +14704,7 @@
       </p:sp>
       <p:sp>
         <p:nvSpPr>
-          <p:cNvPr id="63" name="Text 56"/>
+          <p:cNvPr id="56" name="Text 49"/>
           <p:cNvSpPr txBox="1"/>
           <p:nvPr/>
         </p:nvSpPr>
@@ -19959,13 +14729,13 @@
             <a:r>
               <a:rPr lang="ko-KR" altLang="en-US" sz="1200" b="1" dirty="0">
                 <a:solidFill>
-                  <a:srgbClr val="19B3B1"/>
-                </a:solidFill>
-                <a:latin typeface="맑은 고딕" pitchFamily="34" charset="0"/>
-                <a:ea typeface="맑은 고딕" pitchFamily="34" charset="-122"/>
-                <a:cs typeface="맑은 고딕" pitchFamily="34" charset="-120"/>
-              </a:rPr>
-              <a:t>01</a:t>
+                  <a:srgbClr val="F2B33D"/>
+                </a:solidFill>
+                <a:latin typeface="맑은 고딕" pitchFamily="34" charset="0"/>
+                <a:ea typeface="맑은 고딕" pitchFamily="34" charset="-122"/>
+                <a:cs typeface="맑은 고딕" pitchFamily="34" charset="-120"/>
+              </a:rPr>
+              <a:t>01  ✓ 시제품 완료</a:t>
             </a:r>
             <a:endParaRPr lang="ko-KR" sz="1200" dirty="0"/>
           </a:p>
@@ -19973,7 +14743,7 @@
       </p:sp>
       <p:sp>
         <p:nvSpPr>
-          <p:cNvPr id="64" name="Text 57"/>
+          <p:cNvPr id="57" name="Text 50"/>
           <p:cNvSpPr txBox="1"/>
           <p:nvPr/>
         </p:nvSpPr>
@@ -20012,7 +14782,7 @@
       </p:sp>
       <p:sp>
         <p:nvSpPr>
-          <p:cNvPr id="65" name="Shape 58"/>
+          <p:cNvPr id="58" name="Shape 51"/>
           <p:cNvSpPr/>
           <p:nvPr/>
         </p:nvSpPr>
@@ -20037,7 +14807,7 @@
       </p:sp>
       <p:sp>
         <p:nvSpPr>
-          <p:cNvPr id="66" name="Text 59"/>
+          <p:cNvPr id="59" name="Text 52"/>
           <p:cNvSpPr txBox="1"/>
           <p:nvPr/>
         </p:nvSpPr>
@@ -20076,7 +14846,7 @@
       </p:sp>
       <p:sp>
         <p:nvSpPr>
-          <p:cNvPr id="67" name="Text 60"/>
+          <p:cNvPr id="60" name="Text 53"/>
           <p:cNvSpPr txBox="1"/>
           <p:nvPr/>
         </p:nvSpPr>
@@ -20115,7 +14885,7 @@
       </p:sp>
       <p:sp>
         <p:nvSpPr>
-          <p:cNvPr id="68" name="Shape 61"/>
+          <p:cNvPr id="61" name="Shape 54"/>
           <p:cNvSpPr/>
           <p:nvPr/>
         </p:nvSpPr>
@@ -20140,7 +14910,7 @@
       </p:sp>
       <p:sp>
         <p:nvSpPr>
-          <p:cNvPr id="69" name="Text 62"/>
+          <p:cNvPr id="62" name="Text 55"/>
           <p:cNvSpPr txBox="1"/>
           <p:nvPr/>
         </p:nvSpPr>
@@ -20179,7 +14949,7 @@
       </p:sp>
       <p:sp>
         <p:nvSpPr>
-          <p:cNvPr id="70" name="Text 63"/>
+          <p:cNvPr id="63" name="Text 56"/>
           <p:cNvSpPr txBox="1"/>
           <p:nvPr/>
         </p:nvSpPr>
@@ -20218,7 +14988,7 @@
       </p:sp>
       <p:sp>
         <p:nvSpPr>
-          <p:cNvPr id="71" name="Shape 64"/>
+          <p:cNvPr id="64" name="Shape 57"/>
           <p:cNvSpPr/>
           <p:nvPr/>
         </p:nvSpPr>
@@ -20243,7 +15013,7 @@
       </p:sp>
       <p:sp>
         <p:nvSpPr>
-          <p:cNvPr id="72" name="Text 65"/>
+          <p:cNvPr id="65" name="Text 58"/>
           <p:cNvSpPr txBox="1"/>
           <p:nvPr/>
         </p:nvSpPr>
@@ -20282,7 +15052,7 @@
       </p:sp>
       <p:sp>
         <p:nvSpPr>
-          <p:cNvPr id="73" name="Text 66"/>
+          <p:cNvPr id="66" name="Text 59"/>
           <p:cNvSpPr txBox="1"/>
           <p:nvPr/>
         </p:nvSpPr>
@@ -20321,7 +15091,7 @@
       </p:sp>
       <p:sp>
         <p:nvSpPr>
-          <p:cNvPr id="74" name="Shape 67"/>
+          <p:cNvPr id="67" name="Shape 60"/>
           <p:cNvSpPr/>
           <p:nvPr/>
         </p:nvSpPr>
@@ -20346,7 +15116,7 @@
       </p:sp>
       <p:sp>
         <p:nvSpPr>
-          <p:cNvPr id="75" name="Text 68"/>
+          <p:cNvPr id="68" name="Text 61"/>
           <p:cNvSpPr txBox="1"/>
           <p:nvPr/>
         </p:nvSpPr>
@@ -20385,7 +15155,7 @@
       </p:sp>
       <p:sp>
         <p:nvSpPr>
-          <p:cNvPr id="76" name="Text 69"/>
+          <p:cNvPr id="69" name="Text 62"/>
           <p:cNvSpPr txBox="1"/>
           <p:nvPr/>
         </p:nvSpPr>
@@ -20703,7 +15473,7 @@
                 <a:ea typeface="맑은 고딕" pitchFamily="34" charset="-122"/>
                 <a:cs typeface="맑은 고딕" pitchFamily="34" charset="-120"/>
               </a:rPr>
-              <a:t>디지털 안전 규칙을 실제와 닮은 상황에서 연습</a:t>
+              <a:t>모든 세대가 실제와 닮은 상황에서 연습</a:t>
             </a:r>
             <a:endParaRPr lang="ko-KR" sz="1400" dirty="0"/>
           </a:p>
